--- a/presentation.pptx
+++ b/presentation.pptx
@@ -2,7 +2,7 @@
 <file path=ppt/presentation.xml><?xml version="1.0" encoding="utf-8"?>
 <p:presentation xmlns:a="http://schemas.openxmlformats.org/drawingml/2006/main" xmlns:r="http://schemas.openxmlformats.org/officeDocument/2006/relationships" xmlns:mc="http://schemas.openxmlformats.org/markup-compatibility/2006" xmlns:mv="urn:schemas-microsoft-com:mac:vml" xmlns:p="http://schemas.openxmlformats.org/presentationml/2006/main" xmlns:c="http://schemas.openxmlformats.org/drawingml/2006/chart" xmlns:dgm="http://schemas.openxmlformats.org/drawingml/2006/diagram" xmlns:o="urn:schemas-microsoft-com:office:office" xmlns:v="urn:schemas-microsoft-com:vml" xmlns:pvml="urn:schemas-microsoft-com:office:powerpoint" xmlns:com="http://schemas.openxmlformats.org/drawingml/2006/compatibility" xmlns:p14="http://schemas.microsoft.com/office/powerpoint/2010/main" xmlns:p15="http://schemas.microsoft.com/office/powerpoint/2012/main" xmlns:ahyp="http://schemas.microsoft.com/office/drawing/2018/hyperlinkcolor" autoCompressPictures="0" strictFirstAndLastChars="0" saveSubsetFonts="1">
   <p:sldMasterIdLst>
-    <p:sldMasterId id="2147483659" r:id="rId4"/>
+    <p:sldMasterId id="2147483648" r:id="rId4"/>
   </p:sldMasterIdLst>
   <p:notesMasterIdLst>
     <p:notesMasterId r:id="rId5"/>
@@ -265,6 +265,9 @@
         </p15:guide>
       </p15:sldGuideLst>
     </p:ext>
+    <p:ext uri="GoogleSlidesCustomDataVersion2">
+      <go:slidesCustomData xmlns:go="http://customooxmlschemas.google.com/" r:id="rId16" roundtripDataSignature="AMtx7mhAwOPX1zz1xTUPu3r7pwhfQjSMAw=="/>
+    </p:ext>
   </p:extLst>
 </p:presentation>
 </file>
@@ -357,104 +360,239 @@
             <a:noAutofit/>
           </a:bodyPr>
           <a:lstStyle>
-            <a:lvl1pPr indent="-298450" lvl="0" marL="457200">
-              <a:spcBef>
-                <a:spcPts val="0"/>
-              </a:spcBef>
-              <a:spcAft>
-                <a:spcPts val="0"/>
-              </a:spcAft>
+            <a:lvl1pPr indent="-298450" lvl="0" marL="457200" marR="0" rtl="0" algn="l">
+              <a:lnSpc>
+                <a:spcPct val="100000"/>
+              </a:lnSpc>
+              <a:spcBef>
+                <a:spcPts val="0"/>
+              </a:spcBef>
+              <a:spcAft>
+                <a:spcPts val="0"/>
+              </a:spcAft>
+              <a:buClr>
+                <a:srgbClr val="000000"/>
+              </a:buClr>
               <a:buSzPts val="1100"/>
+              <a:buFont typeface="Arial"/>
               <a:buChar char="●"/>
-              <a:defRPr sz="1100"/>
+              <a:defRPr b="0" i="0" sz="1100" u="none" cap="none" strike="noStrike">
+                <a:solidFill>
+                  <a:srgbClr val="000000"/>
+                </a:solidFill>
+                <a:latin typeface="Arial"/>
+                <a:ea typeface="Arial"/>
+                <a:cs typeface="Arial"/>
+                <a:sym typeface="Arial"/>
+              </a:defRPr>
             </a:lvl1pPr>
-            <a:lvl2pPr indent="-298450" lvl="1" marL="914400">
-              <a:spcBef>
-                <a:spcPts val="0"/>
-              </a:spcBef>
-              <a:spcAft>
-                <a:spcPts val="0"/>
-              </a:spcAft>
+            <a:lvl2pPr indent="-298450" lvl="1" marL="914400" marR="0" rtl="0" algn="l">
+              <a:lnSpc>
+                <a:spcPct val="100000"/>
+              </a:lnSpc>
+              <a:spcBef>
+                <a:spcPts val="0"/>
+              </a:spcBef>
+              <a:spcAft>
+                <a:spcPts val="0"/>
+              </a:spcAft>
+              <a:buClr>
+                <a:srgbClr val="000000"/>
+              </a:buClr>
               <a:buSzPts val="1100"/>
+              <a:buFont typeface="Arial"/>
               <a:buChar char="○"/>
-              <a:defRPr sz="1100"/>
+              <a:defRPr b="0" i="0" sz="1100" u="none" cap="none" strike="noStrike">
+                <a:solidFill>
+                  <a:srgbClr val="000000"/>
+                </a:solidFill>
+                <a:latin typeface="Arial"/>
+                <a:ea typeface="Arial"/>
+                <a:cs typeface="Arial"/>
+                <a:sym typeface="Arial"/>
+              </a:defRPr>
             </a:lvl2pPr>
-            <a:lvl3pPr indent="-298450" lvl="2" marL="1371600">
-              <a:spcBef>
-                <a:spcPts val="0"/>
-              </a:spcBef>
-              <a:spcAft>
-                <a:spcPts val="0"/>
-              </a:spcAft>
+            <a:lvl3pPr indent="-298450" lvl="2" marL="1371600" marR="0" rtl="0" algn="l">
+              <a:lnSpc>
+                <a:spcPct val="100000"/>
+              </a:lnSpc>
+              <a:spcBef>
+                <a:spcPts val="0"/>
+              </a:spcBef>
+              <a:spcAft>
+                <a:spcPts val="0"/>
+              </a:spcAft>
+              <a:buClr>
+                <a:srgbClr val="000000"/>
+              </a:buClr>
               <a:buSzPts val="1100"/>
+              <a:buFont typeface="Arial"/>
               <a:buChar char="■"/>
-              <a:defRPr sz="1100"/>
+              <a:defRPr b="0" i="0" sz="1100" u="none" cap="none" strike="noStrike">
+                <a:solidFill>
+                  <a:srgbClr val="000000"/>
+                </a:solidFill>
+                <a:latin typeface="Arial"/>
+                <a:ea typeface="Arial"/>
+                <a:cs typeface="Arial"/>
+                <a:sym typeface="Arial"/>
+              </a:defRPr>
             </a:lvl3pPr>
-            <a:lvl4pPr indent="-298450" lvl="3" marL="1828800">
-              <a:spcBef>
-                <a:spcPts val="0"/>
-              </a:spcBef>
-              <a:spcAft>
-                <a:spcPts val="0"/>
-              </a:spcAft>
+            <a:lvl4pPr indent="-298450" lvl="3" marL="1828800" marR="0" rtl="0" algn="l">
+              <a:lnSpc>
+                <a:spcPct val="100000"/>
+              </a:lnSpc>
+              <a:spcBef>
+                <a:spcPts val="0"/>
+              </a:spcBef>
+              <a:spcAft>
+                <a:spcPts val="0"/>
+              </a:spcAft>
+              <a:buClr>
+                <a:srgbClr val="000000"/>
+              </a:buClr>
               <a:buSzPts val="1100"/>
+              <a:buFont typeface="Arial"/>
               <a:buChar char="●"/>
-              <a:defRPr sz="1100"/>
+              <a:defRPr b="0" i="0" sz="1100" u="none" cap="none" strike="noStrike">
+                <a:solidFill>
+                  <a:srgbClr val="000000"/>
+                </a:solidFill>
+                <a:latin typeface="Arial"/>
+                <a:ea typeface="Arial"/>
+                <a:cs typeface="Arial"/>
+                <a:sym typeface="Arial"/>
+              </a:defRPr>
             </a:lvl4pPr>
-            <a:lvl5pPr indent="-298450" lvl="4" marL="2286000">
-              <a:spcBef>
-                <a:spcPts val="0"/>
-              </a:spcBef>
-              <a:spcAft>
-                <a:spcPts val="0"/>
-              </a:spcAft>
+            <a:lvl5pPr indent="-298450" lvl="4" marL="2286000" marR="0" rtl="0" algn="l">
+              <a:lnSpc>
+                <a:spcPct val="100000"/>
+              </a:lnSpc>
+              <a:spcBef>
+                <a:spcPts val="0"/>
+              </a:spcBef>
+              <a:spcAft>
+                <a:spcPts val="0"/>
+              </a:spcAft>
+              <a:buClr>
+                <a:srgbClr val="000000"/>
+              </a:buClr>
               <a:buSzPts val="1100"/>
+              <a:buFont typeface="Arial"/>
               <a:buChar char="○"/>
-              <a:defRPr sz="1100"/>
+              <a:defRPr b="0" i="0" sz="1100" u="none" cap="none" strike="noStrike">
+                <a:solidFill>
+                  <a:srgbClr val="000000"/>
+                </a:solidFill>
+                <a:latin typeface="Arial"/>
+                <a:ea typeface="Arial"/>
+                <a:cs typeface="Arial"/>
+                <a:sym typeface="Arial"/>
+              </a:defRPr>
             </a:lvl5pPr>
-            <a:lvl6pPr indent="-298450" lvl="5" marL="2743200">
-              <a:spcBef>
-                <a:spcPts val="0"/>
-              </a:spcBef>
-              <a:spcAft>
-                <a:spcPts val="0"/>
-              </a:spcAft>
+            <a:lvl6pPr indent="-298450" lvl="5" marL="2743200" marR="0" rtl="0" algn="l">
+              <a:lnSpc>
+                <a:spcPct val="100000"/>
+              </a:lnSpc>
+              <a:spcBef>
+                <a:spcPts val="0"/>
+              </a:spcBef>
+              <a:spcAft>
+                <a:spcPts val="0"/>
+              </a:spcAft>
+              <a:buClr>
+                <a:srgbClr val="000000"/>
+              </a:buClr>
               <a:buSzPts val="1100"/>
+              <a:buFont typeface="Arial"/>
               <a:buChar char="■"/>
-              <a:defRPr sz="1100"/>
+              <a:defRPr b="0" i="0" sz="1100" u="none" cap="none" strike="noStrike">
+                <a:solidFill>
+                  <a:srgbClr val="000000"/>
+                </a:solidFill>
+                <a:latin typeface="Arial"/>
+                <a:ea typeface="Arial"/>
+                <a:cs typeface="Arial"/>
+                <a:sym typeface="Arial"/>
+              </a:defRPr>
             </a:lvl6pPr>
-            <a:lvl7pPr indent="-298450" lvl="6" marL="3200400">
-              <a:spcBef>
-                <a:spcPts val="0"/>
-              </a:spcBef>
-              <a:spcAft>
-                <a:spcPts val="0"/>
-              </a:spcAft>
+            <a:lvl7pPr indent="-298450" lvl="6" marL="3200400" marR="0" rtl="0" algn="l">
+              <a:lnSpc>
+                <a:spcPct val="100000"/>
+              </a:lnSpc>
+              <a:spcBef>
+                <a:spcPts val="0"/>
+              </a:spcBef>
+              <a:spcAft>
+                <a:spcPts val="0"/>
+              </a:spcAft>
+              <a:buClr>
+                <a:srgbClr val="000000"/>
+              </a:buClr>
               <a:buSzPts val="1100"/>
+              <a:buFont typeface="Arial"/>
               <a:buChar char="●"/>
-              <a:defRPr sz="1100"/>
+              <a:defRPr b="0" i="0" sz="1100" u="none" cap="none" strike="noStrike">
+                <a:solidFill>
+                  <a:srgbClr val="000000"/>
+                </a:solidFill>
+                <a:latin typeface="Arial"/>
+                <a:ea typeface="Arial"/>
+                <a:cs typeface="Arial"/>
+                <a:sym typeface="Arial"/>
+              </a:defRPr>
             </a:lvl7pPr>
-            <a:lvl8pPr indent="-298450" lvl="7" marL="3657600">
-              <a:spcBef>
-                <a:spcPts val="0"/>
-              </a:spcBef>
-              <a:spcAft>
-                <a:spcPts val="0"/>
-              </a:spcAft>
+            <a:lvl8pPr indent="-298450" lvl="7" marL="3657600" marR="0" rtl="0" algn="l">
+              <a:lnSpc>
+                <a:spcPct val="100000"/>
+              </a:lnSpc>
+              <a:spcBef>
+                <a:spcPts val="0"/>
+              </a:spcBef>
+              <a:spcAft>
+                <a:spcPts val="0"/>
+              </a:spcAft>
+              <a:buClr>
+                <a:srgbClr val="000000"/>
+              </a:buClr>
               <a:buSzPts val="1100"/>
+              <a:buFont typeface="Arial"/>
               <a:buChar char="○"/>
-              <a:defRPr sz="1100"/>
+              <a:defRPr b="0" i="0" sz="1100" u="none" cap="none" strike="noStrike">
+                <a:solidFill>
+                  <a:srgbClr val="000000"/>
+                </a:solidFill>
+                <a:latin typeface="Arial"/>
+                <a:ea typeface="Arial"/>
+                <a:cs typeface="Arial"/>
+                <a:sym typeface="Arial"/>
+              </a:defRPr>
             </a:lvl8pPr>
-            <a:lvl9pPr indent="-298450" lvl="8" marL="4114800">
-              <a:spcBef>
-                <a:spcPts val="0"/>
-              </a:spcBef>
-              <a:spcAft>
-                <a:spcPts val="0"/>
-              </a:spcAft>
+            <a:lvl9pPr indent="-298450" lvl="8" marL="4114800" marR="0" rtl="0" algn="l">
+              <a:lnSpc>
+                <a:spcPct val="100000"/>
+              </a:lnSpc>
+              <a:spcBef>
+                <a:spcPts val="0"/>
+              </a:spcBef>
+              <a:spcAft>
+                <a:spcPts val="0"/>
+              </a:spcAft>
+              <a:buClr>
+                <a:srgbClr val="000000"/>
+              </a:buClr>
               <a:buSzPts val="1100"/>
+              <a:buFont typeface="Arial"/>
               <a:buChar char="■"/>
-              <a:defRPr sz="1100"/>
+              <a:defRPr b="0" i="0" sz="1100" u="none" cap="none" strike="noStrike">
+                <a:solidFill>
+                  <a:srgbClr val="000000"/>
+                </a:solidFill>
+                <a:latin typeface="Arial"/>
+                <a:ea typeface="Arial"/>
+                <a:cs typeface="Arial"/>
+                <a:sym typeface="Arial"/>
+              </a:defRPr>
             </a:lvl9pPr>
           </a:lstStyle>
           <a:p/>
@@ -714,7 +852,7 @@
       </p:grpSpPr>
       <p:sp>
         <p:nvSpPr>
-          <p:cNvPr id="51" name="Google Shape;51;p:notes"/>
+          <p:cNvPr id="51" name="Google Shape;51;p1:notes"/>
           <p:cNvSpPr/>
           <p:nvPr>
             <p:ph idx="2" type="sldImg"/>
@@ -745,11 +883,21 @@
               </a:path>
             </a:pathLst>
           </a:custGeom>
+          <a:noFill/>
+          <a:ln cap="flat" cmpd="sng" w="9525">
+            <a:solidFill>
+              <a:srgbClr val="000000"/>
+            </a:solidFill>
+            <a:prstDash val="solid"/>
+            <a:round/>
+            <a:headEnd len="sm" w="sm" type="none"/>
+            <a:tailEnd len="sm" w="sm" type="none"/>
+          </a:ln>
         </p:spPr>
       </p:sp>
       <p:sp>
         <p:nvSpPr>
-          <p:cNvPr id="52" name="Google Shape;52;p:notes"/>
+          <p:cNvPr id="52" name="Google Shape;52;p1:notes"/>
           <p:cNvSpPr txBox="1"/>
           <p:nvPr>
             <p:ph idx="1" type="body"/>
@@ -763,6 +911,10 @@
           <a:prstGeom prst="rect">
             <a:avLst/>
           </a:prstGeom>
+          <a:noFill/>
+          <a:ln>
+            <a:noFill/>
+          </a:ln>
         </p:spPr>
         <p:txBody>
           <a:bodyPr anchorCtr="0" anchor="t" bIns="91425" lIns="91425" spcFirstLastPara="1" rIns="91425" wrap="square" tIns="91425">
@@ -771,12 +923,16 @@
           <a:lstStyle/>
           <a:p>
             <a:pPr indent="0" lvl="0" marL="0" rtl="0" algn="l">
-              <a:spcBef>
-                <a:spcPts val="0"/>
-              </a:spcBef>
-              <a:spcAft>
-                <a:spcPts val="0"/>
-              </a:spcAft>
+              <a:lnSpc>
+                <a:spcPct val="100000"/>
+              </a:lnSpc>
+              <a:spcBef>
+                <a:spcPts val="0"/>
+              </a:spcBef>
+              <a:spcAft>
+                <a:spcPts val="0"/>
+              </a:spcAft>
+              <a:buSzPts val="1100"/>
               <a:buNone/>
             </a:pPr>
             <a:r>
@@ -813,7 +969,7 @@
       </p:grpSpPr>
       <p:sp>
         <p:nvSpPr>
-          <p:cNvPr id="101" name="Google Shape;101;g3fb6c17fe93_0_19:notes"/>
+          <p:cNvPr id="101" name="Google Shape;101;p10:notes"/>
           <p:cNvSpPr/>
           <p:nvPr>
             <p:ph idx="2" type="sldImg"/>
@@ -844,11 +1000,21 @@
               </a:path>
             </a:pathLst>
           </a:custGeom>
+          <a:noFill/>
+          <a:ln cap="flat" cmpd="sng" w="9525">
+            <a:solidFill>
+              <a:srgbClr val="000000"/>
+            </a:solidFill>
+            <a:prstDash val="solid"/>
+            <a:round/>
+            <a:headEnd len="sm" w="sm" type="none"/>
+            <a:tailEnd len="sm" w="sm" type="none"/>
+          </a:ln>
         </p:spPr>
       </p:sp>
       <p:sp>
         <p:nvSpPr>
-          <p:cNvPr id="102" name="Google Shape;102;g3fb6c17fe93_0_19:notes"/>
+          <p:cNvPr id="102" name="Google Shape;102;p10:notes"/>
           <p:cNvSpPr txBox="1"/>
           <p:nvPr>
             <p:ph idx="1" type="body"/>
@@ -862,6 +1028,10 @@
           <a:prstGeom prst="rect">
             <a:avLst/>
           </a:prstGeom>
+          <a:noFill/>
+          <a:ln>
+            <a:noFill/>
+          </a:ln>
         </p:spPr>
         <p:txBody>
           <a:bodyPr anchorCtr="0" anchor="t" bIns="91425" lIns="91425" spcFirstLastPara="1" rIns="91425" wrap="square" tIns="91425">
@@ -870,12 +1040,16 @@
           <a:lstStyle/>
           <a:p>
             <a:pPr indent="0" lvl="0" marL="0" rtl="0" algn="l">
-              <a:spcBef>
-                <a:spcPts val="0"/>
-              </a:spcBef>
-              <a:spcAft>
-                <a:spcPts val="0"/>
-              </a:spcAft>
+              <a:lnSpc>
+                <a:spcPct val="100000"/>
+              </a:lnSpc>
+              <a:spcBef>
+                <a:spcPts val="0"/>
+              </a:spcBef>
+              <a:spcAft>
+                <a:spcPts val="0"/>
+              </a:spcAft>
+              <a:buSzPts val="1100"/>
               <a:buNone/>
             </a:pPr>
             <a:r>
@@ -912,7 +1086,7 @@
       </p:grpSpPr>
       <p:sp>
         <p:nvSpPr>
-          <p:cNvPr id="56" name="Google Shape;56;g3fb6c17fe93_0_2:notes"/>
+          <p:cNvPr id="56" name="Google Shape;56;p2:notes"/>
           <p:cNvSpPr/>
           <p:nvPr>
             <p:ph idx="2" type="sldImg"/>
@@ -943,11 +1117,21 @@
               </a:path>
             </a:pathLst>
           </a:custGeom>
+          <a:noFill/>
+          <a:ln cap="flat" cmpd="sng" w="9525">
+            <a:solidFill>
+              <a:srgbClr val="000000"/>
+            </a:solidFill>
+            <a:prstDash val="solid"/>
+            <a:round/>
+            <a:headEnd len="sm" w="sm" type="none"/>
+            <a:tailEnd len="sm" w="sm" type="none"/>
+          </a:ln>
         </p:spPr>
       </p:sp>
       <p:sp>
         <p:nvSpPr>
-          <p:cNvPr id="57" name="Google Shape;57;g3fb6c17fe93_0_2:notes"/>
+          <p:cNvPr id="57" name="Google Shape;57;p2:notes"/>
           <p:cNvSpPr txBox="1"/>
           <p:nvPr>
             <p:ph idx="1" type="body"/>
@@ -961,6 +1145,10 @@
           <a:prstGeom prst="rect">
             <a:avLst/>
           </a:prstGeom>
+          <a:noFill/>
+          <a:ln>
+            <a:noFill/>
+          </a:ln>
         </p:spPr>
         <p:txBody>
           <a:bodyPr anchorCtr="0" anchor="t" bIns="91425" lIns="91425" spcFirstLastPara="1" rIns="91425" wrap="square" tIns="91425">
@@ -969,12 +1157,16 @@
           <a:lstStyle/>
           <a:p>
             <a:pPr indent="0" lvl="0" marL="0" rtl="0" algn="l">
-              <a:spcBef>
-                <a:spcPts val="0"/>
-              </a:spcBef>
-              <a:spcAft>
-                <a:spcPts val="0"/>
-              </a:spcAft>
+              <a:lnSpc>
+                <a:spcPct val="100000"/>
+              </a:lnSpc>
+              <a:spcBef>
+                <a:spcPts val="0"/>
+              </a:spcBef>
+              <a:spcAft>
+                <a:spcPts val="0"/>
+              </a:spcAft>
+              <a:buSzPts val="1100"/>
               <a:buNone/>
             </a:pPr>
             <a:r>
@@ -1011,7 +1203,7 @@
       </p:grpSpPr>
       <p:sp>
         <p:nvSpPr>
-          <p:cNvPr id="61" name="Google Shape;61;g3fb6c17fe93_0_9:notes"/>
+          <p:cNvPr id="61" name="Google Shape;61;p3:notes"/>
           <p:cNvSpPr/>
           <p:nvPr>
             <p:ph idx="2" type="sldImg"/>
@@ -1042,11 +1234,21 @@
               </a:path>
             </a:pathLst>
           </a:custGeom>
+          <a:noFill/>
+          <a:ln cap="flat" cmpd="sng" w="9525">
+            <a:solidFill>
+              <a:srgbClr val="000000"/>
+            </a:solidFill>
+            <a:prstDash val="solid"/>
+            <a:round/>
+            <a:headEnd len="sm" w="sm" type="none"/>
+            <a:tailEnd len="sm" w="sm" type="none"/>
+          </a:ln>
         </p:spPr>
       </p:sp>
       <p:sp>
         <p:nvSpPr>
-          <p:cNvPr id="62" name="Google Shape;62;g3fb6c17fe93_0_9:notes"/>
+          <p:cNvPr id="62" name="Google Shape;62;p3:notes"/>
           <p:cNvSpPr txBox="1"/>
           <p:nvPr>
             <p:ph idx="1" type="body"/>
@@ -1060,6 +1262,10 @@
           <a:prstGeom prst="rect">
             <a:avLst/>
           </a:prstGeom>
+          <a:noFill/>
+          <a:ln>
+            <a:noFill/>
+          </a:ln>
         </p:spPr>
         <p:txBody>
           <a:bodyPr anchorCtr="0" anchor="t" bIns="91425" lIns="91425" spcFirstLastPara="1" rIns="91425" wrap="square" tIns="91425">
@@ -1068,12 +1274,16 @@
           <a:lstStyle/>
           <a:p>
             <a:pPr indent="0" lvl="0" marL="0" rtl="0" algn="l">
-              <a:spcBef>
-                <a:spcPts val="0"/>
-              </a:spcBef>
-              <a:spcAft>
-                <a:spcPts val="0"/>
-              </a:spcAft>
+              <a:lnSpc>
+                <a:spcPct val="100000"/>
+              </a:lnSpc>
+              <a:spcBef>
+                <a:spcPts val="0"/>
+              </a:spcBef>
+              <a:spcAft>
+                <a:spcPts val="0"/>
+              </a:spcAft>
+              <a:buSzPts val="1100"/>
               <a:buNone/>
             </a:pPr>
             <a:r>
@@ -1110,7 +1320,7 @@
       </p:grpSpPr>
       <p:sp>
         <p:nvSpPr>
-          <p:cNvPr id="68" name="Google Shape;68;g3fb6c17fe93_0_39:notes"/>
+          <p:cNvPr id="68" name="Google Shape;68;p4:notes"/>
           <p:cNvSpPr/>
           <p:nvPr>
             <p:ph idx="2" type="sldImg"/>
@@ -1141,11 +1351,21 @@
               </a:path>
             </a:pathLst>
           </a:custGeom>
+          <a:noFill/>
+          <a:ln cap="flat" cmpd="sng" w="9525">
+            <a:solidFill>
+              <a:srgbClr val="000000"/>
+            </a:solidFill>
+            <a:prstDash val="solid"/>
+            <a:round/>
+            <a:headEnd len="sm" w="sm" type="none"/>
+            <a:tailEnd len="sm" w="sm" type="none"/>
+          </a:ln>
         </p:spPr>
       </p:sp>
       <p:sp>
         <p:nvSpPr>
-          <p:cNvPr id="69" name="Google Shape;69;g3fb6c17fe93_0_39:notes"/>
+          <p:cNvPr id="69" name="Google Shape;69;p4:notes"/>
           <p:cNvSpPr txBox="1"/>
           <p:nvPr>
             <p:ph idx="1" type="body"/>
@@ -1159,6 +1379,10 @@
           <a:prstGeom prst="rect">
             <a:avLst/>
           </a:prstGeom>
+          <a:noFill/>
+          <a:ln>
+            <a:noFill/>
+          </a:ln>
         </p:spPr>
         <p:txBody>
           <a:bodyPr anchorCtr="0" anchor="t" bIns="91425" lIns="91425" spcFirstLastPara="1" rIns="91425" wrap="square" tIns="91425">
@@ -1167,12 +1391,16 @@
           <a:lstStyle/>
           <a:p>
             <a:pPr indent="0" lvl="0" marL="0" rtl="0" algn="l">
-              <a:spcBef>
-                <a:spcPts val="0"/>
-              </a:spcBef>
-              <a:spcAft>
-                <a:spcPts val="0"/>
-              </a:spcAft>
+              <a:lnSpc>
+                <a:spcPct val="100000"/>
+              </a:lnSpc>
+              <a:spcBef>
+                <a:spcPts val="0"/>
+              </a:spcBef>
+              <a:spcAft>
+                <a:spcPts val="0"/>
+              </a:spcAft>
+              <a:buSzPts val="1100"/>
               <a:buNone/>
             </a:pPr>
             <a:r>
@@ -1209,7 +1437,7 @@
       </p:grpSpPr>
       <p:sp>
         <p:nvSpPr>
-          <p:cNvPr id="74" name="Google Shape;74;g3fb6c17fe93_0_44:notes"/>
+          <p:cNvPr id="74" name="Google Shape;74;p5:notes"/>
           <p:cNvSpPr/>
           <p:nvPr>
             <p:ph idx="2" type="sldImg"/>
@@ -1240,11 +1468,21 @@
               </a:path>
             </a:pathLst>
           </a:custGeom>
+          <a:noFill/>
+          <a:ln cap="flat" cmpd="sng" w="9525">
+            <a:solidFill>
+              <a:srgbClr val="000000"/>
+            </a:solidFill>
+            <a:prstDash val="solid"/>
+            <a:round/>
+            <a:headEnd len="sm" w="sm" type="none"/>
+            <a:tailEnd len="sm" w="sm" type="none"/>
+          </a:ln>
         </p:spPr>
       </p:sp>
       <p:sp>
         <p:nvSpPr>
-          <p:cNvPr id="75" name="Google Shape;75;g3fb6c17fe93_0_44:notes"/>
+          <p:cNvPr id="75" name="Google Shape;75;p5:notes"/>
           <p:cNvSpPr txBox="1"/>
           <p:nvPr>
             <p:ph idx="1" type="body"/>
@@ -1258,6 +1496,10 @@
           <a:prstGeom prst="rect">
             <a:avLst/>
           </a:prstGeom>
+          <a:noFill/>
+          <a:ln>
+            <a:noFill/>
+          </a:ln>
         </p:spPr>
         <p:txBody>
           <a:bodyPr anchorCtr="0" anchor="t" bIns="91425" lIns="91425" spcFirstLastPara="1" rIns="91425" wrap="square" tIns="91425">
@@ -1266,12 +1508,16 @@
           <a:lstStyle/>
           <a:p>
             <a:pPr indent="0" lvl="0" marL="0" rtl="0" algn="l">
-              <a:spcBef>
-                <a:spcPts val="0"/>
-              </a:spcBef>
-              <a:spcAft>
-                <a:spcPts val="0"/>
-              </a:spcAft>
+              <a:lnSpc>
+                <a:spcPct val="100000"/>
+              </a:lnSpc>
+              <a:spcBef>
+                <a:spcPts val="0"/>
+              </a:spcBef>
+              <a:spcAft>
+                <a:spcPts val="0"/>
+              </a:spcAft>
+              <a:buSzPts val="1100"/>
               <a:buNone/>
             </a:pPr>
             <a:r>
@@ -1308,7 +1554,7 @@
       </p:grpSpPr>
       <p:sp>
         <p:nvSpPr>
-          <p:cNvPr id="79" name="Google Shape;79;g3fb6c17fe93_0_24:notes"/>
+          <p:cNvPr id="79" name="Google Shape;79;p6:notes"/>
           <p:cNvSpPr/>
           <p:nvPr>
             <p:ph idx="2" type="sldImg"/>
@@ -1339,11 +1585,21 @@
               </a:path>
             </a:pathLst>
           </a:custGeom>
+          <a:noFill/>
+          <a:ln cap="flat" cmpd="sng" w="9525">
+            <a:solidFill>
+              <a:srgbClr val="000000"/>
+            </a:solidFill>
+            <a:prstDash val="solid"/>
+            <a:round/>
+            <a:headEnd len="sm" w="sm" type="none"/>
+            <a:tailEnd len="sm" w="sm" type="none"/>
+          </a:ln>
         </p:spPr>
       </p:sp>
       <p:sp>
         <p:nvSpPr>
-          <p:cNvPr id="80" name="Google Shape;80;g3fb6c17fe93_0_24:notes"/>
+          <p:cNvPr id="80" name="Google Shape;80;p6:notes"/>
           <p:cNvSpPr txBox="1"/>
           <p:nvPr>
             <p:ph idx="1" type="body"/>
@@ -1357,6 +1613,10 @@
           <a:prstGeom prst="rect">
             <a:avLst/>
           </a:prstGeom>
+          <a:noFill/>
+          <a:ln>
+            <a:noFill/>
+          </a:ln>
         </p:spPr>
         <p:txBody>
           <a:bodyPr anchorCtr="0" anchor="t" bIns="91425" lIns="91425" spcFirstLastPara="1" rIns="91425" wrap="square" tIns="91425">
@@ -1365,12 +1625,16 @@
           <a:lstStyle/>
           <a:p>
             <a:pPr indent="0" lvl="0" marL="0" rtl="0" algn="l">
-              <a:spcBef>
-                <a:spcPts val="0"/>
-              </a:spcBef>
-              <a:spcAft>
-                <a:spcPts val="0"/>
-              </a:spcAft>
+              <a:lnSpc>
+                <a:spcPct val="100000"/>
+              </a:lnSpc>
+              <a:spcBef>
+                <a:spcPts val="0"/>
+              </a:spcBef>
+              <a:spcAft>
+                <a:spcPts val="0"/>
+              </a:spcAft>
+              <a:buSzPts val="1100"/>
               <a:buNone/>
             </a:pPr>
             <a:r>
@@ -1407,7 +1671,7 @@
       </p:grpSpPr>
       <p:sp>
         <p:nvSpPr>
-          <p:cNvPr id="84" name="Google Shape;84;g3fb6c17fe93_0_34:notes"/>
+          <p:cNvPr id="84" name="Google Shape;84;p7:notes"/>
           <p:cNvSpPr/>
           <p:nvPr>
             <p:ph idx="2" type="sldImg"/>
@@ -1438,11 +1702,21 @@
               </a:path>
             </a:pathLst>
           </a:custGeom>
+          <a:noFill/>
+          <a:ln cap="flat" cmpd="sng" w="9525">
+            <a:solidFill>
+              <a:srgbClr val="000000"/>
+            </a:solidFill>
+            <a:prstDash val="solid"/>
+            <a:round/>
+            <a:headEnd len="sm" w="sm" type="none"/>
+            <a:tailEnd len="sm" w="sm" type="none"/>
+          </a:ln>
         </p:spPr>
       </p:sp>
       <p:sp>
         <p:nvSpPr>
-          <p:cNvPr id="85" name="Google Shape;85;g3fb6c17fe93_0_34:notes"/>
+          <p:cNvPr id="85" name="Google Shape;85;p7:notes"/>
           <p:cNvSpPr txBox="1"/>
           <p:nvPr>
             <p:ph idx="1" type="body"/>
@@ -1456,6 +1730,10 @@
           <a:prstGeom prst="rect">
             <a:avLst/>
           </a:prstGeom>
+          <a:noFill/>
+          <a:ln>
+            <a:noFill/>
+          </a:ln>
         </p:spPr>
         <p:txBody>
           <a:bodyPr anchorCtr="0" anchor="t" bIns="91425" lIns="91425" spcFirstLastPara="1" rIns="91425" wrap="square" tIns="91425">
@@ -1464,12 +1742,16 @@
           <a:lstStyle/>
           <a:p>
             <a:pPr indent="0" lvl="0" marL="0" rtl="0" algn="l">
-              <a:spcBef>
-                <a:spcPts val="0"/>
-              </a:spcBef>
-              <a:spcAft>
-                <a:spcPts val="0"/>
-              </a:spcAft>
+              <a:lnSpc>
+                <a:spcPct val="100000"/>
+              </a:lnSpc>
+              <a:spcBef>
+                <a:spcPts val="0"/>
+              </a:spcBef>
+              <a:spcAft>
+                <a:spcPts val="0"/>
+              </a:spcAft>
+              <a:buSzPts val="1100"/>
               <a:buNone/>
             </a:pPr>
             <a:r>
@@ -1506,7 +1788,7 @@
       </p:grpSpPr>
       <p:sp>
         <p:nvSpPr>
-          <p:cNvPr id="90" name="Google Shape;90;g3fb6c17fe93_0_29:notes"/>
+          <p:cNvPr id="90" name="Google Shape;90;p8:notes"/>
           <p:cNvSpPr/>
           <p:nvPr>
             <p:ph idx="2" type="sldImg"/>
@@ -1537,11 +1819,21 @@
               </a:path>
             </a:pathLst>
           </a:custGeom>
+          <a:noFill/>
+          <a:ln cap="flat" cmpd="sng" w="9525">
+            <a:solidFill>
+              <a:srgbClr val="000000"/>
+            </a:solidFill>
+            <a:prstDash val="solid"/>
+            <a:round/>
+            <a:headEnd len="sm" w="sm" type="none"/>
+            <a:tailEnd len="sm" w="sm" type="none"/>
+          </a:ln>
         </p:spPr>
       </p:sp>
       <p:sp>
         <p:nvSpPr>
-          <p:cNvPr id="91" name="Google Shape;91;g3fb6c17fe93_0_29:notes"/>
+          <p:cNvPr id="91" name="Google Shape;91;p8:notes"/>
           <p:cNvSpPr txBox="1"/>
           <p:nvPr>
             <p:ph idx="1" type="body"/>
@@ -1555,6 +1847,10 @@
           <a:prstGeom prst="rect">
             <a:avLst/>
           </a:prstGeom>
+          <a:noFill/>
+          <a:ln>
+            <a:noFill/>
+          </a:ln>
         </p:spPr>
         <p:txBody>
           <a:bodyPr anchorCtr="0" anchor="t" bIns="91425" lIns="91425" spcFirstLastPara="1" rIns="91425" wrap="square" tIns="91425">
@@ -1563,12 +1859,16 @@
           <a:lstStyle/>
           <a:p>
             <a:pPr indent="0" lvl="0" marL="0" rtl="0" algn="l">
-              <a:spcBef>
-                <a:spcPts val="0"/>
-              </a:spcBef>
-              <a:spcAft>
-                <a:spcPts val="0"/>
-              </a:spcAft>
+              <a:lnSpc>
+                <a:spcPct val="100000"/>
+              </a:lnSpc>
+              <a:spcBef>
+                <a:spcPts val="0"/>
+              </a:spcBef>
+              <a:spcAft>
+                <a:spcPts val="0"/>
+              </a:spcAft>
+              <a:buSzPts val="1100"/>
               <a:buNone/>
             </a:pPr>
             <a:r>
@@ -1605,7 +1905,7 @@
       </p:grpSpPr>
       <p:sp>
         <p:nvSpPr>
-          <p:cNvPr id="96" name="Google Shape;96;g3fb6c17fe93_0_14:notes"/>
+          <p:cNvPr id="96" name="Google Shape;96;p9:notes"/>
           <p:cNvSpPr/>
           <p:nvPr>
             <p:ph idx="2" type="sldImg"/>
@@ -1636,11 +1936,21 @@
               </a:path>
             </a:pathLst>
           </a:custGeom>
+          <a:noFill/>
+          <a:ln cap="flat" cmpd="sng" w="9525">
+            <a:solidFill>
+              <a:srgbClr val="000000"/>
+            </a:solidFill>
+            <a:prstDash val="solid"/>
+            <a:round/>
+            <a:headEnd len="sm" w="sm" type="none"/>
+            <a:tailEnd len="sm" w="sm" type="none"/>
+          </a:ln>
         </p:spPr>
       </p:sp>
       <p:sp>
         <p:nvSpPr>
-          <p:cNvPr id="97" name="Google Shape;97;g3fb6c17fe93_0_14:notes"/>
+          <p:cNvPr id="97" name="Google Shape;97;p9:notes"/>
           <p:cNvSpPr txBox="1"/>
           <p:nvPr>
             <p:ph idx="1" type="body"/>
@@ -1654,6 +1964,10 @@
           <a:prstGeom prst="rect">
             <a:avLst/>
           </a:prstGeom>
+          <a:noFill/>
+          <a:ln>
+            <a:noFill/>
+          </a:ln>
         </p:spPr>
         <p:txBody>
           <a:bodyPr anchorCtr="0" anchor="t" bIns="91425" lIns="91425" spcFirstLastPara="1" rIns="91425" wrap="square" tIns="91425">
@@ -1662,12 +1976,16 @@
           <a:lstStyle/>
           <a:p>
             <a:pPr indent="0" lvl="0" marL="0" rtl="0" algn="l">
-              <a:spcBef>
-                <a:spcPts val="0"/>
-              </a:spcBef>
-              <a:spcAft>
-                <a:spcPts val="0"/>
-              </a:spcAft>
+              <a:lnSpc>
+                <a:spcPct val="100000"/>
+              </a:lnSpc>
+              <a:spcBef>
+                <a:spcPts val="0"/>
+              </a:spcBef>
+              <a:spcAft>
+                <a:spcPts val="0"/>
+              </a:spcAft>
+              <a:buSzPts val="1100"/>
               <a:buNone/>
             </a:pPr>
             <a:r>
@@ -1704,7 +2022,7 @@
       </p:grpSpPr>
       <p:sp>
         <p:nvSpPr>
-          <p:cNvPr id="10" name="Google Shape;10;p2"/>
+          <p:cNvPr id="10" name="Google Shape;10;p12"/>
           <p:cNvSpPr txBox="1"/>
           <p:nvPr>
             <p:ph type="ctrTitle"/>
@@ -1718,6 +2036,10 @@
           <a:prstGeom prst="rect">
             <a:avLst/>
           </a:prstGeom>
+          <a:noFill/>
+          <a:ln>
+            <a:noFill/>
+          </a:ln>
         </p:spPr>
         <p:txBody>
           <a:bodyPr anchorCtr="0" anchor="b" bIns="91425" lIns="91425" spcFirstLastPara="1" rIns="91425" wrap="square" tIns="91425">
@@ -1725,6 +2047,9 @@
           </a:bodyPr>
           <a:lstStyle>
             <a:lvl1pPr lvl="0" algn="ctr">
+              <a:lnSpc>
+                <a:spcPct val="100000"/>
+              </a:lnSpc>
               <a:spcBef>
                 <a:spcPts val="0"/>
               </a:spcBef>
@@ -1736,6 +2061,9 @@
               <a:defRPr sz="5200"/>
             </a:lvl1pPr>
             <a:lvl2pPr lvl="1" algn="ctr">
+              <a:lnSpc>
+                <a:spcPct val="100000"/>
+              </a:lnSpc>
               <a:spcBef>
                 <a:spcPts val="0"/>
               </a:spcBef>
@@ -1747,6 +2075,9 @@
               <a:defRPr sz="5200"/>
             </a:lvl2pPr>
             <a:lvl3pPr lvl="2" algn="ctr">
+              <a:lnSpc>
+                <a:spcPct val="100000"/>
+              </a:lnSpc>
               <a:spcBef>
                 <a:spcPts val="0"/>
               </a:spcBef>
@@ -1758,6 +2089,9 @@
               <a:defRPr sz="5200"/>
             </a:lvl3pPr>
             <a:lvl4pPr lvl="3" algn="ctr">
+              <a:lnSpc>
+                <a:spcPct val="100000"/>
+              </a:lnSpc>
               <a:spcBef>
                 <a:spcPts val="0"/>
               </a:spcBef>
@@ -1769,6 +2103,9 @@
               <a:defRPr sz="5200"/>
             </a:lvl4pPr>
             <a:lvl5pPr lvl="4" algn="ctr">
+              <a:lnSpc>
+                <a:spcPct val="100000"/>
+              </a:lnSpc>
               <a:spcBef>
                 <a:spcPts val="0"/>
               </a:spcBef>
@@ -1780,6 +2117,9 @@
               <a:defRPr sz="5200"/>
             </a:lvl5pPr>
             <a:lvl6pPr lvl="5" algn="ctr">
+              <a:lnSpc>
+                <a:spcPct val="100000"/>
+              </a:lnSpc>
               <a:spcBef>
                 <a:spcPts val="0"/>
               </a:spcBef>
@@ -1791,6 +2131,9 @@
               <a:defRPr sz="5200"/>
             </a:lvl6pPr>
             <a:lvl7pPr lvl="6" algn="ctr">
+              <a:lnSpc>
+                <a:spcPct val="100000"/>
+              </a:lnSpc>
               <a:spcBef>
                 <a:spcPts val="0"/>
               </a:spcBef>
@@ -1802,6 +2145,9 @@
               <a:defRPr sz="5200"/>
             </a:lvl7pPr>
             <a:lvl8pPr lvl="7" algn="ctr">
+              <a:lnSpc>
+                <a:spcPct val="100000"/>
+              </a:lnSpc>
               <a:spcBef>
                 <a:spcPts val="0"/>
               </a:spcBef>
@@ -1813,6 +2159,9 @@
               <a:defRPr sz="5200"/>
             </a:lvl8pPr>
             <a:lvl9pPr lvl="8" algn="ctr">
+              <a:lnSpc>
+                <a:spcPct val="100000"/>
+              </a:lnSpc>
               <a:spcBef>
                 <a:spcPts val="0"/>
               </a:spcBef>
@@ -1829,7 +2178,7 @@
       </p:sp>
       <p:sp>
         <p:nvSpPr>
-          <p:cNvPr id="11" name="Google Shape;11;p2"/>
+          <p:cNvPr id="11" name="Google Shape;11;p12"/>
           <p:cNvSpPr txBox="1"/>
           <p:nvPr>
             <p:ph idx="1" type="subTitle"/>
@@ -1843,6 +2192,10 @@
           <a:prstGeom prst="rect">
             <a:avLst/>
           </a:prstGeom>
+          <a:noFill/>
+          <a:ln>
+            <a:noFill/>
+          </a:ln>
         </p:spPr>
         <p:txBody>
           <a:bodyPr anchorCtr="0" anchor="t" bIns="91425" lIns="91425" spcFirstLastPara="1" rIns="91425" wrap="square" tIns="91425">
@@ -1981,7 +2334,7 @@
       </p:sp>
       <p:sp>
         <p:nvSpPr>
-          <p:cNvPr id="12" name="Google Shape;12;p2"/>
+          <p:cNvPr id="12" name="Google Shape;12;p12"/>
           <p:cNvSpPr txBox="1"/>
           <p:nvPr>
             <p:ph idx="12" type="sldNum"/>
@@ -1995,47 +2348,249 @@
           <a:prstGeom prst="rect">
             <a:avLst/>
           </a:prstGeom>
+          <a:noFill/>
+          <a:ln>
+            <a:noFill/>
+          </a:ln>
         </p:spPr>
         <p:txBody>
           <a:bodyPr anchorCtr="0" anchor="ctr" bIns="91425" lIns="91425" spcFirstLastPara="1" rIns="91425" wrap="square" tIns="91425">
             <a:normAutofit/>
           </a:bodyPr>
           <a:lstStyle>
-            <a:lvl1pPr lvl="0">
-              <a:buNone/>
-              <a:defRPr/>
+            <a:lvl1pPr indent="0" lvl="0" marL="0" marR="0" algn="r">
+              <a:lnSpc>
+                <a:spcPct val="100000"/>
+              </a:lnSpc>
+              <a:spcBef>
+                <a:spcPts val="0"/>
+              </a:spcBef>
+              <a:spcAft>
+                <a:spcPts val="0"/>
+              </a:spcAft>
+              <a:buClr>
+                <a:srgbClr val="000000"/>
+              </a:buClr>
+              <a:buSzPts val="1000"/>
+              <a:buFont typeface="Arial"/>
+              <a:buNone/>
+              <a:defRPr b="0" i="0" sz="1000" u="none" cap="none" strike="noStrike">
+                <a:solidFill>
+                  <a:schemeClr val="dk2"/>
+                </a:solidFill>
+                <a:latin typeface="Arial"/>
+                <a:ea typeface="Arial"/>
+                <a:cs typeface="Arial"/>
+                <a:sym typeface="Arial"/>
+              </a:defRPr>
             </a:lvl1pPr>
-            <a:lvl2pPr lvl="1">
-              <a:buNone/>
-              <a:defRPr/>
+            <a:lvl2pPr indent="0" lvl="1" marL="0" marR="0" algn="r">
+              <a:lnSpc>
+                <a:spcPct val="100000"/>
+              </a:lnSpc>
+              <a:spcBef>
+                <a:spcPts val="0"/>
+              </a:spcBef>
+              <a:spcAft>
+                <a:spcPts val="0"/>
+              </a:spcAft>
+              <a:buClr>
+                <a:srgbClr val="000000"/>
+              </a:buClr>
+              <a:buSzPts val="1000"/>
+              <a:buFont typeface="Arial"/>
+              <a:buNone/>
+              <a:defRPr b="0" i="0" sz="1000" u="none" cap="none" strike="noStrike">
+                <a:solidFill>
+                  <a:schemeClr val="dk2"/>
+                </a:solidFill>
+                <a:latin typeface="Arial"/>
+                <a:ea typeface="Arial"/>
+                <a:cs typeface="Arial"/>
+                <a:sym typeface="Arial"/>
+              </a:defRPr>
             </a:lvl2pPr>
-            <a:lvl3pPr lvl="2">
-              <a:buNone/>
-              <a:defRPr/>
+            <a:lvl3pPr indent="0" lvl="2" marL="0" marR="0" algn="r">
+              <a:lnSpc>
+                <a:spcPct val="100000"/>
+              </a:lnSpc>
+              <a:spcBef>
+                <a:spcPts val="0"/>
+              </a:spcBef>
+              <a:spcAft>
+                <a:spcPts val="0"/>
+              </a:spcAft>
+              <a:buClr>
+                <a:srgbClr val="000000"/>
+              </a:buClr>
+              <a:buSzPts val="1000"/>
+              <a:buFont typeface="Arial"/>
+              <a:buNone/>
+              <a:defRPr b="0" i="0" sz="1000" u="none" cap="none" strike="noStrike">
+                <a:solidFill>
+                  <a:schemeClr val="dk2"/>
+                </a:solidFill>
+                <a:latin typeface="Arial"/>
+                <a:ea typeface="Arial"/>
+                <a:cs typeface="Arial"/>
+                <a:sym typeface="Arial"/>
+              </a:defRPr>
             </a:lvl3pPr>
-            <a:lvl4pPr lvl="3">
-              <a:buNone/>
-              <a:defRPr/>
+            <a:lvl4pPr indent="0" lvl="3" marL="0" marR="0" algn="r">
+              <a:lnSpc>
+                <a:spcPct val="100000"/>
+              </a:lnSpc>
+              <a:spcBef>
+                <a:spcPts val="0"/>
+              </a:spcBef>
+              <a:spcAft>
+                <a:spcPts val="0"/>
+              </a:spcAft>
+              <a:buClr>
+                <a:srgbClr val="000000"/>
+              </a:buClr>
+              <a:buSzPts val="1000"/>
+              <a:buFont typeface="Arial"/>
+              <a:buNone/>
+              <a:defRPr b="0" i="0" sz="1000" u="none" cap="none" strike="noStrike">
+                <a:solidFill>
+                  <a:schemeClr val="dk2"/>
+                </a:solidFill>
+                <a:latin typeface="Arial"/>
+                <a:ea typeface="Arial"/>
+                <a:cs typeface="Arial"/>
+                <a:sym typeface="Arial"/>
+              </a:defRPr>
             </a:lvl4pPr>
-            <a:lvl5pPr lvl="4">
-              <a:buNone/>
-              <a:defRPr/>
+            <a:lvl5pPr indent="0" lvl="4" marL="0" marR="0" algn="r">
+              <a:lnSpc>
+                <a:spcPct val="100000"/>
+              </a:lnSpc>
+              <a:spcBef>
+                <a:spcPts val="0"/>
+              </a:spcBef>
+              <a:spcAft>
+                <a:spcPts val="0"/>
+              </a:spcAft>
+              <a:buClr>
+                <a:srgbClr val="000000"/>
+              </a:buClr>
+              <a:buSzPts val="1000"/>
+              <a:buFont typeface="Arial"/>
+              <a:buNone/>
+              <a:defRPr b="0" i="0" sz="1000" u="none" cap="none" strike="noStrike">
+                <a:solidFill>
+                  <a:schemeClr val="dk2"/>
+                </a:solidFill>
+                <a:latin typeface="Arial"/>
+                <a:ea typeface="Arial"/>
+                <a:cs typeface="Arial"/>
+                <a:sym typeface="Arial"/>
+              </a:defRPr>
             </a:lvl5pPr>
-            <a:lvl6pPr lvl="5">
-              <a:buNone/>
-              <a:defRPr/>
+            <a:lvl6pPr indent="0" lvl="5" marL="0" marR="0" algn="r">
+              <a:lnSpc>
+                <a:spcPct val="100000"/>
+              </a:lnSpc>
+              <a:spcBef>
+                <a:spcPts val="0"/>
+              </a:spcBef>
+              <a:spcAft>
+                <a:spcPts val="0"/>
+              </a:spcAft>
+              <a:buClr>
+                <a:srgbClr val="000000"/>
+              </a:buClr>
+              <a:buSzPts val="1000"/>
+              <a:buFont typeface="Arial"/>
+              <a:buNone/>
+              <a:defRPr b="0" i="0" sz="1000" u="none" cap="none" strike="noStrike">
+                <a:solidFill>
+                  <a:schemeClr val="dk2"/>
+                </a:solidFill>
+                <a:latin typeface="Arial"/>
+                <a:ea typeface="Arial"/>
+                <a:cs typeface="Arial"/>
+                <a:sym typeface="Arial"/>
+              </a:defRPr>
             </a:lvl6pPr>
-            <a:lvl7pPr lvl="6">
-              <a:buNone/>
-              <a:defRPr/>
+            <a:lvl7pPr indent="0" lvl="6" marL="0" marR="0" algn="r">
+              <a:lnSpc>
+                <a:spcPct val="100000"/>
+              </a:lnSpc>
+              <a:spcBef>
+                <a:spcPts val="0"/>
+              </a:spcBef>
+              <a:spcAft>
+                <a:spcPts val="0"/>
+              </a:spcAft>
+              <a:buClr>
+                <a:srgbClr val="000000"/>
+              </a:buClr>
+              <a:buSzPts val="1000"/>
+              <a:buFont typeface="Arial"/>
+              <a:buNone/>
+              <a:defRPr b="0" i="0" sz="1000" u="none" cap="none" strike="noStrike">
+                <a:solidFill>
+                  <a:schemeClr val="dk2"/>
+                </a:solidFill>
+                <a:latin typeface="Arial"/>
+                <a:ea typeface="Arial"/>
+                <a:cs typeface="Arial"/>
+                <a:sym typeface="Arial"/>
+              </a:defRPr>
             </a:lvl7pPr>
-            <a:lvl8pPr lvl="7">
-              <a:buNone/>
-              <a:defRPr/>
+            <a:lvl8pPr indent="0" lvl="7" marL="0" marR="0" algn="r">
+              <a:lnSpc>
+                <a:spcPct val="100000"/>
+              </a:lnSpc>
+              <a:spcBef>
+                <a:spcPts val="0"/>
+              </a:spcBef>
+              <a:spcAft>
+                <a:spcPts val="0"/>
+              </a:spcAft>
+              <a:buClr>
+                <a:srgbClr val="000000"/>
+              </a:buClr>
+              <a:buSzPts val="1000"/>
+              <a:buFont typeface="Arial"/>
+              <a:buNone/>
+              <a:defRPr b="0" i="0" sz="1000" u="none" cap="none" strike="noStrike">
+                <a:solidFill>
+                  <a:schemeClr val="dk2"/>
+                </a:solidFill>
+                <a:latin typeface="Arial"/>
+                <a:ea typeface="Arial"/>
+                <a:cs typeface="Arial"/>
+                <a:sym typeface="Arial"/>
+              </a:defRPr>
             </a:lvl8pPr>
-            <a:lvl9pPr lvl="8">
-              <a:buNone/>
-              <a:defRPr/>
+            <a:lvl9pPr indent="0" lvl="8" marL="0" marR="0" algn="r">
+              <a:lnSpc>
+                <a:spcPct val="100000"/>
+              </a:lnSpc>
+              <a:spcBef>
+                <a:spcPts val="0"/>
+              </a:spcBef>
+              <a:spcAft>
+                <a:spcPts val="0"/>
+              </a:spcAft>
+              <a:buClr>
+                <a:srgbClr val="000000"/>
+              </a:buClr>
+              <a:buSzPts val="1000"/>
+              <a:buFont typeface="Arial"/>
+              <a:buNone/>
+              <a:defRPr b="0" i="0" sz="1000" u="none" cap="none" strike="noStrike">
+                <a:solidFill>
+                  <a:schemeClr val="dk2"/>
+                </a:solidFill>
+                <a:latin typeface="Arial"/>
+                <a:ea typeface="Arial"/>
+                <a:cs typeface="Arial"/>
+                <a:sym typeface="Arial"/>
+              </a:defRPr>
             </a:lvl9pPr>
           </a:lstStyle>
           <a:p>
@@ -2083,7 +2638,7 @@
       </p:grpSpPr>
       <p:sp>
         <p:nvSpPr>
-          <p:cNvPr id="45" name="Google Shape;45;p11"/>
+          <p:cNvPr id="45" name="Google Shape;45;p21"/>
           <p:cNvSpPr txBox="1"/>
           <p:nvPr>
             <p:ph hasCustomPrompt="1" type="title"/>
@@ -2097,6 +2652,10 @@
           <a:prstGeom prst="rect">
             <a:avLst/>
           </a:prstGeom>
+          <a:noFill/>
+          <a:ln>
+            <a:noFill/>
+          </a:ln>
         </p:spPr>
         <p:txBody>
           <a:bodyPr anchorCtr="0" anchor="b" bIns="91425" lIns="91425" spcFirstLastPara="1" rIns="91425" wrap="square" tIns="91425">
@@ -2104,6 +2663,9 @@
           </a:bodyPr>
           <a:lstStyle>
             <a:lvl1pPr lvl="0" algn="ctr">
+              <a:lnSpc>
+                <a:spcPct val="100000"/>
+              </a:lnSpc>
               <a:spcBef>
                 <a:spcPts val="0"/>
               </a:spcBef>
@@ -2115,6 +2677,9 @@
               <a:defRPr sz="12000"/>
             </a:lvl1pPr>
             <a:lvl2pPr lvl="1" algn="ctr">
+              <a:lnSpc>
+                <a:spcPct val="100000"/>
+              </a:lnSpc>
               <a:spcBef>
                 <a:spcPts val="0"/>
               </a:spcBef>
@@ -2126,6 +2691,9 @@
               <a:defRPr sz="12000"/>
             </a:lvl2pPr>
             <a:lvl3pPr lvl="2" algn="ctr">
+              <a:lnSpc>
+                <a:spcPct val="100000"/>
+              </a:lnSpc>
               <a:spcBef>
                 <a:spcPts val="0"/>
               </a:spcBef>
@@ -2137,6 +2705,9 @@
               <a:defRPr sz="12000"/>
             </a:lvl3pPr>
             <a:lvl4pPr lvl="3" algn="ctr">
+              <a:lnSpc>
+                <a:spcPct val="100000"/>
+              </a:lnSpc>
               <a:spcBef>
                 <a:spcPts val="0"/>
               </a:spcBef>
@@ -2148,6 +2719,9 @@
               <a:defRPr sz="12000"/>
             </a:lvl4pPr>
             <a:lvl5pPr lvl="4" algn="ctr">
+              <a:lnSpc>
+                <a:spcPct val="100000"/>
+              </a:lnSpc>
               <a:spcBef>
                 <a:spcPts val="0"/>
               </a:spcBef>
@@ -2159,6 +2733,9 @@
               <a:defRPr sz="12000"/>
             </a:lvl5pPr>
             <a:lvl6pPr lvl="5" algn="ctr">
+              <a:lnSpc>
+                <a:spcPct val="100000"/>
+              </a:lnSpc>
               <a:spcBef>
                 <a:spcPts val="0"/>
               </a:spcBef>
@@ -2170,6 +2747,9 @@
               <a:defRPr sz="12000"/>
             </a:lvl6pPr>
             <a:lvl7pPr lvl="6" algn="ctr">
+              <a:lnSpc>
+                <a:spcPct val="100000"/>
+              </a:lnSpc>
               <a:spcBef>
                 <a:spcPts val="0"/>
               </a:spcBef>
@@ -2181,6 +2761,9 @@
               <a:defRPr sz="12000"/>
             </a:lvl7pPr>
             <a:lvl8pPr lvl="7" algn="ctr">
+              <a:lnSpc>
+                <a:spcPct val="100000"/>
+              </a:lnSpc>
               <a:spcBef>
                 <a:spcPts val="0"/>
               </a:spcBef>
@@ -2192,6 +2775,9 @@
               <a:defRPr sz="12000"/>
             </a:lvl8pPr>
             <a:lvl9pPr lvl="8" algn="ctr">
+              <a:lnSpc>
+                <a:spcPct val="100000"/>
+              </a:lnSpc>
               <a:spcBef>
                 <a:spcPts val="0"/>
               </a:spcBef>
@@ -2212,7 +2798,7 @@
       </p:sp>
       <p:sp>
         <p:nvSpPr>
-          <p:cNvPr id="46" name="Google Shape;46;p11"/>
+          <p:cNvPr id="46" name="Google Shape;46;p21"/>
           <p:cNvSpPr txBox="1"/>
           <p:nvPr>
             <p:ph idx="1" type="body"/>
@@ -2226,6 +2812,10 @@
           <a:prstGeom prst="rect">
             <a:avLst/>
           </a:prstGeom>
+          <a:noFill/>
+          <a:ln>
+            <a:noFill/>
+          </a:ln>
         </p:spPr>
         <p:txBody>
           <a:bodyPr anchorCtr="0" anchor="t" bIns="91425" lIns="91425" spcFirstLastPara="1" rIns="91425" wrap="square" tIns="91425">
@@ -2233,6 +2823,9 @@
           </a:bodyPr>
           <a:lstStyle>
             <a:lvl1pPr indent="-342900" lvl="0" marL="457200" algn="ctr">
+              <a:lnSpc>
+                <a:spcPct val="115000"/>
+              </a:lnSpc>
               <a:spcBef>
                 <a:spcPts val="0"/>
               </a:spcBef>
@@ -2244,6 +2837,9 @@
               <a:defRPr/>
             </a:lvl1pPr>
             <a:lvl2pPr indent="-317500" lvl="1" marL="914400" algn="ctr">
+              <a:lnSpc>
+                <a:spcPct val="115000"/>
+              </a:lnSpc>
               <a:spcBef>
                 <a:spcPts val="0"/>
               </a:spcBef>
@@ -2255,6 +2851,9 @@
               <a:defRPr/>
             </a:lvl2pPr>
             <a:lvl3pPr indent="-317500" lvl="2" marL="1371600" algn="ctr">
+              <a:lnSpc>
+                <a:spcPct val="115000"/>
+              </a:lnSpc>
               <a:spcBef>
                 <a:spcPts val="0"/>
               </a:spcBef>
@@ -2266,6 +2865,9 @@
               <a:defRPr/>
             </a:lvl3pPr>
             <a:lvl4pPr indent="-317500" lvl="3" marL="1828800" algn="ctr">
+              <a:lnSpc>
+                <a:spcPct val="115000"/>
+              </a:lnSpc>
               <a:spcBef>
                 <a:spcPts val="0"/>
               </a:spcBef>
@@ -2277,6 +2879,9 @@
               <a:defRPr/>
             </a:lvl4pPr>
             <a:lvl5pPr indent="-317500" lvl="4" marL="2286000" algn="ctr">
+              <a:lnSpc>
+                <a:spcPct val="115000"/>
+              </a:lnSpc>
               <a:spcBef>
                 <a:spcPts val="0"/>
               </a:spcBef>
@@ -2288,6 +2893,9 @@
               <a:defRPr/>
             </a:lvl5pPr>
             <a:lvl6pPr indent="-317500" lvl="5" marL="2743200" algn="ctr">
+              <a:lnSpc>
+                <a:spcPct val="115000"/>
+              </a:lnSpc>
               <a:spcBef>
                 <a:spcPts val="0"/>
               </a:spcBef>
@@ -2299,6 +2907,9 @@
               <a:defRPr/>
             </a:lvl6pPr>
             <a:lvl7pPr indent="-317500" lvl="6" marL="3200400" algn="ctr">
+              <a:lnSpc>
+                <a:spcPct val="115000"/>
+              </a:lnSpc>
               <a:spcBef>
                 <a:spcPts val="0"/>
               </a:spcBef>
@@ -2310,6 +2921,9 @@
               <a:defRPr/>
             </a:lvl7pPr>
             <a:lvl8pPr indent="-317500" lvl="7" marL="3657600" algn="ctr">
+              <a:lnSpc>
+                <a:spcPct val="115000"/>
+              </a:lnSpc>
               <a:spcBef>
                 <a:spcPts val="0"/>
               </a:spcBef>
@@ -2321,6 +2935,9 @@
               <a:defRPr/>
             </a:lvl8pPr>
             <a:lvl9pPr indent="-317500" lvl="8" marL="4114800" algn="ctr">
+              <a:lnSpc>
+                <a:spcPct val="115000"/>
+              </a:lnSpc>
               <a:spcBef>
                 <a:spcPts val="0"/>
               </a:spcBef>
@@ -2337,7 +2954,7 @@
       </p:sp>
       <p:sp>
         <p:nvSpPr>
-          <p:cNvPr id="47" name="Google Shape;47;p11"/>
+          <p:cNvPr id="47" name="Google Shape;47;p21"/>
           <p:cNvSpPr txBox="1"/>
           <p:nvPr>
             <p:ph idx="12" type="sldNum"/>
@@ -2351,47 +2968,249 @@
           <a:prstGeom prst="rect">
             <a:avLst/>
           </a:prstGeom>
+          <a:noFill/>
+          <a:ln>
+            <a:noFill/>
+          </a:ln>
         </p:spPr>
         <p:txBody>
           <a:bodyPr anchorCtr="0" anchor="ctr" bIns="91425" lIns="91425" spcFirstLastPara="1" rIns="91425" wrap="square" tIns="91425">
             <a:normAutofit/>
           </a:bodyPr>
           <a:lstStyle>
-            <a:lvl1pPr lvl="0">
-              <a:buNone/>
-              <a:defRPr/>
+            <a:lvl1pPr indent="0" lvl="0" marL="0" marR="0" algn="r">
+              <a:lnSpc>
+                <a:spcPct val="100000"/>
+              </a:lnSpc>
+              <a:spcBef>
+                <a:spcPts val="0"/>
+              </a:spcBef>
+              <a:spcAft>
+                <a:spcPts val="0"/>
+              </a:spcAft>
+              <a:buClr>
+                <a:srgbClr val="000000"/>
+              </a:buClr>
+              <a:buSzPts val="1000"/>
+              <a:buFont typeface="Arial"/>
+              <a:buNone/>
+              <a:defRPr b="0" i="0" sz="1000" u="none" cap="none" strike="noStrike">
+                <a:solidFill>
+                  <a:schemeClr val="dk2"/>
+                </a:solidFill>
+                <a:latin typeface="Arial"/>
+                <a:ea typeface="Arial"/>
+                <a:cs typeface="Arial"/>
+                <a:sym typeface="Arial"/>
+              </a:defRPr>
             </a:lvl1pPr>
-            <a:lvl2pPr lvl="1">
-              <a:buNone/>
-              <a:defRPr/>
+            <a:lvl2pPr indent="0" lvl="1" marL="0" marR="0" algn="r">
+              <a:lnSpc>
+                <a:spcPct val="100000"/>
+              </a:lnSpc>
+              <a:spcBef>
+                <a:spcPts val="0"/>
+              </a:spcBef>
+              <a:spcAft>
+                <a:spcPts val="0"/>
+              </a:spcAft>
+              <a:buClr>
+                <a:srgbClr val="000000"/>
+              </a:buClr>
+              <a:buSzPts val="1000"/>
+              <a:buFont typeface="Arial"/>
+              <a:buNone/>
+              <a:defRPr b="0" i="0" sz="1000" u="none" cap="none" strike="noStrike">
+                <a:solidFill>
+                  <a:schemeClr val="dk2"/>
+                </a:solidFill>
+                <a:latin typeface="Arial"/>
+                <a:ea typeface="Arial"/>
+                <a:cs typeface="Arial"/>
+                <a:sym typeface="Arial"/>
+              </a:defRPr>
             </a:lvl2pPr>
-            <a:lvl3pPr lvl="2">
-              <a:buNone/>
-              <a:defRPr/>
+            <a:lvl3pPr indent="0" lvl="2" marL="0" marR="0" algn="r">
+              <a:lnSpc>
+                <a:spcPct val="100000"/>
+              </a:lnSpc>
+              <a:spcBef>
+                <a:spcPts val="0"/>
+              </a:spcBef>
+              <a:spcAft>
+                <a:spcPts val="0"/>
+              </a:spcAft>
+              <a:buClr>
+                <a:srgbClr val="000000"/>
+              </a:buClr>
+              <a:buSzPts val="1000"/>
+              <a:buFont typeface="Arial"/>
+              <a:buNone/>
+              <a:defRPr b="0" i="0" sz="1000" u="none" cap="none" strike="noStrike">
+                <a:solidFill>
+                  <a:schemeClr val="dk2"/>
+                </a:solidFill>
+                <a:latin typeface="Arial"/>
+                <a:ea typeface="Arial"/>
+                <a:cs typeface="Arial"/>
+                <a:sym typeface="Arial"/>
+              </a:defRPr>
             </a:lvl3pPr>
-            <a:lvl4pPr lvl="3">
-              <a:buNone/>
-              <a:defRPr/>
+            <a:lvl4pPr indent="0" lvl="3" marL="0" marR="0" algn="r">
+              <a:lnSpc>
+                <a:spcPct val="100000"/>
+              </a:lnSpc>
+              <a:spcBef>
+                <a:spcPts val="0"/>
+              </a:spcBef>
+              <a:spcAft>
+                <a:spcPts val="0"/>
+              </a:spcAft>
+              <a:buClr>
+                <a:srgbClr val="000000"/>
+              </a:buClr>
+              <a:buSzPts val="1000"/>
+              <a:buFont typeface="Arial"/>
+              <a:buNone/>
+              <a:defRPr b="0" i="0" sz="1000" u="none" cap="none" strike="noStrike">
+                <a:solidFill>
+                  <a:schemeClr val="dk2"/>
+                </a:solidFill>
+                <a:latin typeface="Arial"/>
+                <a:ea typeface="Arial"/>
+                <a:cs typeface="Arial"/>
+                <a:sym typeface="Arial"/>
+              </a:defRPr>
             </a:lvl4pPr>
-            <a:lvl5pPr lvl="4">
-              <a:buNone/>
-              <a:defRPr/>
+            <a:lvl5pPr indent="0" lvl="4" marL="0" marR="0" algn="r">
+              <a:lnSpc>
+                <a:spcPct val="100000"/>
+              </a:lnSpc>
+              <a:spcBef>
+                <a:spcPts val="0"/>
+              </a:spcBef>
+              <a:spcAft>
+                <a:spcPts val="0"/>
+              </a:spcAft>
+              <a:buClr>
+                <a:srgbClr val="000000"/>
+              </a:buClr>
+              <a:buSzPts val="1000"/>
+              <a:buFont typeface="Arial"/>
+              <a:buNone/>
+              <a:defRPr b="0" i="0" sz="1000" u="none" cap="none" strike="noStrike">
+                <a:solidFill>
+                  <a:schemeClr val="dk2"/>
+                </a:solidFill>
+                <a:latin typeface="Arial"/>
+                <a:ea typeface="Arial"/>
+                <a:cs typeface="Arial"/>
+                <a:sym typeface="Arial"/>
+              </a:defRPr>
             </a:lvl5pPr>
-            <a:lvl6pPr lvl="5">
-              <a:buNone/>
-              <a:defRPr/>
+            <a:lvl6pPr indent="0" lvl="5" marL="0" marR="0" algn="r">
+              <a:lnSpc>
+                <a:spcPct val="100000"/>
+              </a:lnSpc>
+              <a:spcBef>
+                <a:spcPts val="0"/>
+              </a:spcBef>
+              <a:spcAft>
+                <a:spcPts val="0"/>
+              </a:spcAft>
+              <a:buClr>
+                <a:srgbClr val="000000"/>
+              </a:buClr>
+              <a:buSzPts val="1000"/>
+              <a:buFont typeface="Arial"/>
+              <a:buNone/>
+              <a:defRPr b="0" i="0" sz="1000" u="none" cap="none" strike="noStrike">
+                <a:solidFill>
+                  <a:schemeClr val="dk2"/>
+                </a:solidFill>
+                <a:latin typeface="Arial"/>
+                <a:ea typeface="Arial"/>
+                <a:cs typeface="Arial"/>
+                <a:sym typeface="Arial"/>
+              </a:defRPr>
             </a:lvl6pPr>
-            <a:lvl7pPr lvl="6">
-              <a:buNone/>
-              <a:defRPr/>
+            <a:lvl7pPr indent="0" lvl="6" marL="0" marR="0" algn="r">
+              <a:lnSpc>
+                <a:spcPct val="100000"/>
+              </a:lnSpc>
+              <a:spcBef>
+                <a:spcPts val="0"/>
+              </a:spcBef>
+              <a:spcAft>
+                <a:spcPts val="0"/>
+              </a:spcAft>
+              <a:buClr>
+                <a:srgbClr val="000000"/>
+              </a:buClr>
+              <a:buSzPts val="1000"/>
+              <a:buFont typeface="Arial"/>
+              <a:buNone/>
+              <a:defRPr b="0" i="0" sz="1000" u="none" cap="none" strike="noStrike">
+                <a:solidFill>
+                  <a:schemeClr val="dk2"/>
+                </a:solidFill>
+                <a:latin typeface="Arial"/>
+                <a:ea typeface="Arial"/>
+                <a:cs typeface="Arial"/>
+                <a:sym typeface="Arial"/>
+              </a:defRPr>
             </a:lvl7pPr>
-            <a:lvl8pPr lvl="7">
-              <a:buNone/>
-              <a:defRPr/>
+            <a:lvl8pPr indent="0" lvl="7" marL="0" marR="0" algn="r">
+              <a:lnSpc>
+                <a:spcPct val="100000"/>
+              </a:lnSpc>
+              <a:spcBef>
+                <a:spcPts val="0"/>
+              </a:spcBef>
+              <a:spcAft>
+                <a:spcPts val="0"/>
+              </a:spcAft>
+              <a:buClr>
+                <a:srgbClr val="000000"/>
+              </a:buClr>
+              <a:buSzPts val="1000"/>
+              <a:buFont typeface="Arial"/>
+              <a:buNone/>
+              <a:defRPr b="0" i="0" sz="1000" u="none" cap="none" strike="noStrike">
+                <a:solidFill>
+                  <a:schemeClr val="dk2"/>
+                </a:solidFill>
+                <a:latin typeface="Arial"/>
+                <a:ea typeface="Arial"/>
+                <a:cs typeface="Arial"/>
+                <a:sym typeface="Arial"/>
+              </a:defRPr>
             </a:lvl8pPr>
-            <a:lvl9pPr lvl="8">
-              <a:buNone/>
-              <a:defRPr/>
+            <a:lvl9pPr indent="0" lvl="8" marL="0" marR="0" algn="r">
+              <a:lnSpc>
+                <a:spcPct val="100000"/>
+              </a:lnSpc>
+              <a:spcBef>
+                <a:spcPts val="0"/>
+              </a:spcBef>
+              <a:spcAft>
+                <a:spcPts val="0"/>
+              </a:spcAft>
+              <a:buClr>
+                <a:srgbClr val="000000"/>
+              </a:buClr>
+              <a:buSzPts val="1000"/>
+              <a:buFont typeface="Arial"/>
+              <a:buNone/>
+              <a:defRPr b="0" i="0" sz="1000" u="none" cap="none" strike="noStrike">
+                <a:solidFill>
+                  <a:schemeClr val="dk2"/>
+                </a:solidFill>
+                <a:latin typeface="Arial"/>
+                <a:ea typeface="Arial"/>
+                <a:cs typeface="Arial"/>
+                <a:sym typeface="Arial"/>
+              </a:defRPr>
             </a:lvl9pPr>
           </a:lstStyle>
           <a:p>
@@ -2439,7 +3258,7 @@
       </p:grpSpPr>
       <p:sp>
         <p:nvSpPr>
-          <p:cNvPr id="49" name="Google Shape;49;p12"/>
+          <p:cNvPr id="49" name="Google Shape;49;p22"/>
           <p:cNvSpPr txBox="1"/>
           <p:nvPr>
             <p:ph idx="12" type="sldNum"/>
@@ -2453,47 +3272,249 @@
           <a:prstGeom prst="rect">
             <a:avLst/>
           </a:prstGeom>
+          <a:noFill/>
+          <a:ln>
+            <a:noFill/>
+          </a:ln>
         </p:spPr>
         <p:txBody>
           <a:bodyPr anchorCtr="0" anchor="ctr" bIns="91425" lIns="91425" spcFirstLastPara="1" rIns="91425" wrap="square" tIns="91425">
             <a:normAutofit/>
           </a:bodyPr>
           <a:lstStyle>
-            <a:lvl1pPr lvl="0">
-              <a:buNone/>
-              <a:defRPr/>
+            <a:lvl1pPr indent="0" lvl="0" marL="0" marR="0" algn="r">
+              <a:lnSpc>
+                <a:spcPct val="100000"/>
+              </a:lnSpc>
+              <a:spcBef>
+                <a:spcPts val="0"/>
+              </a:spcBef>
+              <a:spcAft>
+                <a:spcPts val="0"/>
+              </a:spcAft>
+              <a:buClr>
+                <a:srgbClr val="000000"/>
+              </a:buClr>
+              <a:buSzPts val="1000"/>
+              <a:buFont typeface="Arial"/>
+              <a:buNone/>
+              <a:defRPr b="0" i="0" sz="1000" u="none" cap="none" strike="noStrike">
+                <a:solidFill>
+                  <a:schemeClr val="dk2"/>
+                </a:solidFill>
+                <a:latin typeface="Arial"/>
+                <a:ea typeface="Arial"/>
+                <a:cs typeface="Arial"/>
+                <a:sym typeface="Arial"/>
+              </a:defRPr>
             </a:lvl1pPr>
-            <a:lvl2pPr lvl="1">
-              <a:buNone/>
-              <a:defRPr/>
+            <a:lvl2pPr indent="0" lvl="1" marL="0" marR="0" algn="r">
+              <a:lnSpc>
+                <a:spcPct val="100000"/>
+              </a:lnSpc>
+              <a:spcBef>
+                <a:spcPts val="0"/>
+              </a:spcBef>
+              <a:spcAft>
+                <a:spcPts val="0"/>
+              </a:spcAft>
+              <a:buClr>
+                <a:srgbClr val="000000"/>
+              </a:buClr>
+              <a:buSzPts val="1000"/>
+              <a:buFont typeface="Arial"/>
+              <a:buNone/>
+              <a:defRPr b="0" i="0" sz="1000" u="none" cap="none" strike="noStrike">
+                <a:solidFill>
+                  <a:schemeClr val="dk2"/>
+                </a:solidFill>
+                <a:latin typeface="Arial"/>
+                <a:ea typeface="Arial"/>
+                <a:cs typeface="Arial"/>
+                <a:sym typeface="Arial"/>
+              </a:defRPr>
             </a:lvl2pPr>
-            <a:lvl3pPr lvl="2">
-              <a:buNone/>
-              <a:defRPr/>
+            <a:lvl3pPr indent="0" lvl="2" marL="0" marR="0" algn="r">
+              <a:lnSpc>
+                <a:spcPct val="100000"/>
+              </a:lnSpc>
+              <a:spcBef>
+                <a:spcPts val="0"/>
+              </a:spcBef>
+              <a:spcAft>
+                <a:spcPts val="0"/>
+              </a:spcAft>
+              <a:buClr>
+                <a:srgbClr val="000000"/>
+              </a:buClr>
+              <a:buSzPts val="1000"/>
+              <a:buFont typeface="Arial"/>
+              <a:buNone/>
+              <a:defRPr b="0" i="0" sz="1000" u="none" cap="none" strike="noStrike">
+                <a:solidFill>
+                  <a:schemeClr val="dk2"/>
+                </a:solidFill>
+                <a:latin typeface="Arial"/>
+                <a:ea typeface="Arial"/>
+                <a:cs typeface="Arial"/>
+                <a:sym typeface="Arial"/>
+              </a:defRPr>
             </a:lvl3pPr>
-            <a:lvl4pPr lvl="3">
-              <a:buNone/>
-              <a:defRPr/>
+            <a:lvl4pPr indent="0" lvl="3" marL="0" marR="0" algn="r">
+              <a:lnSpc>
+                <a:spcPct val="100000"/>
+              </a:lnSpc>
+              <a:spcBef>
+                <a:spcPts val="0"/>
+              </a:spcBef>
+              <a:spcAft>
+                <a:spcPts val="0"/>
+              </a:spcAft>
+              <a:buClr>
+                <a:srgbClr val="000000"/>
+              </a:buClr>
+              <a:buSzPts val="1000"/>
+              <a:buFont typeface="Arial"/>
+              <a:buNone/>
+              <a:defRPr b="0" i="0" sz="1000" u="none" cap="none" strike="noStrike">
+                <a:solidFill>
+                  <a:schemeClr val="dk2"/>
+                </a:solidFill>
+                <a:latin typeface="Arial"/>
+                <a:ea typeface="Arial"/>
+                <a:cs typeface="Arial"/>
+                <a:sym typeface="Arial"/>
+              </a:defRPr>
             </a:lvl4pPr>
-            <a:lvl5pPr lvl="4">
-              <a:buNone/>
-              <a:defRPr/>
+            <a:lvl5pPr indent="0" lvl="4" marL="0" marR="0" algn="r">
+              <a:lnSpc>
+                <a:spcPct val="100000"/>
+              </a:lnSpc>
+              <a:spcBef>
+                <a:spcPts val="0"/>
+              </a:spcBef>
+              <a:spcAft>
+                <a:spcPts val="0"/>
+              </a:spcAft>
+              <a:buClr>
+                <a:srgbClr val="000000"/>
+              </a:buClr>
+              <a:buSzPts val="1000"/>
+              <a:buFont typeface="Arial"/>
+              <a:buNone/>
+              <a:defRPr b="0" i="0" sz="1000" u="none" cap="none" strike="noStrike">
+                <a:solidFill>
+                  <a:schemeClr val="dk2"/>
+                </a:solidFill>
+                <a:latin typeface="Arial"/>
+                <a:ea typeface="Arial"/>
+                <a:cs typeface="Arial"/>
+                <a:sym typeface="Arial"/>
+              </a:defRPr>
             </a:lvl5pPr>
-            <a:lvl6pPr lvl="5">
-              <a:buNone/>
-              <a:defRPr/>
+            <a:lvl6pPr indent="0" lvl="5" marL="0" marR="0" algn="r">
+              <a:lnSpc>
+                <a:spcPct val="100000"/>
+              </a:lnSpc>
+              <a:spcBef>
+                <a:spcPts val="0"/>
+              </a:spcBef>
+              <a:spcAft>
+                <a:spcPts val="0"/>
+              </a:spcAft>
+              <a:buClr>
+                <a:srgbClr val="000000"/>
+              </a:buClr>
+              <a:buSzPts val="1000"/>
+              <a:buFont typeface="Arial"/>
+              <a:buNone/>
+              <a:defRPr b="0" i="0" sz="1000" u="none" cap="none" strike="noStrike">
+                <a:solidFill>
+                  <a:schemeClr val="dk2"/>
+                </a:solidFill>
+                <a:latin typeface="Arial"/>
+                <a:ea typeface="Arial"/>
+                <a:cs typeface="Arial"/>
+                <a:sym typeface="Arial"/>
+              </a:defRPr>
             </a:lvl6pPr>
-            <a:lvl7pPr lvl="6">
-              <a:buNone/>
-              <a:defRPr/>
+            <a:lvl7pPr indent="0" lvl="6" marL="0" marR="0" algn="r">
+              <a:lnSpc>
+                <a:spcPct val="100000"/>
+              </a:lnSpc>
+              <a:spcBef>
+                <a:spcPts val="0"/>
+              </a:spcBef>
+              <a:spcAft>
+                <a:spcPts val="0"/>
+              </a:spcAft>
+              <a:buClr>
+                <a:srgbClr val="000000"/>
+              </a:buClr>
+              <a:buSzPts val="1000"/>
+              <a:buFont typeface="Arial"/>
+              <a:buNone/>
+              <a:defRPr b="0" i="0" sz="1000" u="none" cap="none" strike="noStrike">
+                <a:solidFill>
+                  <a:schemeClr val="dk2"/>
+                </a:solidFill>
+                <a:latin typeface="Arial"/>
+                <a:ea typeface="Arial"/>
+                <a:cs typeface="Arial"/>
+                <a:sym typeface="Arial"/>
+              </a:defRPr>
             </a:lvl7pPr>
-            <a:lvl8pPr lvl="7">
-              <a:buNone/>
-              <a:defRPr/>
+            <a:lvl8pPr indent="0" lvl="7" marL="0" marR="0" algn="r">
+              <a:lnSpc>
+                <a:spcPct val="100000"/>
+              </a:lnSpc>
+              <a:spcBef>
+                <a:spcPts val="0"/>
+              </a:spcBef>
+              <a:spcAft>
+                <a:spcPts val="0"/>
+              </a:spcAft>
+              <a:buClr>
+                <a:srgbClr val="000000"/>
+              </a:buClr>
+              <a:buSzPts val="1000"/>
+              <a:buFont typeface="Arial"/>
+              <a:buNone/>
+              <a:defRPr b="0" i="0" sz="1000" u="none" cap="none" strike="noStrike">
+                <a:solidFill>
+                  <a:schemeClr val="dk2"/>
+                </a:solidFill>
+                <a:latin typeface="Arial"/>
+                <a:ea typeface="Arial"/>
+                <a:cs typeface="Arial"/>
+                <a:sym typeface="Arial"/>
+              </a:defRPr>
             </a:lvl8pPr>
-            <a:lvl9pPr lvl="8">
-              <a:buNone/>
-              <a:defRPr/>
+            <a:lvl9pPr indent="0" lvl="8" marL="0" marR="0" algn="r">
+              <a:lnSpc>
+                <a:spcPct val="100000"/>
+              </a:lnSpc>
+              <a:spcBef>
+                <a:spcPts val="0"/>
+              </a:spcBef>
+              <a:spcAft>
+                <a:spcPts val="0"/>
+              </a:spcAft>
+              <a:buClr>
+                <a:srgbClr val="000000"/>
+              </a:buClr>
+              <a:buSzPts val="1000"/>
+              <a:buFont typeface="Arial"/>
+              <a:buNone/>
+              <a:defRPr b="0" i="0" sz="1000" u="none" cap="none" strike="noStrike">
+                <a:solidFill>
+                  <a:schemeClr val="dk2"/>
+                </a:solidFill>
+                <a:latin typeface="Arial"/>
+                <a:ea typeface="Arial"/>
+                <a:cs typeface="Arial"/>
+                <a:sym typeface="Arial"/>
+              </a:defRPr>
             </a:lvl9pPr>
           </a:lstStyle>
           <a:p>
@@ -2523,8 +3544,8 @@
 </file>
 
 <file path=ppt/slideLayouts/slideLayout2.xml><?xml version="1.0" encoding="utf-8"?>
-<p:sldLayout xmlns:a="http://schemas.openxmlformats.org/drawingml/2006/main" xmlns:r="http://schemas.openxmlformats.org/officeDocument/2006/relationships" xmlns:mc="http://schemas.openxmlformats.org/markup-compatibility/2006" xmlns:mv="urn:schemas-microsoft-com:mac:vml" xmlns:p="http://schemas.openxmlformats.org/presentationml/2006/main" xmlns:c="http://schemas.openxmlformats.org/drawingml/2006/chart" xmlns:dgm="http://schemas.openxmlformats.org/drawingml/2006/diagram" xmlns:o="urn:schemas-microsoft-com:office:office" xmlns:v="urn:schemas-microsoft-com:vml" xmlns:pvml="urn:schemas-microsoft-com:office:powerpoint" xmlns:com="http://schemas.openxmlformats.org/drawingml/2006/compatibility" xmlns:p14="http://schemas.microsoft.com/office/powerpoint/2010/main" xmlns:p15="http://schemas.microsoft.com/office/powerpoint/2012/main" xmlns:ahyp="http://schemas.microsoft.com/office/drawing/2018/hyperlinkcolor" matchingName="Section header" type="secHead">
-  <p:cSld name="SECTION_HEADER">
+<p:sldLayout xmlns:a="http://schemas.openxmlformats.org/drawingml/2006/main" xmlns:r="http://schemas.openxmlformats.org/officeDocument/2006/relationships" xmlns:mc="http://schemas.openxmlformats.org/markup-compatibility/2006" xmlns:mv="urn:schemas-microsoft-com:mac:vml" xmlns:p="http://schemas.openxmlformats.org/presentationml/2006/main" xmlns:c="http://schemas.openxmlformats.org/drawingml/2006/chart" xmlns:dgm="http://schemas.openxmlformats.org/drawingml/2006/diagram" xmlns:o="urn:schemas-microsoft-com:office:office" xmlns:v="urn:schemas-microsoft-com:vml" xmlns:pvml="urn:schemas-microsoft-com:office:powerpoint" xmlns:com="http://schemas.openxmlformats.org/drawingml/2006/compatibility" xmlns:p14="http://schemas.microsoft.com/office/powerpoint/2010/main" xmlns:p15="http://schemas.microsoft.com/office/powerpoint/2012/main" xmlns:ahyp="http://schemas.microsoft.com/office/drawing/2018/hyperlinkcolor" matchingName="Title and body" type="tx">
+  <p:cSld name="TITLE_AND_BODY">
     <p:spTree>
       <p:nvGrpSpPr>
         <p:cNvPr id="13" name="Shape 13"/>
@@ -2541,7 +3562,7 @@
       </p:grpSpPr>
       <p:sp>
         <p:nvSpPr>
-          <p:cNvPr id="14" name="Google Shape;14;p3"/>
+          <p:cNvPr id="14" name="Google Shape;14;p13"/>
           <p:cNvSpPr txBox="1"/>
           <p:nvPr>
             <p:ph type="title"/>
@@ -2549,116 +3570,147 @@
         </p:nvSpPr>
         <p:spPr>
           <a:xfrm>
-            <a:off x="311700" y="2150850"/>
-            <a:ext cx="8520600" cy="841800"/>
+            <a:off x="311700" y="445025"/>
+            <a:ext cx="8520600" cy="572700"/>
           </a:xfrm>
           <a:prstGeom prst="rect">
             <a:avLst/>
           </a:prstGeom>
+          <a:noFill/>
+          <a:ln>
+            <a:noFill/>
+          </a:ln>
         </p:spPr>
         <p:txBody>
-          <a:bodyPr anchorCtr="0" anchor="ctr" bIns="91425" lIns="91425" spcFirstLastPara="1" rIns="91425" wrap="square" tIns="91425">
+          <a:bodyPr anchorCtr="0" anchor="t" bIns="91425" lIns="91425" spcFirstLastPara="1" rIns="91425" wrap="square" tIns="91425">
             <a:normAutofit/>
           </a:bodyPr>
           <a:lstStyle>
-            <a:lvl1pPr lvl="0" algn="ctr">
-              <a:spcBef>
-                <a:spcPts val="0"/>
-              </a:spcBef>
-              <a:spcAft>
-                <a:spcPts val="0"/>
-              </a:spcAft>
-              <a:buSzPts val="3600"/>
-              <a:buNone/>
-              <a:defRPr sz="3600"/>
+            <a:lvl1pPr lvl="0" algn="l">
+              <a:lnSpc>
+                <a:spcPct val="100000"/>
+              </a:lnSpc>
+              <a:spcBef>
+                <a:spcPts val="0"/>
+              </a:spcBef>
+              <a:spcAft>
+                <a:spcPts val="0"/>
+              </a:spcAft>
+              <a:buSzPts val="2800"/>
+              <a:buNone/>
+              <a:defRPr/>
             </a:lvl1pPr>
-            <a:lvl2pPr lvl="1" algn="ctr">
-              <a:spcBef>
-                <a:spcPts val="0"/>
-              </a:spcBef>
-              <a:spcAft>
-                <a:spcPts val="0"/>
-              </a:spcAft>
-              <a:buSzPts val="3600"/>
-              <a:buNone/>
-              <a:defRPr sz="3600"/>
+            <a:lvl2pPr lvl="1" algn="l">
+              <a:lnSpc>
+                <a:spcPct val="100000"/>
+              </a:lnSpc>
+              <a:spcBef>
+                <a:spcPts val="0"/>
+              </a:spcBef>
+              <a:spcAft>
+                <a:spcPts val="0"/>
+              </a:spcAft>
+              <a:buSzPts val="2800"/>
+              <a:buNone/>
+              <a:defRPr/>
             </a:lvl2pPr>
-            <a:lvl3pPr lvl="2" algn="ctr">
-              <a:spcBef>
-                <a:spcPts val="0"/>
-              </a:spcBef>
-              <a:spcAft>
-                <a:spcPts val="0"/>
-              </a:spcAft>
-              <a:buSzPts val="3600"/>
-              <a:buNone/>
-              <a:defRPr sz="3600"/>
+            <a:lvl3pPr lvl="2" algn="l">
+              <a:lnSpc>
+                <a:spcPct val="100000"/>
+              </a:lnSpc>
+              <a:spcBef>
+                <a:spcPts val="0"/>
+              </a:spcBef>
+              <a:spcAft>
+                <a:spcPts val="0"/>
+              </a:spcAft>
+              <a:buSzPts val="2800"/>
+              <a:buNone/>
+              <a:defRPr/>
             </a:lvl3pPr>
-            <a:lvl4pPr lvl="3" algn="ctr">
-              <a:spcBef>
-                <a:spcPts val="0"/>
-              </a:spcBef>
-              <a:spcAft>
-                <a:spcPts val="0"/>
-              </a:spcAft>
-              <a:buSzPts val="3600"/>
-              <a:buNone/>
-              <a:defRPr sz="3600"/>
+            <a:lvl4pPr lvl="3" algn="l">
+              <a:lnSpc>
+                <a:spcPct val="100000"/>
+              </a:lnSpc>
+              <a:spcBef>
+                <a:spcPts val="0"/>
+              </a:spcBef>
+              <a:spcAft>
+                <a:spcPts val="0"/>
+              </a:spcAft>
+              <a:buSzPts val="2800"/>
+              <a:buNone/>
+              <a:defRPr/>
             </a:lvl4pPr>
-            <a:lvl5pPr lvl="4" algn="ctr">
-              <a:spcBef>
-                <a:spcPts val="0"/>
-              </a:spcBef>
-              <a:spcAft>
-                <a:spcPts val="0"/>
-              </a:spcAft>
-              <a:buSzPts val="3600"/>
-              <a:buNone/>
-              <a:defRPr sz="3600"/>
+            <a:lvl5pPr lvl="4" algn="l">
+              <a:lnSpc>
+                <a:spcPct val="100000"/>
+              </a:lnSpc>
+              <a:spcBef>
+                <a:spcPts val="0"/>
+              </a:spcBef>
+              <a:spcAft>
+                <a:spcPts val="0"/>
+              </a:spcAft>
+              <a:buSzPts val="2800"/>
+              <a:buNone/>
+              <a:defRPr/>
             </a:lvl5pPr>
-            <a:lvl6pPr lvl="5" algn="ctr">
-              <a:spcBef>
-                <a:spcPts val="0"/>
-              </a:spcBef>
-              <a:spcAft>
-                <a:spcPts val="0"/>
-              </a:spcAft>
-              <a:buSzPts val="3600"/>
-              <a:buNone/>
-              <a:defRPr sz="3600"/>
+            <a:lvl6pPr lvl="5" algn="l">
+              <a:lnSpc>
+                <a:spcPct val="100000"/>
+              </a:lnSpc>
+              <a:spcBef>
+                <a:spcPts val="0"/>
+              </a:spcBef>
+              <a:spcAft>
+                <a:spcPts val="0"/>
+              </a:spcAft>
+              <a:buSzPts val="2800"/>
+              <a:buNone/>
+              <a:defRPr/>
             </a:lvl6pPr>
-            <a:lvl7pPr lvl="6" algn="ctr">
-              <a:spcBef>
-                <a:spcPts val="0"/>
-              </a:spcBef>
-              <a:spcAft>
-                <a:spcPts val="0"/>
-              </a:spcAft>
-              <a:buSzPts val="3600"/>
-              <a:buNone/>
-              <a:defRPr sz="3600"/>
+            <a:lvl7pPr lvl="6" algn="l">
+              <a:lnSpc>
+                <a:spcPct val="100000"/>
+              </a:lnSpc>
+              <a:spcBef>
+                <a:spcPts val="0"/>
+              </a:spcBef>
+              <a:spcAft>
+                <a:spcPts val="0"/>
+              </a:spcAft>
+              <a:buSzPts val="2800"/>
+              <a:buNone/>
+              <a:defRPr/>
             </a:lvl7pPr>
-            <a:lvl8pPr lvl="7" algn="ctr">
-              <a:spcBef>
-                <a:spcPts val="0"/>
-              </a:spcBef>
-              <a:spcAft>
-                <a:spcPts val="0"/>
-              </a:spcAft>
-              <a:buSzPts val="3600"/>
-              <a:buNone/>
-              <a:defRPr sz="3600"/>
+            <a:lvl8pPr lvl="7" algn="l">
+              <a:lnSpc>
+                <a:spcPct val="100000"/>
+              </a:lnSpc>
+              <a:spcBef>
+                <a:spcPts val="0"/>
+              </a:spcBef>
+              <a:spcAft>
+                <a:spcPts val="0"/>
+              </a:spcAft>
+              <a:buSzPts val="2800"/>
+              <a:buNone/>
+              <a:defRPr/>
             </a:lvl8pPr>
-            <a:lvl9pPr lvl="8" algn="ctr">
-              <a:spcBef>
-                <a:spcPts val="0"/>
-              </a:spcBef>
-              <a:spcAft>
-                <a:spcPts val="0"/>
-              </a:spcAft>
-              <a:buSzPts val="3600"/>
-              <a:buNone/>
-              <a:defRPr sz="3600"/>
+            <a:lvl9pPr lvl="8" algn="l">
+              <a:lnSpc>
+                <a:spcPct val="100000"/>
+              </a:lnSpc>
+              <a:spcBef>
+                <a:spcPts val="0"/>
+              </a:spcBef>
+              <a:spcAft>
+                <a:spcPts val="0"/>
+              </a:spcAft>
+              <a:buSzPts val="2800"/>
+              <a:buNone/>
+              <a:defRPr/>
             </a:lvl9pPr>
           </a:lstStyle>
           <a:p/>
@@ -2666,7 +3718,163 @@
       </p:sp>
       <p:sp>
         <p:nvSpPr>
-          <p:cNvPr id="15" name="Google Shape;15;p3"/>
+          <p:cNvPr id="15" name="Google Shape;15;p13"/>
+          <p:cNvSpPr txBox="1"/>
+          <p:nvPr>
+            <p:ph idx="1" type="body"/>
+          </p:nvPr>
+        </p:nvSpPr>
+        <p:spPr>
+          <a:xfrm>
+            <a:off x="311700" y="1152475"/>
+            <a:ext cx="8520600" cy="3416400"/>
+          </a:xfrm>
+          <a:prstGeom prst="rect">
+            <a:avLst/>
+          </a:prstGeom>
+          <a:noFill/>
+          <a:ln>
+            <a:noFill/>
+          </a:ln>
+        </p:spPr>
+        <p:txBody>
+          <a:bodyPr anchorCtr="0" anchor="t" bIns="91425" lIns="91425" spcFirstLastPara="1" rIns="91425" wrap="square" tIns="91425">
+            <a:normAutofit/>
+          </a:bodyPr>
+          <a:lstStyle>
+            <a:lvl1pPr indent="-342900" lvl="0" marL="457200" algn="l">
+              <a:lnSpc>
+                <a:spcPct val="115000"/>
+              </a:lnSpc>
+              <a:spcBef>
+                <a:spcPts val="0"/>
+              </a:spcBef>
+              <a:spcAft>
+                <a:spcPts val="0"/>
+              </a:spcAft>
+              <a:buSzPts val="1800"/>
+              <a:buChar char="●"/>
+              <a:defRPr/>
+            </a:lvl1pPr>
+            <a:lvl2pPr indent="-317500" lvl="1" marL="914400" algn="l">
+              <a:lnSpc>
+                <a:spcPct val="115000"/>
+              </a:lnSpc>
+              <a:spcBef>
+                <a:spcPts val="0"/>
+              </a:spcBef>
+              <a:spcAft>
+                <a:spcPts val="0"/>
+              </a:spcAft>
+              <a:buSzPts val="1400"/>
+              <a:buChar char="○"/>
+              <a:defRPr/>
+            </a:lvl2pPr>
+            <a:lvl3pPr indent="-317500" lvl="2" marL="1371600" algn="l">
+              <a:lnSpc>
+                <a:spcPct val="115000"/>
+              </a:lnSpc>
+              <a:spcBef>
+                <a:spcPts val="0"/>
+              </a:spcBef>
+              <a:spcAft>
+                <a:spcPts val="0"/>
+              </a:spcAft>
+              <a:buSzPts val="1400"/>
+              <a:buChar char="■"/>
+              <a:defRPr/>
+            </a:lvl3pPr>
+            <a:lvl4pPr indent="-317500" lvl="3" marL="1828800" algn="l">
+              <a:lnSpc>
+                <a:spcPct val="115000"/>
+              </a:lnSpc>
+              <a:spcBef>
+                <a:spcPts val="0"/>
+              </a:spcBef>
+              <a:spcAft>
+                <a:spcPts val="0"/>
+              </a:spcAft>
+              <a:buSzPts val="1400"/>
+              <a:buChar char="●"/>
+              <a:defRPr/>
+            </a:lvl4pPr>
+            <a:lvl5pPr indent="-317500" lvl="4" marL="2286000" algn="l">
+              <a:lnSpc>
+                <a:spcPct val="115000"/>
+              </a:lnSpc>
+              <a:spcBef>
+                <a:spcPts val="0"/>
+              </a:spcBef>
+              <a:spcAft>
+                <a:spcPts val="0"/>
+              </a:spcAft>
+              <a:buSzPts val="1400"/>
+              <a:buChar char="○"/>
+              <a:defRPr/>
+            </a:lvl5pPr>
+            <a:lvl6pPr indent="-317500" lvl="5" marL="2743200" algn="l">
+              <a:lnSpc>
+                <a:spcPct val="115000"/>
+              </a:lnSpc>
+              <a:spcBef>
+                <a:spcPts val="0"/>
+              </a:spcBef>
+              <a:spcAft>
+                <a:spcPts val="0"/>
+              </a:spcAft>
+              <a:buSzPts val="1400"/>
+              <a:buChar char="■"/>
+              <a:defRPr/>
+            </a:lvl6pPr>
+            <a:lvl7pPr indent="-317500" lvl="6" marL="3200400" algn="l">
+              <a:lnSpc>
+                <a:spcPct val="115000"/>
+              </a:lnSpc>
+              <a:spcBef>
+                <a:spcPts val="0"/>
+              </a:spcBef>
+              <a:spcAft>
+                <a:spcPts val="0"/>
+              </a:spcAft>
+              <a:buSzPts val="1400"/>
+              <a:buChar char="●"/>
+              <a:defRPr/>
+            </a:lvl7pPr>
+            <a:lvl8pPr indent="-317500" lvl="7" marL="3657600" algn="l">
+              <a:lnSpc>
+                <a:spcPct val="115000"/>
+              </a:lnSpc>
+              <a:spcBef>
+                <a:spcPts val="0"/>
+              </a:spcBef>
+              <a:spcAft>
+                <a:spcPts val="0"/>
+              </a:spcAft>
+              <a:buSzPts val="1400"/>
+              <a:buChar char="○"/>
+              <a:defRPr/>
+            </a:lvl8pPr>
+            <a:lvl9pPr indent="-317500" lvl="8" marL="4114800" algn="l">
+              <a:lnSpc>
+                <a:spcPct val="115000"/>
+              </a:lnSpc>
+              <a:spcBef>
+                <a:spcPts val="0"/>
+              </a:spcBef>
+              <a:spcAft>
+                <a:spcPts val="0"/>
+              </a:spcAft>
+              <a:buSzPts val="1400"/>
+              <a:buChar char="■"/>
+              <a:defRPr/>
+            </a:lvl9pPr>
+          </a:lstStyle>
+          <a:p/>
+        </p:txBody>
+      </p:sp>
+      <p:sp>
+        <p:nvSpPr>
+          <p:cNvPr id="16" name="Google Shape;16;p13"/>
           <p:cNvSpPr txBox="1"/>
           <p:nvPr>
             <p:ph idx="12" type="sldNum"/>
@@ -2680,47 +3888,249 @@
           <a:prstGeom prst="rect">
             <a:avLst/>
           </a:prstGeom>
+          <a:noFill/>
+          <a:ln>
+            <a:noFill/>
+          </a:ln>
         </p:spPr>
         <p:txBody>
           <a:bodyPr anchorCtr="0" anchor="ctr" bIns="91425" lIns="91425" spcFirstLastPara="1" rIns="91425" wrap="square" tIns="91425">
             <a:normAutofit/>
           </a:bodyPr>
           <a:lstStyle>
-            <a:lvl1pPr lvl="0">
-              <a:buNone/>
-              <a:defRPr/>
+            <a:lvl1pPr indent="0" lvl="0" marL="0" marR="0" algn="r">
+              <a:lnSpc>
+                <a:spcPct val="100000"/>
+              </a:lnSpc>
+              <a:spcBef>
+                <a:spcPts val="0"/>
+              </a:spcBef>
+              <a:spcAft>
+                <a:spcPts val="0"/>
+              </a:spcAft>
+              <a:buClr>
+                <a:srgbClr val="000000"/>
+              </a:buClr>
+              <a:buSzPts val="1000"/>
+              <a:buFont typeface="Arial"/>
+              <a:buNone/>
+              <a:defRPr b="0" i="0" sz="1000" u="none" cap="none" strike="noStrike">
+                <a:solidFill>
+                  <a:schemeClr val="dk2"/>
+                </a:solidFill>
+                <a:latin typeface="Arial"/>
+                <a:ea typeface="Arial"/>
+                <a:cs typeface="Arial"/>
+                <a:sym typeface="Arial"/>
+              </a:defRPr>
             </a:lvl1pPr>
-            <a:lvl2pPr lvl="1">
-              <a:buNone/>
-              <a:defRPr/>
+            <a:lvl2pPr indent="0" lvl="1" marL="0" marR="0" algn="r">
+              <a:lnSpc>
+                <a:spcPct val="100000"/>
+              </a:lnSpc>
+              <a:spcBef>
+                <a:spcPts val="0"/>
+              </a:spcBef>
+              <a:spcAft>
+                <a:spcPts val="0"/>
+              </a:spcAft>
+              <a:buClr>
+                <a:srgbClr val="000000"/>
+              </a:buClr>
+              <a:buSzPts val="1000"/>
+              <a:buFont typeface="Arial"/>
+              <a:buNone/>
+              <a:defRPr b="0" i="0" sz="1000" u="none" cap="none" strike="noStrike">
+                <a:solidFill>
+                  <a:schemeClr val="dk2"/>
+                </a:solidFill>
+                <a:latin typeface="Arial"/>
+                <a:ea typeface="Arial"/>
+                <a:cs typeface="Arial"/>
+                <a:sym typeface="Arial"/>
+              </a:defRPr>
             </a:lvl2pPr>
-            <a:lvl3pPr lvl="2">
-              <a:buNone/>
-              <a:defRPr/>
+            <a:lvl3pPr indent="0" lvl="2" marL="0" marR="0" algn="r">
+              <a:lnSpc>
+                <a:spcPct val="100000"/>
+              </a:lnSpc>
+              <a:spcBef>
+                <a:spcPts val="0"/>
+              </a:spcBef>
+              <a:spcAft>
+                <a:spcPts val="0"/>
+              </a:spcAft>
+              <a:buClr>
+                <a:srgbClr val="000000"/>
+              </a:buClr>
+              <a:buSzPts val="1000"/>
+              <a:buFont typeface="Arial"/>
+              <a:buNone/>
+              <a:defRPr b="0" i="0" sz="1000" u="none" cap="none" strike="noStrike">
+                <a:solidFill>
+                  <a:schemeClr val="dk2"/>
+                </a:solidFill>
+                <a:latin typeface="Arial"/>
+                <a:ea typeface="Arial"/>
+                <a:cs typeface="Arial"/>
+                <a:sym typeface="Arial"/>
+              </a:defRPr>
             </a:lvl3pPr>
-            <a:lvl4pPr lvl="3">
-              <a:buNone/>
-              <a:defRPr/>
+            <a:lvl4pPr indent="0" lvl="3" marL="0" marR="0" algn="r">
+              <a:lnSpc>
+                <a:spcPct val="100000"/>
+              </a:lnSpc>
+              <a:spcBef>
+                <a:spcPts val="0"/>
+              </a:spcBef>
+              <a:spcAft>
+                <a:spcPts val="0"/>
+              </a:spcAft>
+              <a:buClr>
+                <a:srgbClr val="000000"/>
+              </a:buClr>
+              <a:buSzPts val="1000"/>
+              <a:buFont typeface="Arial"/>
+              <a:buNone/>
+              <a:defRPr b="0" i="0" sz="1000" u="none" cap="none" strike="noStrike">
+                <a:solidFill>
+                  <a:schemeClr val="dk2"/>
+                </a:solidFill>
+                <a:latin typeface="Arial"/>
+                <a:ea typeface="Arial"/>
+                <a:cs typeface="Arial"/>
+                <a:sym typeface="Arial"/>
+              </a:defRPr>
             </a:lvl4pPr>
-            <a:lvl5pPr lvl="4">
-              <a:buNone/>
-              <a:defRPr/>
+            <a:lvl5pPr indent="0" lvl="4" marL="0" marR="0" algn="r">
+              <a:lnSpc>
+                <a:spcPct val="100000"/>
+              </a:lnSpc>
+              <a:spcBef>
+                <a:spcPts val="0"/>
+              </a:spcBef>
+              <a:spcAft>
+                <a:spcPts val="0"/>
+              </a:spcAft>
+              <a:buClr>
+                <a:srgbClr val="000000"/>
+              </a:buClr>
+              <a:buSzPts val="1000"/>
+              <a:buFont typeface="Arial"/>
+              <a:buNone/>
+              <a:defRPr b="0" i="0" sz="1000" u="none" cap="none" strike="noStrike">
+                <a:solidFill>
+                  <a:schemeClr val="dk2"/>
+                </a:solidFill>
+                <a:latin typeface="Arial"/>
+                <a:ea typeface="Arial"/>
+                <a:cs typeface="Arial"/>
+                <a:sym typeface="Arial"/>
+              </a:defRPr>
             </a:lvl5pPr>
-            <a:lvl6pPr lvl="5">
-              <a:buNone/>
-              <a:defRPr/>
+            <a:lvl6pPr indent="0" lvl="5" marL="0" marR="0" algn="r">
+              <a:lnSpc>
+                <a:spcPct val="100000"/>
+              </a:lnSpc>
+              <a:spcBef>
+                <a:spcPts val="0"/>
+              </a:spcBef>
+              <a:spcAft>
+                <a:spcPts val="0"/>
+              </a:spcAft>
+              <a:buClr>
+                <a:srgbClr val="000000"/>
+              </a:buClr>
+              <a:buSzPts val="1000"/>
+              <a:buFont typeface="Arial"/>
+              <a:buNone/>
+              <a:defRPr b="0" i="0" sz="1000" u="none" cap="none" strike="noStrike">
+                <a:solidFill>
+                  <a:schemeClr val="dk2"/>
+                </a:solidFill>
+                <a:latin typeface="Arial"/>
+                <a:ea typeface="Arial"/>
+                <a:cs typeface="Arial"/>
+                <a:sym typeface="Arial"/>
+              </a:defRPr>
             </a:lvl6pPr>
-            <a:lvl7pPr lvl="6">
-              <a:buNone/>
-              <a:defRPr/>
+            <a:lvl7pPr indent="0" lvl="6" marL="0" marR="0" algn="r">
+              <a:lnSpc>
+                <a:spcPct val="100000"/>
+              </a:lnSpc>
+              <a:spcBef>
+                <a:spcPts val="0"/>
+              </a:spcBef>
+              <a:spcAft>
+                <a:spcPts val="0"/>
+              </a:spcAft>
+              <a:buClr>
+                <a:srgbClr val="000000"/>
+              </a:buClr>
+              <a:buSzPts val="1000"/>
+              <a:buFont typeface="Arial"/>
+              <a:buNone/>
+              <a:defRPr b="0" i="0" sz="1000" u="none" cap="none" strike="noStrike">
+                <a:solidFill>
+                  <a:schemeClr val="dk2"/>
+                </a:solidFill>
+                <a:latin typeface="Arial"/>
+                <a:ea typeface="Arial"/>
+                <a:cs typeface="Arial"/>
+                <a:sym typeface="Arial"/>
+              </a:defRPr>
             </a:lvl7pPr>
-            <a:lvl8pPr lvl="7">
-              <a:buNone/>
-              <a:defRPr/>
+            <a:lvl8pPr indent="0" lvl="7" marL="0" marR="0" algn="r">
+              <a:lnSpc>
+                <a:spcPct val="100000"/>
+              </a:lnSpc>
+              <a:spcBef>
+                <a:spcPts val="0"/>
+              </a:spcBef>
+              <a:spcAft>
+                <a:spcPts val="0"/>
+              </a:spcAft>
+              <a:buClr>
+                <a:srgbClr val="000000"/>
+              </a:buClr>
+              <a:buSzPts val="1000"/>
+              <a:buFont typeface="Arial"/>
+              <a:buNone/>
+              <a:defRPr b="0" i="0" sz="1000" u="none" cap="none" strike="noStrike">
+                <a:solidFill>
+                  <a:schemeClr val="dk2"/>
+                </a:solidFill>
+                <a:latin typeface="Arial"/>
+                <a:ea typeface="Arial"/>
+                <a:cs typeface="Arial"/>
+                <a:sym typeface="Arial"/>
+              </a:defRPr>
             </a:lvl8pPr>
-            <a:lvl9pPr lvl="8">
-              <a:buNone/>
-              <a:defRPr/>
+            <a:lvl9pPr indent="0" lvl="8" marL="0" marR="0" algn="r">
+              <a:lnSpc>
+                <a:spcPct val="100000"/>
+              </a:lnSpc>
+              <a:spcBef>
+                <a:spcPts val="0"/>
+              </a:spcBef>
+              <a:spcAft>
+                <a:spcPts val="0"/>
+              </a:spcAft>
+              <a:buClr>
+                <a:srgbClr val="000000"/>
+              </a:buClr>
+              <a:buSzPts val="1000"/>
+              <a:buFont typeface="Arial"/>
+              <a:buNone/>
+              <a:defRPr b="0" i="0" sz="1000" u="none" cap="none" strike="noStrike">
+                <a:solidFill>
+                  <a:schemeClr val="dk2"/>
+                </a:solidFill>
+                <a:latin typeface="Arial"/>
+                <a:ea typeface="Arial"/>
+                <a:cs typeface="Arial"/>
+                <a:sym typeface="Arial"/>
+              </a:defRPr>
             </a:lvl9pPr>
           </a:lstStyle>
           <a:p>
@@ -2750,11 +4160,11 @@
 </file>
 
 <file path=ppt/slideLayouts/slideLayout3.xml><?xml version="1.0" encoding="utf-8"?>
-<p:sldLayout xmlns:a="http://schemas.openxmlformats.org/drawingml/2006/main" xmlns:r="http://schemas.openxmlformats.org/officeDocument/2006/relationships" xmlns:mc="http://schemas.openxmlformats.org/markup-compatibility/2006" xmlns:mv="urn:schemas-microsoft-com:mac:vml" xmlns:p="http://schemas.openxmlformats.org/presentationml/2006/main" xmlns:c="http://schemas.openxmlformats.org/drawingml/2006/chart" xmlns:dgm="http://schemas.openxmlformats.org/drawingml/2006/diagram" xmlns:o="urn:schemas-microsoft-com:office:office" xmlns:v="urn:schemas-microsoft-com:vml" xmlns:pvml="urn:schemas-microsoft-com:office:powerpoint" xmlns:com="http://schemas.openxmlformats.org/drawingml/2006/compatibility" xmlns:p14="http://schemas.microsoft.com/office/powerpoint/2010/main" xmlns:p15="http://schemas.microsoft.com/office/powerpoint/2012/main" xmlns:ahyp="http://schemas.microsoft.com/office/drawing/2018/hyperlinkcolor" matchingName="Title and body" type="tx">
-  <p:cSld name="TITLE_AND_BODY">
+<p:sldLayout xmlns:a="http://schemas.openxmlformats.org/drawingml/2006/main" xmlns:r="http://schemas.openxmlformats.org/officeDocument/2006/relationships" xmlns:mc="http://schemas.openxmlformats.org/markup-compatibility/2006" xmlns:mv="urn:schemas-microsoft-com:mac:vml" xmlns:p="http://schemas.openxmlformats.org/presentationml/2006/main" xmlns:c="http://schemas.openxmlformats.org/drawingml/2006/chart" xmlns:dgm="http://schemas.openxmlformats.org/drawingml/2006/diagram" xmlns:o="urn:schemas-microsoft-com:office:office" xmlns:v="urn:schemas-microsoft-com:vml" xmlns:pvml="urn:schemas-microsoft-com:office:powerpoint" xmlns:com="http://schemas.openxmlformats.org/drawingml/2006/compatibility" xmlns:p14="http://schemas.microsoft.com/office/powerpoint/2010/main" xmlns:p15="http://schemas.microsoft.com/office/powerpoint/2012/main" xmlns:ahyp="http://schemas.microsoft.com/office/drawing/2018/hyperlinkcolor" matchingName="Section header" type="secHead">
+  <p:cSld name="SECTION_HEADER">
     <p:spTree>
       <p:nvGrpSpPr>
-        <p:cNvPr id="16" name="Shape 16"/>
+        <p:cNvPr id="17" name="Shape 17"/>
         <p:cNvGrpSpPr/>
         <p:nvPr/>
       </p:nvGrpSpPr>
@@ -2768,7 +4178,7 @@
       </p:grpSpPr>
       <p:sp>
         <p:nvSpPr>
-          <p:cNvPr id="17" name="Google Shape;17;p4"/>
+          <p:cNvPr id="18" name="Google Shape;18;p14"/>
           <p:cNvSpPr txBox="1"/>
           <p:nvPr>
             <p:ph type="title"/>
@@ -2776,116 +4186,147 @@
         </p:nvSpPr>
         <p:spPr>
           <a:xfrm>
-            <a:off x="311700" y="445025"/>
-            <a:ext cx="8520600" cy="572700"/>
+            <a:off x="311700" y="2150850"/>
+            <a:ext cx="8520600" cy="841800"/>
           </a:xfrm>
           <a:prstGeom prst="rect">
             <a:avLst/>
           </a:prstGeom>
+          <a:noFill/>
+          <a:ln>
+            <a:noFill/>
+          </a:ln>
         </p:spPr>
         <p:txBody>
-          <a:bodyPr anchorCtr="0" anchor="t" bIns="91425" lIns="91425" spcFirstLastPara="1" rIns="91425" wrap="square" tIns="91425">
+          <a:bodyPr anchorCtr="0" anchor="ctr" bIns="91425" lIns="91425" spcFirstLastPara="1" rIns="91425" wrap="square" tIns="91425">
             <a:normAutofit/>
           </a:bodyPr>
           <a:lstStyle>
-            <a:lvl1pPr lvl="0">
-              <a:spcBef>
-                <a:spcPts val="0"/>
-              </a:spcBef>
-              <a:spcAft>
-                <a:spcPts val="0"/>
-              </a:spcAft>
-              <a:buSzPts val="2800"/>
-              <a:buNone/>
-              <a:defRPr/>
+            <a:lvl1pPr lvl="0" algn="ctr">
+              <a:lnSpc>
+                <a:spcPct val="100000"/>
+              </a:lnSpc>
+              <a:spcBef>
+                <a:spcPts val="0"/>
+              </a:spcBef>
+              <a:spcAft>
+                <a:spcPts val="0"/>
+              </a:spcAft>
+              <a:buSzPts val="3600"/>
+              <a:buNone/>
+              <a:defRPr sz="3600"/>
             </a:lvl1pPr>
-            <a:lvl2pPr lvl="1">
-              <a:spcBef>
-                <a:spcPts val="0"/>
-              </a:spcBef>
-              <a:spcAft>
-                <a:spcPts val="0"/>
-              </a:spcAft>
-              <a:buSzPts val="2800"/>
-              <a:buNone/>
-              <a:defRPr/>
+            <a:lvl2pPr lvl="1" algn="ctr">
+              <a:lnSpc>
+                <a:spcPct val="100000"/>
+              </a:lnSpc>
+              <a:spcBef>
+                <a:spcPts val="0"/>
+              </a:spcBef>
+              <a:spcAft>
+                <a:spcPts val="0"/>
+              </a:spcAft>
+              <a:buSzPts val="3600"/>
+              <a:buNone/>
+              <a:defRPr sz="3600"/>
             </a:lvl2pPr>
-            <a:lvl3pPr lvl="2">
-              <a:spcBef>
-                <a:spcPts val="0"/>
-              </a:spcBef>
-              <a:spcAft>
-                <a:spcPts val="0"/>
-              </a:spcAft>
-              <a:buSzPts val="2800"/>
-              <a:buNone/>
-              <a:defRPr/>
+            <a:lvl3pPr lvl="2" algn="ctr">
+              <a:lnSpc>
+                <a:spcPct val="100000"/>
+              </a:lnSpc>
+              <a:spcBef>
+                <a:spcPts val="0"/>
+              </a:spcBef>
+              <a:spcAft>
+                <a:spcPts val="0"/>
+              </a:spcAft>
+              <a:buSzPts val="3600"/>
+              <a:buNone/>
+              <a:defRPr sz="3600"/>
             </a:lvl3pPr>
-            <a:lvl4pPr lvl="3">
-              <a:spcBef>
-                <a:spcPts val="0"/>
-              </a:spcBef>
-              <a:spcAft>
-                <a:spcPts val="0"/>
-              </a:spcAft>
-              <a:buSzPts val="2800"/>
-              <a:buNone/>
-              <a:defRPr/>
+            <a:lvl4pPr lvl="3" algn="ctr">
+              <a:lnSpc>
+                <a:spcPct val="100000"/>
+              </a:lnSpc>
+              <a:spcBef>
+                <a:spcPts val="0"/>
+              </a:spcBef>
+              <a:spcAft>
+                <a:spcPts val="0"/>
+              </a:spcAft>
+              <a:buSzPts val="3600"/>
+              <a:buNone/>
+              <a:defRPr sz="3600"/>
             </a:lvl4pPr>
-            <a:lvl5pPr lvl="4">
-              <a:spcBef>
-                <a:spcPts val="0"/>
-              </a:spcBef>
-              <a:spcAft>
-                <a:spcPts val="0"/>
-              </a:spcAft>
-              <a:buSzPts val="2800"/>
-              <a:buNone/>
-              <a:defRPr/>
+            <a:lvl5pPr lvl="4" algn="ctr">
+              <a:lnSpc>
+                <a:spcPct val="100000"/>
+              </a:lnSpc>
+              <a:spcBef>
+                <a:spcPts val="0"/>
+              </a:spcBef>
+              <a:spcAft>
+                <a:spcPts val="0"/>
+              </a:spcAft>
+              <a:buSzPts val="3600"/>
+              <a:buNone/>
+              <a:defRPr sz="3600"/>
             </a:lvl5pPr>
-            <a:lvl6pPr lvl="5">
-              <a:spcBef>
-                <a:spcPts val="0"/>
-              </a:spcBef>
-              <a:spcAft>
-                <a:spcPts val="0"/>
-              </a:spcAft>
-              <a:buSzPts val="2800"/>
-              <a:buNone/>
-              <a:defRPr/>
+            <a:lvl6pPr lvl="5" algn="ctr">
+              <a:lnSpc>
+                <a:spcPct val="100000"/>
+              </a:lnSpc>
+              <a:spcBef>
+                <a:spcPts val="0"/>
+              </a:spcBef>
+              <a:spcAft>
+                <a:spcPts val="0"/>
+              </a:spcAft>
+              <a:buSzPts val="3600"/>
+              <a:buNone/>
+              <a:defRPr sz="3600"/>
             </a:lvl6pPr>
-            <a:lvl7pPr lvl="6">
-              <a:spcBef>
-                <a:spcPts val="0"/>
-              </a:spcBef>
-              <a:spcAft>
-                <a:spcPts val="0"/>
-              </a:spcAft>
-              <a:buSzPts val="2800"/>
-              <a:buNone/>
-              <a:defRPr/>
+            <a:lvl7pPr lvl="6" algn="ctr">
+              <a:lnSpc>
+                <a:spcPct val="100000"/>
+              </a:lnSpc>
+              <a:spcBef>
+                <a:spcPts val="0"/>
+              </a:spcBef>
+              <a:spcAft>
+                <a:spcPts val="0"/>
+              </a:spcAft>
+              <a:buSzPts val="3600"/>
+              <a:buNone/>
+              <a:defRPr sz="3600"/>
             </a:lvl7pPr>
-            <a:lvl8pPr lvl="7">
-              <a:spcBef>
-                <a:spcPts val="0"/>
-              </a:spcBef>
-              <a:spcAft>
-                <a:spcPts val="0"/>
-              </a:spcAft>
-              <a:buSzPts val="2800"/>
-              <a:buNone/>
-              <a:defRPr/>
+            <a:lvl8pPr lvl="7" algn="ctr">
+              <a:lnSpc>
+                <a:spcPct val="100000"/>
+              </a:lnSpc>
+              <a:spcBef>
+                <a:spcPts val="0"/>
+              </a:spcBef>
+              <a:spcAft>
+                <a:spcPts val="0"/>
+              </a:spcAft>
+              <a:buSzPts val="3600"/>
+              <a:buNone/>
+              <a:defRPr sz="3600"/>
             </a:lvl8pPr>
-            <a:lvl9pPr lvl="8">
-              <a:spcBef>
-                <a:spcPts val="0"/>
-              </a:spcBef>
-              <a:spcAft>
-                <a:spcPts val="0"/>
-              </a:spcAft>
-              <a:buSzPts val="2800"/>
-              <a:buNone/>
-              <a:defRPr/>
+            <a:lvl9pPr lvl="8" algn="ctr">
+              <a:lnSpc>
+                <a:spcPct val="100000"/>
+              </a:lnSpc>
+              <a:spcBef>
+                <a:spcPts val="0"/>
+              </a:spcBef>
+              <a:spcAft>
+                <a:spcPts val="0"/>
+              </a:spcAft>
+              <a:buSzPts val="3600"/>
+              <a:buNone/>
+              <a:defRPr sz="3600"/>
             </a:lvl9pPr>
           </a:lstStyle>
           <a:p/>
@@ -2893,132 +4334,7 @@
       </p:sp>
       <p:sp>
         <p:nvSpPr>
-          <p:cNvPr id="18" name="Google Shape;18;p4"/>
-          <p:cNvSpPr txBox="1"/>
-          <p:nvPr>
-            <p:ph idx="1" type="body"/>
-          </p:nvPr>
-        </p:nvSpPr>
-        <p:spPr>
-          <a:xfrm>
-            <a:off x="311700" y="1152475"/>
-            <a:ext cx="8520600" cy="3416400"/>
-          </a:xfrm>
-          <a:prstGeom prst="rect">
-            <a:avLst/>
-          </a:prstGeom>
-        </p:spPr>
-        <p:txBody>
-          <a:bodyPr anchorCtr="0" anchor="t" bIns="91425" lIns="91425" spcFirstLastPara="1" rIns="91425" wrap="square" tIns="91425">
-            <a:normAutofit/>
-          </a:bodyPr>
-          <a:lstStyle>
-            <a:lvl1pPr indent="-342900" lvl="0" marL="457200">
-              <a:spcBef>
-                <a:spcPts val="0"/>
-              </a:spcBef>
-              <a:spcAft>
-                <a:spcPts val="0"/>
-              </a:spcAft>
-              <a:buSzPts val="1800"/>
-              <a:buChar char="●"/>
-              <a:defRPr/>
-            </a:lvl1pPr>
-            <a:lvl2pPr indent="-317500" lvl="1" marL="914400">
-              <a:spcBef>
-                <a:spcPts val="0"/>
-              </a:spcBef>
-              <a:spcAft>
-                <a:spcPts val="0"/>
-              </a:spcAft>
-              <a:buSzPts val="1400"/>
-              <a:buChar char="○"/>
-              <a:defRPr/>
-            </a:lvl2pPr>
-            <a:lvl3pPr indent="-317500" lvl="2" marL="1371600">
-              <a:spcBef>
-                <a:spcPts val="0"/>
-              </a:spcBef>
-              <a:spcAft>
-                <a:spcPts val="0"/>
-              </a:spcAft>
-              <a:buSzPts val="1400"/>
-              <a:buChar char="■"/>
-              <a:defRPr/>
-            </a:lvl3pPr>
-            <a:lvl4pPr indent="-317500" lvl="3" marL="1828800">
-              <a:spcBef>
-                <a:spcPts val="0"/>
-              </a:spcBef>
-              <a:spcAft>
-                <a:spcPts val="0"/>
-              </a:spcAft>
-              <a:buSzPts val="1400"/>
-              <a:buChar char="●"/>
-              <a:defRPr/>
-            </a:lvl4pPr>
-            <a:lvl5pPr indent="-317500" lvl="4" marL="2286000">
-              <a:spcBef>
-                <a:spcPts val="0"/>
-              </a:spcBef>
-              <a:spcAft>
-                <a:spcPts val="0"/>
-              </a:spcAft>
-              <a:buSzPts val="1400"/>
-              <a:buChar char="○"/>
-              <a:defRPr/>
-            </a:lvl5pPr>
-            <a:lvl6pPr indent="-317500" lvl="5" marL="2743200">
-              <a:spcBef>
-                <a:spcPts val="0"/>
-              </a:spcBef>
-              <a:spcAft>
-                <a:spcPts val="0"/>
-              </a:spcAft>
-              <a:buSzPts val="1400"/>
-              <a:buChar char="■"/>
-              <a:defRPr/>
-            </a:lvl6pPr>
-            <a:lvl7pPr indent="-317500" lvl="6" marL="3200400">
-              <a:spcBef>
-                <a:spcPts val="0"/>
-              </a:spcBef>
-              <a:spcAft>
-                <a:spcPts val="0"/>
-              </a:spcAft>
-              <a:buSzPts val="1400"/>
-              <a:buChar char="●"/>
-              <a:defRPr/>
-            </a:lvl7pPr>
-            <a:lvl8pPr indent="-317500" lvl="7" marL="3657600">
-              <a:spcBef>
-                <a:spcPts val="0"/>
-              </a:spcBef>
-              <a:spcAft>
-                <a:spcPts val="0"/>
-              </a:spcAft>
-              <a:buSzPts val="1400"/>
-              <a:buChar char="○"/>
-              <a:defRPr/>
-            </a:lvl8pPr>
-            <a:lvl9pPr indent="-317500" lvl="8" marL="4114800">
-              <a:spcBef>
-                <a:spcPts val="0"/>
-              </a:spcBef>
-              <a:spcAft>
-                <a:spcPts val="0"/>
-              </a:spcAft>
-              <a:buSzPts val="1400"/>
-              <a:buChar char="■"/>
-              <a:defRPr/>
-            </a:lvl9pPr>
-          </a:lstStyle>
-          <a:p/>
-        </p:txBody>
-      </p:sp>
-      <p:sp>
-        <p:nvSpPr>
-          <p:cNvPr id="19" name="Google Shape;19;p4"/>
+          <p:cNvPr id="19" name="Google Shape;19;p14"/>
           <p:cNvSpPr txBox="1"/>
           <p:nvPr>
             <p:ph idx="12" type="sldNum"/>
@@ -3032,47 +4348,249 @@
           <a:prstGeom prst="rect">
             <a:avLst/>
           </a:prstGeom>
+          <a:noFill/>
+          <a:ln>
+            <a:noFill/>
+          </a:ln>
         </p:spPr>
         <p:txBody>
           <a:bodyPr anchorCtr="0" anchor="ctr" bIns="91425" lIns="91425" spcFirstLastPara="1" rIns="91425" wrap="square" tIns="91425">
             <a:normAutofit/>
           </a:bodyPr>
           <a:lstStyle>
-            <a:lvl1pPr lvl="0">
-              <a:buNone/>
-              <a:defRPr/>
+            <a:lvl1pPr indent="0" lvl="0" marL="0" marR="0" algn="r">
+              <a:lnSpc>
+                <a:spcPct val="100000"/>
+              </a:lnSpc>
+              <a:spcBef>
+                <a:spcPts val="0"/>
+              </a:spcBef>
+              <a:spcAft>
+                <a:spcPts val="0"/>
+              </a:spcAft>
+              <a:buClr>
+                <a:srgbClr val="000000"/>
+              </a:buClr>
+              <a:buSzPts val="1000"/>
+              <a:buFont typeface="Arial"/>
+              <a:buNone/>
+              <a:defRPr b="0" i="0" sz="1000" u="none" cap="none" strike="noStrike">
+                <a:solidFill>
+                  <a:schemeClr val="dk2"/>
+                </a:solidFill>
+                <a:latin typeface="Arial"/>
+                <a:ea typeface="Arial"/>
+                <a:cs typeface="Arial"/>
+                <a:sym typeface="Arial"/>
+              </a:defRPr>
             </a:lvl1pPr>
-            <a:lvl2pPr lvl="1">
-              <a:buNone/>
-              <a:defRPr/>
+            <a:lvl2pPr indent="0" lvl="1" marL="0" marR="0" algn="r">
+              <a:lnSpc>
+                <a:spcPct val="100000"/>
+              </a:lnSpc>
+              <a:spcBef>
+                <a:spcPts val="0"/>
+              </a:spcBef>
+              <a:spcAft>
+                <a:spcPts val="0"/>
+              </a:spcAft>
+              <a:buClr>
+                <a:srgbClr val="000000"/>
+              </a:buClr>
+              <a:buSzPts val="1000"/>
+              <a:buFont typeface="Arial"/>
+              <a:buNone/>
+              <a:defRPr b="0" i="0" sz="1000" u="none" cap="none" strike="noStrike">
+                <a:solidFill>
+                  <a:schemeClr val="dk2"/>
+                </a:solidFill>
+                <a:latin typeface="Arial"/>
+                <a:ea typeface="Arial"/>
+                <a:cs typeface="Arial"/>
+                <a:sym typeface="Arial"/>
+              </a:defRPr>
             </a:lvl2pPr>
-            <a:lvl3pPr lvl="2">
-              <a:buNone/>
-              <a:defRPr/>
+            <a:lvl3pPr indent="0" lvl="2" marL="0" marR="0" algn="r">
+              <a:lnSpc>
+                <a:spcPct val="100000"/>
+              </a:lnSpc>
+              <a:spcBef>
+                <a:spcPts val="0"/>
+              </a:spcBef>
+              <a:spcAft>
+                <a:spcPts val="0"/>
+              </a:spcAft>
+              <a:buClr>
+                <a:srgbClr val="000000"/>
+              </a:buClr>
+              <a:buSzPts val="1000"/>
+              <a:buFont typeface="Arial"/>
+              <a:buNone/>
+              <a:defRPr b="0" i="0" sz="1000" u="none" cap="none" strike="noStrike">
+                <a:solidFill>
+                  <a:schemeClr val="dk2"/>
+                </a:solidFill>
+                <a:latin typeface="Arial"/>
+                <a:ea typeface="Arial"/>
+                <a:cs typeface="Arial"/>
+                <a:sym typeface="Arial"/>
+              </a:defRPr>
             </a:lvl3pPr>
-            <a:lvl4pPr lvl="3">
-              <a:buNone/>
-              <a:defRPr/>
+            <a:lvl4pPr indent="0" lvl="3" marL="0" marR="0" algn="r">
+              <a:lnSpc>
+                <a:spcPct val="100000"/>
+              </a:lnSpc>
+              <a:spcBef>
+                <a:spcPts val="0"/>
+              </a:spcBef>
+              <a:spcAft>
+                <a:spcPts val="0"/>
+              </a:spcAft>
+              <a:buClr>
+                <a:srgbClr val="000000"/>
+              </a:buClr>
+              <a:buSzPts val="1000"/>
+              <a:buFont typeface="Arial"/>
+              <a:buNone/>
+              <a:defRPr b="0" i="0" sz="1000" u="none" cap="none" strike="noStrike">
+                <a:solidFill>
+                  <a:schemeClr val="dk2"/>
+                </a:solidFill>
+                <a:latin typeface="Arial"/>
+                <a:ea typeface="Arial"/>
+                <a:cs typeface="Arial"/>
+                <a:sym typeface="Arial"/>
+              </a:defRPr>
             </a:lvl4pPr>
-            <a:lvl5pPr lvl="4">
-              <a:buNone/>
-              <a:defRPr/>
+            <a:lvl5pPr indent="0" lvl="4" marL="0" marR="0" algn="r">
+              <a:lnSpc>
+                <a:spcPct val="100000"/>
+              </a:lnSpc>
+              <a:spcBef>
+                <a:spcPts val="0"/>
+              </a:spcBef>
+              <a:spcAft>
+                <a:spcPts val="0"/>
+              </a:spcAft>
+              <a:buClr>
+                <a:srgbClr val="000000"/>
+              </a:buClr>
+              <a:buSzPts val="1000"/>
+              <a:buFont typeface="Arial"/>
+              <a:buNone/>
+              <a:defRPr b="0" i="0" sz="1000" u="none" cap="none" strike="noStrike">
+                <a:solidFill>
+                  <a:schemeClr val="dk2"/>
+                </a:solidFill>
+                <a:latin typeface="Arial"/>
+                <a:ea typeface="Arial"/>
+                <a:cs typeface="Arial"/>
+                <a:sym typeface="Arial"/>
+              </a:defRPr>
             </a:lvl5pPr>
-            <a:lvl6pPr lvl="5">
-              <a:buNone/>
-              <a:defRPr/>
+            <a:lvl6pPr indent="0" lvl="5" marL="0" marR="0" algn="r">
+              <a:lnSpc>
+                <a:spcPct val="100000"/>
+              </a:lnSpc>
+              <a:spcBef>
+                <a:spcPts val="0"/>
+              </a:spcBef>
+              <a:spcAft>
+                <a:spcPts val="0"/>
+              </a:spcAft>
+              <a:buClr>
+                <a:srgbClr val="000000"/>
+              </a:buClr>
+              <a:buSzPts val="1000"/>
+              <a:buFont typeface="Arial"/>
+              <a:buNone/>
+              <a:defRPr b="0" i="0" sz="1000" u="none" cap="none" strike="noStrike">
+                <a:solidFill>
+                  <a:schemeClr val="dk2"/>
+                </a:solidFill>
+                <a:latin typeface="Arial"/>
+                <a:ea typeface="Arial"/>
+                <a:cs typeface="Arial"/>
+                <a:sym typeface="Arial"/>
+              </a:defRPr>
             </a:lvl6pPr>
-            <a:lvl7pPr lvl="6">
-              <a:buNone/>
-              <a:defRPr/>
+            <a:lvl7pPr indent="0" lvl="6" marL="0" marR="0" algn="r">
+              <a:lnSpc>
+                <a:spcPct val="100000"/>
+              </a:lnSpc>
+              <a:spcBef>
+                <a:spcPts val="0"/>
+              </a:spcBef>
+              <a:spcAft>
+                <a:spcPts val="0"/>
+              </a:spcAft>
+              <a:buClr>
+                <a:srgbClr val="000000"/>
+              </a:buClr>
+              <a:buSzPts val="1000"/>
+              <a:buFont typeface="Arial"/>
+              <a:buNone/>
+              <a:defRPr b="0" i="0" sz="1000" u="none" cap="none" strike="noStrike">
+                <a:solidFill>
+                  <a:schemeClr val="dk2"/>
+                </a:solidFill>
+                <a:latin typeface="Arial"/>
+                <a:ea typeface="Arial"/>
+                <a:cs typeface="Arial"/>
+                <a:sym typeface="Arial"/>
+              </a:defRPr>
             </a:lvl7pPr>
-            <a:lvl8pPr lvl="7">
-              <a:buNone/>
-              <a:defRPr/>
+            <a:lvl8pPr indent="0" lvl="7" marL="0" marR="0" algn="r">
+              <a:lnSpc>
+                <a:spcPct val="100000"/>
+              </a:lnSpc>
+              <a:spcBef>
+                <a:spcPts val="0"/>
+              </a:spcBef>
+              <a:spcAft>
+                <a:spcPts val="0"/>
+              </a:spcAft>
+              <a:buClr>
+                <a:srgbClr val="000000"/>
+              </a:buClr>
+              <a:buSzPts val="1000"/>
+              <a:buFont typeface="Arial"/>
+              <a:buNone/>
+              <a:defRPr b="0" i="0" sz="1000" u="none" cap="none" strike="noStrike">
+                <a:solidFill>
+                  <a:schemeClr val="dk2"/>
+                </a:solidFill>
+                <a:latin typeface="Arial"/>
+                <a:ea typeface="Arial"/>
+                <a:cs typeface="Arial"/>
+                <a:sym typeface="Arial"/>
+              </a:defRPr>
             </a:lvl8pPr>
-            <a:lvl9pPr lvl="8">
-              <a:buNone/>
-              <a:defRPr/>
+            <a:lvl9pPr indent="0" lvl="8" marL="0" marR="0" algn="r">
+              <a:lnSpc>
+                <a:spcPct val="100000"/>
+              </a:lnSpc>
+              <a:spcBef>
+                <a:spcPts val="0"/>
+              </a:spcBef>
+              <a:spcAft>
+                <a:spcPts val="0"/>
+              </a:spcAft>
+              <a:buClr>
+                <a:srgbClr val="000000"/>
+              </a:buClr>
+              <a:buSzPts val="1000"/>
+              <a:buFont typeface="Arial"/>
+              <a:buNone/>
+              <a:defRPr b="0" i="0" sz="1000" u="none" cap="none" strike="noStrike">
+                <a:solidFill>
+                  <a:schemeClr val="dk2"/>
+                </a:solidFill>
+                <a:latin typeface="Arial"/>
+                <a:ea typeface="Arial"/>
+                <a:cs typeface="Arial"/>
+                <a:sym typeface="Arial"/>
+              </a:defRPr>
             </a:lvl9pPr>
           </a:lstStyle>
           <a:p>
@@ -3120,7 +4638,7 @@
       </p:grpSpPr>
       <p:sp>
         <p:nvSpPr>
-          <p:cNvPr id="21" name="Google Shape;21;p5"/>
+          <p:cNvPr id="21" name="Google Shape;21;p15"/>
           <p:cNvSpPr txBox="1"/>
           <p:nvPr>
             <p:ph type="title"/>
@@ -3134,13 +4652,20 @@
           <a:prstGeom prst="rect">
             <a:avLst/>
           </a:prstGeom>
+          <a:noFill/>
+          <a:ln>
+            <a:noFill/>
+          </a:ln>
         </p:spPr>
         <p:txBody>
           <a:bodyPr anchorCtr="0" anchor="t" bIns="91425" lIns="91425" spcFirstLastPara="1" rIns="91425" wrap="square" tIns="91425">
             <a:normAutofit/>
           </a:bodyPr>
           <a:lstStyle>
-            <a:lvl1pPr lvl="0">
+            <a:lvl1pPr lvl="0" algn="l">
+              <a:lnSpc>
+                <a:spcPct val="100000"/>
+              </a:lnSpc>
               <a:spcBef>
                 <a:spcPts val="0"/>
               </a:spcBef>
@@ -3151,7 +4676,10 @@
               <a:buNone/>
               <a:defRPr/>
             </a:lvl1pPr>
-            <a:lvl2pPr lvl="1">
+            <a:lvl2pPr lvl="1" algn="l">
+              <a:lnSpc>
+                <a:spcPct val="100000"/>
+              </a:lnSpc>
               <a:spcBef>
                 <a:spcPts val="0"/>
               </a:spcBef>
@@ -3162,7 +4690,10 @@
               <a:buNone/>
               <a:defRPr/>
             </a:lvl2pPr>
-            <a:lvl3pPr lvl="2">
+            <a:lvl3pPr lvl="2" algn="l">
+              <a:lnSpc>
+                <a:spcPct val="100000"/>
+              </a:lnSpc>
               <a:spcBef>
                 <a:spcPts val="0"/>
               </a:spcBef>
@@ -3173,7 +4704,10 @@
               <a:buNone/>
               <a:defRPr/>
             </a:lvl3pPr>
-            <a:lvl4pPr lvl="3">
+            <a:lvl4pPr lvl="3" algn="l">
+              <a:lnSpc>
+                <a:spcPct val="100000"/>
+              </a:lnSpc>
               <a:spcBef>
                 <a:spcPts val="0"/>
               </a:spcBef>
@@ -3184,7 +4718,10 @@
               <a:buNone/>
               <a:defRPr/>
             </a:lvl4pPr>
-            <a:lvl5pPr lvl="4">
+            <a:lvl5pPr lvl="4" algn="l">
+              <a:lnSpc>
+                <a:spcPct val="100000"/>
+              </a:lnSpc>
               <a:spcBef>
                 <a:spcPts val="0"/>
               </a:spcBef>
@@ -3195,7 +4732,10 @@
               <a:buNone/>
               <a:defRPr/>
             </a:lvl5pPr>
-            <a:lvl6pPr lvl="5">
+            <a:lvl6pPr lvl="5" algn="l">
+              <a:lnSpc>
+                <a:spcPct val="100000"/>
+              </a:lnSpc>
               <a:spcBef>
                 <a:spcPts val="0"/>
               </a:spcBef>
@@ -3206,7 +4746,10 @@
               <a:buNone/>
               <a:defRPr/>
             </a:lvl6pPr>
-            <a:lvl7pPr lvl="6">
+            <a:lvl7pPr lvl="6" algn="l">
+              <a:lnSpc>
+                <a:spcPct val="100000"/>
+              </a:lnSpc>
               <a:spcBef>
                 <a:spcPts val="0"/>
               </a:spcBef>
@@ -3217,7 +4760,10 @@
               <a:buNone/>
               <a:defRPr/>
             </a:lvl7pPr>
-            <a:lvl8pPr lvl="7">
+            <a:lvl8pPr lvl="7" algn="l">
+              <a:lnSpc>
+                <a:spcPct val="100000"/>
+              </a:lnSpc>
               <a:spcBef>
                 <a:spcPts val="0"/>
               </a:spcBef>
@@ -3228,7 +4774,10 @@
               <a:buNone/>
               <a:defRPr/>
             </a:lvl8pPr>
-            <a:lvl9pPr lvl="8">
+            <a:lvl9pPr lvl="8" algn="l">
+              <a:lnSpc>
+                <a:spcPct val="100000"/>
+              </a:lnSpc>
               <a:spcBef>
                 <a:spcPts val="0"/>
               </a:spcBef>
@@ -3245,7 +4794,7 @@
       </p:sp>
       <p:sp>
         <p:nvSpPr>
-          <p:cNvPr id="22" name="Google Shape;22;p5"/>
+          <p:cNvPr id="22" name="Google Shape;22;p15"/>
           <p:cNvSpPr txBox="1"/>
           <p:nvPr>
             <p:ph idx="1" type="body"/>
@@ -3259,13 +4808,20 @@
           <a:prstGeom prst="rect">
             <a:avLst/>
           </a:prstGeom>
+          <a:noFill/>
+          <a:ln>
+            <a:noFill/>
+          </a:ln>
         </p:spPr>
         <p:txBody>
           <a:bodyPr anchorCtr="0" anchor="t" bIns="91425" lIns="91425" spcFirstLastPara="1" rIns="91425" wrap="square" tIns="91425">
             <a:normAutofit/>
           </a:bodyPr>
           <a:lstStyle>
-            <a:lvl1pPr indent="-317500" lvl="0" marL="457200">
+            <a:lvl1pPr indent="-317500" lvl="0" marL="457200" algn="l">
+              <a:lnSpc>
+                <a:spcPct val="115000"/>
+              </a:lnSpc>
               <a:spcBef>
                 <a:spcPts val="0"/>
               </a:spcBef>
@@ -3276,7 +4832,10 @@
               <a:buChar char="●"/>
               <a:defRPr sz="1400"/>
             </a:lvl1pPr>
-            <a:lvl2pPr indent="-304800" lvl="1" marL="914400">
+            <a:lvl2pPr indent="-304800" lvl="1" marL="914400" algn="l">
+              <a:lnSpc>
+                <a:spcPct val="115000"/>
+              </a:lnSpc>
               <a:spcBef>
                 <a:spcPts val="0"/>
               </a:spcBef>
@@ -3287,7 +4846,10 @@
               <a:buChar char="○"/>
               <a:defRPr sz="1200"/>
             </a:lvl2pPr>
-            <a:lvl3pPr indent="-304800" lvl="2" marL="1371600">
+            <a:lvl3pPr indent="-304800" lvl="2" marL="1371600" algn="l">
+              <a:lnSpc>
+                <a:spcPct val="115000"/>
+              </a:lnSpc>
               <a:spcBef>
                 <a:spcPts val="0"/>
               </a:spcBef>
@@ -3298,7 +4860,10 @@
               <a:buChar char="■"/>
               <a:defRPr sz="1200"/>
             </a:lvl3pPr>
-            <a:lvl4pPr indent="-304800" lvl="3" marL="1828800">
+            <a:lvl4pPr indent="-304800" lvl="3" marL="1828800" algn="l">
+              <a:lnSpc>
+                <a:spcPct val="115000"/>
+              </a:lnSpc>
               <a:spcBef>
                 <a:spcPts val="0"/>
               </a:spcBef>
@@ -3309,7 +4874,10 @@
               <a:buChar char="●"/>
               <a:defRPr sz="1200"/>
             </a:lvl4pPr>
-            <a:lvl5pPr indent="-304800" lvl="4" marL="2286000">
+            <a:lvl5pPr indent="-304800" lvl="4" marL="2286000" algn="l">
+              <a:lnSpc>
+                <a:spcPct val="115000"/>
+              </a:lnSpc>
               <a:spcBef>
                 <a:spcPts val="0"/>
               </a:spcBef>
@@ -3320,7 +4888,10 @@
               <a:buChar char="○"/>
               <a:defRPr sz="1200"/>
             </a:lvl5pPr>
-            <a:lvl6pPr indent="-304800" lvl="5" marL="2743200">
+            <a:lvl6pPr indent="-304800" lvl="5" marL="2743200" algn="l">
+              <a:lnSpc>
+                <a:spcPct val="115000"/>
+              </a:lnSpc>
               <a:spcBef>
                 <a:spcPts val="0"/>
               </a:spcBef>
@@ -3331,7 +4902,10 @@
               <a:buChar char="■"/>
               <a:defRPr sz="1200"/>
             </a:lvl6pPr>
-            <a:lvl7pPr indent="-304800" lvl="6" marL="3200400">
+            <a:lvl7pPr indent="-304800" lvl="6" marL="3200400" algn="l">
+              <a:lnSpc>
+                <a:spcPct val="115000"/>
+              </a:lnSpc>
               <a:spcBef>
                 <a:spcPts val="0"/>
               </a:spcBef>
@@ -3342,7 +4916,10 @@
               <a:buChar char="●"/>
               <a:defRPr sz="1200"/>
             </a:lvl7pPr>
-            <a:lvl8pPr indent="-304800" lvl="7" marL="3657600">
+            <a:lvl8pPr indent="-304800" lvl="7" marL="3657600" algn="l">
+              <a:lnSpc>
+                <a:spcPct val="115000"/>
+              </a:lnSpc>
               <a:spcBef>
                 <a:spcPts val="0"/>
               </a:spcBef>
@@ -3353,7 +4930,10 @@
               <a:buChar char="○"/>
               <a:defRPr sz="1200"/>
             </a:lvl8pPr>
-            <a:lvl9pPr indent="-304800" lvl="8" marL="4114800">
+            <a:lvl9pPr indent="-304800" lvl="8" marL="4114800" algn="l">
+              <a:lnSpc>
+                <a:spcPct val="115000"/>
+              </a:lnSpc>
               <a:spcBef>
                 <a:spcPts val="0"/>
               </a:spcBef>
@@ -3370,7 +4950,7 @@
       </p:sp>
       <p:sp>
         <p:nvSpPr>
-          <p:cNvPr id="23" name="Google Shape;23;p5"/>
+          <p:cNvPr id="23" name="Google Shape;23;p15"/>
           <p:cNvSpPr txBox="1"/>
           <p:nvPr>
             <p:ph idx="2" type="body"/>
@@ -3384,13 +4964,20 @@
           <a:prstGeom prst="rect">
             <a:avLst/>
           </a:prstGeom>
+          <a:noFill/>
+          <a:ln>
+            <a:noFill/>
+          </a:ln>
         </p:spPr>
         <p:txBody>
           <a:bodyPr anchorCtr="0" anchor="t" bIns="91425" lIns="91425" spcFirstLastPara="1" rIns="91425" wrap="square" tIns="91425">
             <a:normAutofit/>
           </a:bodyPr>
           <a:lstStyle>
-            <a:lvl1pPr indent="-317500" lvl="0" marL="457200">
+            <a:lvl1pPr indent="-317500" lvl="0" marL="457200" algn="l">
+              <a:lnSpc>
+                <a:spcPct val="115000"/>
+              </a:lnSpc>
               <a:spcBef>
                 <a:spcPts val="0"/>
               </a:spcBef>
@@ -3401,7 +4988,10 @@
               <a:buChar char="●"/>
               <a:defRPr sz="1400"/>
             </a:lvl1pPr>
-            <a:lvl2pPr indent="-304800" lvl="1" marL="914400">
+            <a:lvl2pPr indent="-304800" lvl="1" marL="914400" algn="l">
+              <a:lnSpc>
+                <a:spcPct val="115000"/>
+              </a:lnSpc>
               <a:spcBef>
                 <a:spcPts val="0"/>
               </a:spcBef>
@@ -3412,7 +5002,10 @@
               <a:buChar char="○"/>
               <a:defRPr sz="1200"/>
             </a:lvl2pPr>
-            <a:lvl3pPr indent="-304800" lvl="2" marL="1371600">
+            <a:lvl3pPr indent="-304800" lvl="2" marL="1371600" algn="l">
+              <a:lnSpc>
+                <a:spcPct val="115000"/>
+              </a:lnSpc>
               <a:spcBef>
                 <a:spcPts val="0"/>
               </a:spcBef>
@@ -3423,7 +5016,10 @@
               <a:buChar char="■"/>
               <a:defRPr sz="1200"/>
             </a:lvl3pPr>
-            <a:lvl4pPr indent="-304800" lvl="3" marL="1828800">
+            <a:lvl4pPr indent="-304800" lvl="3" marL="1828800" algn="l">
+              <a:lnSpc>
+                <a:spcPct val="115000"/>
+              </a:lnSpc>
               <a:spcBef>
                 <a:spcPts val="0"/>
               </a:spcBef>
@@ -3434,7 +5030,10 @@
               <a:buChar char="●"/>
               <a:defRPr sz="1200"/>
             </a:lvl4pPr>
-            <a:lvl5pPr indent="-304800" lvl="4" marL="2286000">
+            <a:lvl5pPr indent="-304800" lvl="4" marL="2286000" algn="l">
+              <a:lnSpc>
+                <a:spcPct val="115000"/>
+              </a:lnSpc>
               <a:spcBef>
                 <a:spcPts val="0"/>
               </a:spcBef>
@@ -3445,7 +5044,10 @@
               <a:buChar char="○"/>
               <a:defRPr sz="1200"/>
             </a:lvl5pPr>
-            <a:lvl6pPr indent="-304800" lvl="5" marL="2743200">
+            <a:lvl6pPr indent="-304800" lvl="5" marL="2743200" algn="l">
+              <a:lnSpc>
+                <a:spcPct val="115000"/>
+              </a:lnSpc>
               <a:spcBef>
                 <a:spcPts val="0"/>
               </a:spcBef>
@@ -3456,7 +5058,10 @@
               <a:buChar char="■"/>
               <a:defRPr sz="1200"/>
             </a:lvl6pPr>
-            <a:lvl7pPr indent="-304800" lvl="6" marL="3200400">
+            <a:lvl7pPr indent="-304800" lvl="6" marL="3200400" algn="l">
+              <a:lnSpc>
+                <a:spcPct val="115000"/>
+              </a:lnSpc>
               <a:spcBef>
                 <a:spcPts val="0"/>
               </a:spcBef>
@@ -3467,7 +5072,10 @@
               <a:buChar char="●"/>
               <a:defRPr sz="1200"/>
             </a:lvl7pPr>
-            <a:lvl8pPr indent="-304800" lvl="7" marL="3657600">
+            <a:lvl8pPr indent="-304800" lvl="7" marL="3657600" algn="l">
+              <a:lnSpc>
+                <a:spcPct val="115000"/>
+              </a:lnSpc>
               <a:spcBef>
                 <a:spcPts val="0"/>
               </a:spcBef>
@@ -3478,7 +5086,10 @@
               <a:buChar char="○"/>
               <a:defRPr sz="1200"/>
             </a:lvl8pPr>
-            <a:lvl9pPr indent="-304800" lvl="8" marL="4114800">
+            <a:lvl9pPr indent="-304800" lvl="8" marL="4114800" algn="l">
+              <a:lnSpc>
+                <a:spcPct val="115000"/>
+              </a:lnSpc>
               <a:spcBef>
                 <a:spcPts val="0"/>
               </a:spcBef>
@@ -3495,7 +5106,7 @@
       </p:sp>
       <p:sp>
         <p:nvSpPr>
-          <p:cNvPr id="24" name="Google Shape;24;p5"/>
+          <p:cNvPr id="24" name="Google Shape;24;p15"/>
           <p:cNvSpPr txBox="1"/>
           <p:nvPr>
             <p:ph idx="12" type="sldNum"/>
@@ -3509,47 +5120,249 @@
           <a:prstGeom prst="rect">
             <a:avLst/>
           </a:prstGeom>
+          <a:noFill/>
+          <a:ln>
+            <a:noFill/>
+          </a:ln>
         </p:spPr>
         <p:txBody>
           <a:bodyPr anchorCtr="0" anchor="ctr" bIns="91425" lIns="91425" spcFirstLastPara="1" rIns="91425" wrap="square" tIns="91425">
             <a:normAutofit/>
           </a:bodyPr>
           <a:lstStyle>
-            <a:lvl1pPr lvl="0">
-              <a:buNone/>
-              <a:defRPr/>
+            <a:lvl1pPr indent="0" lvl="0" marL="0" marR="0" algn="r">
+              <a:lnSpc>
+                <a:spcPct val="100000"/>
+              </a:lnSpc>
+              <a:spcBef>
+                <a:spcPts val="0"/>
+              </a:spcBef>
+              <a:spcAft>
+                <a:spcPts val="0"/>
+              </a:spcAft>
+              <a:buClr>
+                <a:srgbClr val="000000"/>
+              </a:buClr>
+              <a:buSzPts val="1000"/>
+              <a:buFont typeface="Arial"/>
+              <a:buNone/>
+              <a:defRPr b="0" i="0" sz="1000" u="none" cap="none" strike="noStrike">
+                <a:solidFill>
+                  <a:schemeClr val="dk2"/>
+                </a:solidFill>
+                <a:latin typeface="Arial"/>
+                <a:ea typeface="Arial"/>
+                <a:cs typeface="Arial"/>
+                <a:sym typeface="Arial"/>
+              </a:defRPr>
             </a:lvl1pPr>
-            <a:lvl2pPr lvl="1">
-              <a:buNone/>
-              <a:defRPr/>
+            <a:lvl2pPr indent="0" lvl="1" marL="0" marR="0" algn="r">
+              <a:lnSpc>
+                <a:spcPct val="100000"/>
+              </a:lnSpc>
+              <a:spcBef>
+                <a:spcPts val="0"/>
+              </a:spcBef>
+              <a:spcAft>
+                <a:spcPts val="0"/>
+              </a:spcAft>
+              <a:buClr>
+                <a:srgbClr val="000000"/>
+              </a:buClr>
+              <a:buSzPts val="1000"/>
+              <a:buFont typeface="Arial"/>
+              <a:buNone/>
+              <a:defRPr b="0" i="0" sz="1000" u="none" cap="none" strike="noStrike">
+                <a:solidFill>
+                  <a:schemeClr val="dk2"/>
+                </a:solidFill>
+                <a:latin typeface="Arial"/>
+                <a:ea typeface="Arial"/>
+                <a:cs typeface="Arial"/>
+                <a:sym typeface="Arial"/>
+              </a:defRPr>
             </a:lvl2pPr>
-            <a:lvl3pPr lvl="2">
-              <a:buNone/>
-              <a:defRPr/>
+            <a:lvl3pPr indent="0" lvl="2" marL="0" marR="0" algn="r">
+              <a:lnSpc>
+                <a:spcPct val="100000"/>
+              </a:lnSpc>
+              <a:spcBef>
+                <a:spcPts val="0"/>
+              </a:spcBef>
+              <a:spcAft>
+                <a:spcPts val="0"/>
+              </a:spcAft>
+              <a:buClr>
+                <a:srgbClr val="000000"/>
+              </a:buClr>
+              <a:buSzPts val="1000"/>
+              <a:buFont typeface="Arial"/>
+              <a:buNone/>
+              <a:defRPr b="0" i="0" sz="1000" u="none" cap="none" strike="noStrike">
+                <a:solidFill>
+                  <a:schemeClr val="dk2"/>
+                </a:solidFill>
+                <a:latin typeface="Arial"/>
+                <a:ea typeface="Arial"/>
+                <a:cs typeface="Arial"/>
+                <a:sym typeface="Arial"/>
+              </a:defRPr>
             </a:lvl3pPr>
-            <a:lvl4pPr lvl="3">
-              <a:buNone/>
-              <a:defRPr/>
+            <a:lvl4pPr indent="0" lvl="3" marL="0" marR="0" algn="r">
+              <a:lnSpc>
+                <a:spcPct val="100000"/>
+              </a:lnSpc>
+              <a:spcBef>
+                <a:spcPts val="0"/>
+              </a:spcBef>
+              <a:spcAft>
+                <a:spcPts val="0"/>
+              </a:spcAft>
+              <a:buClr>
+                <a:srgbClr val="000000"/>
+              </a:buClr>
+              <a:buSzPts val="1000"/>
+              <a:buFont typeface="Arial"/>
+              <a:buNone/>
+              <a:defRPr b="0" i="0" sz="1000" u="none" cap="none" strike="noStrike">
+                <a:solidFill>
+                  <a:schemeClr val="dk2"/>
+                </a:solidFill>
+                <a:latin typeface="Arial"/>
+                <a:ea typeface="Arial"/>
+                <a:cs typeface="Arial"/>
+                <a:sym typeface="Arial"/>
+              </a:defRPr>
             </a:lvl4pPr>
-            <a:lvl5pPr lvl="4">
-              <a:buNone/>
-              <a:defRPr/>
+            <a:lvl5pPr indent="0" lvl="4" marL="0" marR="0" algn="r">
+              <a:lnSpc>
+                <a:spcPct val="100000"/>
+              </a:lnSpc>
+              <a:spcBef>
+                <a:spcPts val="0"/>
+              </a:spcBef>
+              <a:spcAft>
+                <a:spcPts val="0"/>
+              </a:spcAft>
+              <a:buClr>
+                <a:srgbClr val="000000"/>
+              </a:buClr>
+              <a:buSzPts val="1000"/>
+              <a:buFont typeface="Arial"/>
+              <a:buNone/>
+              <a:defRPr b="0" i="0" sz="1000" u="none" cap="none" strike="noStrike">
+                <a:solidFill>
+                  <a:schemeClr val="dk2"/>
+                </a:solidFill>
+                <a:latin typeface="Arial"/>
+                <a:ea typeface="Arial"/>
+                <a:cs typeface="Arial"/>
+                <a:sym typeface="Arial"/>
+              </a:defRPr>
             </a:lvl5pPr>
-            <a:lvl6pPr lvl="5">
-              <a:buNone/>
-              <a:defRPr/>
+            <a:lvl6pPr indent="0" lvl="5" marL="0" marR="0" algn="r">
+              <a:lnSpc>
+                <a:spcPct val="100000"/>
+              </a:lnSpc>
+              <a:spcBef>
+                <a:spcPts val="0"/>
+              </a:spcBef>
+              <a:spcAft>
+                <a:spcPts val="0"/>
+              </a:spcAft>
+              <a:buClr>
+                <a:srgbClr val="000000"/>
+              </a:buClr>
+              <a:buSzPts val="1000"/>
+              <a:buFont typeface="Arial"/>
+              <a:buNone/>
+              <a:defRPr b="0" i="0" sz="1000" u="none" cap="none" strike="noStrike">
+                <a:solidFill>
+                  <a:schemeClr val="dk2"/>
+                </a:solidFill>
+                <a:latin typeface="Arial"/>
+                <a:ea typeface="Arial"/>
+                <a:cs typeface="Arial"/>
+                <a:sym typeface="Arial"/>
+              </a:defRPr>
             </a:lvl6pPr>
-            <a:lvl7pPr lvl="6">
-              <a:buNone/>
-              <a:defRPr/>
+            <a:lvl7pPr indent="0" lvl="6" marL="0" marR="0" algn="r">
+              <a:lnSpc>
+                <a:spcPct val="100000"/>
+              </a:lnSpc>
+              <a:spcBef>
+                <a:spcPts val="0"/>
+              </a:spcBef>
+              <a:spcAft>
+                <a:spcPts val="0"/>
+              </a:spcAft>
+              <a:buClr>
+                <a:srgbClr val="000000"/>
+              </a:buClr>
+              <a:buSzPts val="1000"/>
+              <a:buFont typeface="Arial"/>
+              <a:buNone/>
+              <a:defRPr b="0" i="0" sz="1000" u="none" cap="none" strike="noStrike">
+                <a:solidFill>
+                  <a:schemeClr val="dk2"/>
+                </a:solidFill>
+                <a:latin typeface="Arial"/>
+                <a:ea typeface="Arial"/>
+                <a:cs typeface="Arial"/>
+                <a:sym typeface="Arial"/>
+              </a:defRPr>
             </a:lvl7pPr>
-            <a:lvl8pPr lvl="7">
-              <a:buNone/>
-              <a:defRPr/>
+            <a:lvl8pPr indent="0" lvl="7" marL="0" marR="0" algn="r">
+              <a:lnSpc>
+                <a:spcPct val="100000"/>
+              </a:lnSpc>
+              <a:spcBef>
+                <a:spcPts val="0"/>
+              </a:spcBef>
+              <a:spcAft>
+                <a:spcPts val="0"/>
+              </a:spcAft>
+              <a:buClr>
+                <a:srgbClr val="000000"/>
+              </a:buClr>
+              <a:buSzPts val="1000"/>
+              <a:buFont typeface="Arial"/>
+              <a:buNone/>
+              <a:defRPr b="0" i="0" sz="1000" u="none" cap="none" strike="noStrike">
+                <a:solidFill>
+                  <a:schemeClr val="dk2"/>
+                </a:solidFill>
+                <a:latin typeface="Arial"/>
+                <a:ea typeface="Arial"/>
+                <a:cs typeface="Arial"/>
+                <a:sym typeface="Arial"/>
+              </a:defRPr>
             </a:lvl8pPr>
-            <a:lvl9pPr lvl="8">
-              <a:buNone/>
-              <a:defRPr/>
+            <a:lvl9pPr indent="0" lvl="8" marL="0" marR="0" algn="r">
+              <a:lnSpc>
+                <a:spcPct val="100000"/>
+              </a:lnSpc>
+              <a:spcBef>
+                <a:spcPts val="0"/>
+              </a:spcBef>
+              <a:spcAft>
+                <a:spcPts val="0"/>
+              </a:spcAft>
+              <a:buClr>
+                <a:srgbClr val="000000"/>
+              </a:buClr>
+              <a:buSzPts val="1000"/>
+              <a:buFont typeface="Arial"/>
+              <a:buNone/>
+              <a:defRPr b="0" i="0" sz="1000" u="none" cap="none" strike="noStrike">
+                <a:solidFill>
+                  <a:schemeClr val="dk2"/>
+                </a:solidFill>
+                <a:latin typeface="Arial"/>
+                <a:ea typeface="Arial"/>
+                <a:cs typeface="Arial"/>
+                <a:sym typeface="Arial"/>
+              </a:defRPr>
             </a:lvl9pPr>
           </a:lstStyle>
           <a:p>
@@ -3597,7 +5410,7 @@
       </p:grpSpPr>
       <p:sp>
         <p:nvSpPr>
-          <p:cNvPr id="26" name="Google Shape;26;p6"/>
+          <p:cNvPr id="26" name="Google Shape;26;p16"/>
           <p:cNvSpPr txBox="1"/>
           <p:nvPr>
             <p:ph type="title"/>
@@ -3611,13 +5424,20 @@
           <a:prstGeom prst="rect">
             <a:avLst/>
           </a:prstGeom>
+          <a:noFill/>
+          <a:ln>
+            <a:noFill/>
+          </a:ln>
         </p:spPr>
         <p:txBody>
           <a:bodyPr anchorCtr="0" anchor="t" bIns="91425" lIns="91425" spcFirstLastPara="1" rIns="91425" wrap="square" tIns="91425">
             <a:normAutofit/>
           </a:bodyPr>
           <a:lstStyle>
-            <a:lvl1pPr lvl="0">
+            <a:lvl1pPr lvl="0" algn="l">
+              <a:lnSpc>
+                <a:spcPct val="100000"/>
+              </a:lnSpc>
               <a:spcBef>
                 <a:spcPts val="0"/>
               </a:spcBef>
@@ -3628,7 +5448,10 @@
               <a:buNone/>
               <a:defRPr/>
             </a:lvl1pPr>
-            <a:lvl2pPr lvl="1">
+            <a:lvl2pPr lvl="1" algn="l">
+              <a:lnSpc>
+                <a:spcPct val="100000"/>
+              </a:lnSpc>
               <a:spcBef>
                 <a:spcPts val="0"/>
               </a:spcBef>
@@ -3639,7 +5462,10 @@
               <a:buNone/>
               <a:defRPr/>
             </a:lvl2pPr>
-            <a:lvl3pPr lvl="2">
+            <a:lvl3pPr lvl="2" algn="l">
+              <a:lnSpc>
+                <a:spcPct val="100000"/>
+              </a:lnSpc>
               <a:spcBef>
                 <a:spcPts val="0"/>
               </a:spcBef>
@@ -3650,7 +5476,10 @@
               <a:buNone/>
               <a:defRPr/>
             </a:lvl3pPr>
-            <a:lvl4pPr lvl="3">
+            <a:lvl4pPr lvl="3" algn="l">
+              <a:lnSpc>
+                <a:spcPct val="100000"/>
+              </a:lnSpc>
               <a:spcBef>
                 <a:spcPts val="0"/>
               </a:spcBef>
@@ -3661,7 +5490,10 @@
               <a:buNone/>
               <a:defRPr/>
             </a:lvl4pPr>
-            <a:lvl5pPr lvl="4">
+            <a:lvl5pPr lvl="4" algn="l">
+              <a:lnSpc>
+                <a:spcPct val="100000"/>
+              </a:lnSpc>
               <a:spcBef>
                 <a:spcPts val="0"/>
               </a:spcBef>
@@ -3672,7 +5504,10 @@
               <a:buNone/>
               <a:defRPr/>
             </a:lvl5pPr>
-            <a:lvl6pPr lvl="5">
+            <a:lvl6pPr lvl="5" algn="l">
+              <a:lnSpc>
+                <a:spcPct val="100000"/>
+              </a:lnSpc>
               <a:spcBef>
                 <a:spcPts val="0"/>
               </a:spcBef>
@@ -3683,7 +5518,10 @@
               <a:buNone/>
               <a:defRPr/>
             </a:lvl6pPr>
-            <a:lvl7pPr lvl="6">
+            <a:lvl7pPr lvl="6" algn="l">
+              <a:lnSpc>
+                <a:spcPct val="100000"/>
+              </a:lnSpc>
               <a:spcBef>
                 <a:spcPts val="0"/>
               </a:spcBef>
@@ -3694,7 +5532,10 @@
               <a:buNone/>
               <a:defRPr/>
             </a:lvl7pPr>
-            <a:lvl8pPr lvl="7">
+            <a:lvl8pPr lvl="7" algn="l">
+              <a:lnSpc>
+                <a:spcPct val="100000"/>
+              </a:lnSpc>
               <a:spcBef>
                 <a:spcPts val="0"/>
               </a:spcBef>
@@ -3705,7 +5546,10 @@
               <a:buNone/>
               <a:defRPr/>
             </a:lvl8pPr>
-            <a:lvl9pPr lvl="8">
+            <a:lvl9pPr lvl="8" algn="l">
+              <a:lnSpc>
+                <a:spcPct val="100000"/>
+              </a:lnSpc>
               <a:spcBef>
                 <a:spcPts val="0"/>
               </a:spcBef>
@@ -3722,7 +5566,7 @@
       </p:sp>
       <p:sp>
         <p:nvSpPr>
-          <p:cNvPr id="27" name="Google Shape;27;p6"/>
+          <p:cNvPr id="27" name="Google Shape;27;p16"/>
           <p:cNvSpPr txBox="1"/>
           <p:nvPr>
             <p:ph idx="12" type="sldNum"/>
@@ -3736,47 +5580,249 @@
           <a:prstGeom prst="rect">
             <a:avLst/>
           </a:prstGeom>
+          <a:noFill/>
+          <a:ln>
+            <a:noFill/>
+          </a:ln>
         </p:spPr>
         <p:txBody>
           <a:bodyPr anchorCtr="0" anchor="ctr" bIns="91425" lIns="91425" spcFirstLastPara="1" rIns="91425" wrap="square" tIns="91425">
             <a:normAutofit/>
           </a:bodyPr>
           <a:lstStyle>
-            <a:lvl1pPr lvl="0">
-              <a:buNone/>
-              <a:defRPr/>
+            <a:lvl1pPr indent="0" lvl="0" marL="0" marR="0" algn="r">
+              <a:lnSpc>
+                <a:spcPct val="100000"/>
+              </a:lnSpc>
+              <a:spcBef>
+                <a:spcPts val="0"/>
+              </a:spcBef>
+              <a:spcAft>
+                <a:spcPts val="0"/>
+              </a:spcAft>
+              <a:buClr>
+                <a:srgbClr val="000000"/>
+              </a:buClr>
+              <a:buSzPts val="1000"/>
+              <a:buFont typeface="Arial"/>
+              <a:buNone/>
+              <a:defRPr b="0" i="0" sz="1000" u="none" cap="none" strike="noStrike">
+                <a:solidFill>
+                  <a:schemeClr val="dk2"/>
+                </a:solidFill>
+                <a:latin typeface="Arial"/>
+                <a:ea typeface="Arial"/>
+                <a:cs typeface="Arial"/>
+                <a:sym typeface="Arial"/>
+              </a:defRPr>
             </a:lvl1pPr>
-            <a:lvl2pPr lvl="1">
-              <a:buNone/>
-              <a:defRPr/>
+            <a:lvl2pPr indent="0" lvl="1" marL="0" marR="0" algn="r">
+              <a:lnSpc>
+                <a:spcPct val="100000"/>
+              </a:lnSpc>
+              <a:spcBef>
+                <a:spcPts val="0"/>
+              </a:spcBef>
+              <a:spcAft>
+                <a:spcPts val="0"/>
+              </a:spcAft>
+              <a:buClr>
+                <a:srgbClr val="000000"/>
+              </a:buClr>
+              <a:buSzPts val="1000"/>
+              <a:buFont typeface="Arial"/>
+              <a:buNone/>
+              <a:defRPr b="0" i="0" sz="1000" u="none" cap="none" strike="noStrike">
+                <a:solidFill>
+                  <a:schemeClr val="dk2"/>
+                </a:solidFill>
+                <a:latin typeface="Arial"/>
+                <a:ea typeface="Arial"/>
+                <a:cs typeface="Arial"/>
+                <a:sym typeface="Arial"/>
+              </a:defRPr>
             </a:lvl2pPr>
-            <a:lvl3pPr lvl="2">
-              <a:buNone/>
-              <a:defRPr/>
+            <a:lvl3pPr indent="0" lvl="2" marL="0" marR="0" algn="r">
+              <a:lnSpc>
+                <a:spcPct val="100000"/>
+              </a:lnSpc>
+              <a:spcBef>
+                <a:spcPts val="0"/>
+              </a:spcBef>
+              <a:spcAft>
+                <a:spcPts val="0"/>
+              </a:spcAft>
+              <a:buClr>
+                <a:srgbClr val="000000"/>
+              </a:buClr>
+              <a:buSzPts val="1000"/>
+              <a:buFont typeface="Arial"/>
+              <a:buNone/>
+              <a:defRPr b="0" i="0" sz="1000" u="none" cap="none" strike="noStrike">
+                <a:solidFill>
+                  <a:schemeClr val="dk2"/>
+                </a:solidFill>
+                <a:latin typeface="Arial"/>
+                <a:ea typeface="Arial"/>
+                <a:cs typeface="Arial"/>
+                <a:sym typeface="Arial"/>
+              </a:defRPr>
             </a:lvl3pPr>
-            <a:lvl4pPr lvl="3">
-              <a:buNone/>
-              <a:defRPr/>
+            <a:lvl4pPr indent="0" lvl="3" marL="0" marR="0" algn="r">
+              <a:lnSpc>
+                <a:spcPct val="100000"/>
+              </a:lnSpc>
+              <a:spcBef>
+                <a:spcPts val="0"/>
+              </a:spcBef>
+              <a:spcAft>
+                <a:spcPts val="0"/>
+              </a:spcAft>
+              <a:buClr>
+                <a:srgbClr val="000000"/>
+              </a:buClr>
+              <a:buSzPts val="1000"/>
+              <a:buFont typeface="Arial"/>
+              <a:buNone/>
+              <a:defRPr b="0" i="0" sz="1000" u="none" cap="none" strike="noStrike">
+                <a:solidFill>
+                  <a:schemeClr val="dk2"/>
+                </a:solidFill>
+                <a:latin typeface="Arial"/>
+                <a:ea typeface="Arial"/>
+                <a:cs typeface="Arial"/>
+                <a:sym typeface="Arial"/>
+              </a:defRPr>
             </a:lvl4pPr>
-            <a:lvl5pPr lvl="4">
-              <a:buNone/>
-              <a:defRPr/>
+            <a:lvl5pPr indent="0" lvl="4" marL="0" marR="0" algn="r">
+              <a:lnSpc>
+                <a:spcPct val="100000"/>
+              </a:lnSpc>
+              <a:spcBef>
+                <a:spcPts val="0"/>
+              </a:spcBef>
+              <a:spcAft>
+                <a:spcPts val="0"/>
+              </a:spcAft>
+              <a:buClr>
+                <a:srgbClr val="000000"/>
+              </a:buClr>
+              <a:buSzPts val="1000"/>
+              <a:buFont typeface="Arial"/>
+              <a:buNone/>
+              <a:defRPr b="0" i="0" sz="1000" u="none" cap="none" strike="noStrike">
+                <a:solidFill>
+                  <a:schemeClr val="dk2"/>
+                </a:solidFill>
+                <a:latin typeface="Arial"/>
+                <a:ea typeface="Arial"/>
+                <a:cs typeface="Arial"/>
+                <a:sym typeface="Arial"/>
+              </a:defRPr>
             </a:lvl5pPr>
-            <a:lvl6pPr lvl="5">
-              <a:buNone/>
-              <a:defRPr/>
+            <a:lvl6pPr indent="0" lvl="5" marL="0" marR="0" algn="r">
+              <a:lnSpc>
+                <a:spcPct val="100000"/>
+              </a:lnSpc>
+              <a:spcBef>
+                <a:spcPts val="0"/>
+              </a:spcBef>
+              <a:spcAft>
+                <a:spcPts val="0"/>
+              </a:spcAft>
+              <a:buClr>
+                <a:srgbClr val="000000"/>
+              </a:buClr>
+              <a:buSzPts val="1000"/>
+              <a:buFont typeface="Arial"/>
+              <a:buNone/>
+              <a:defRPr b="0" i="0" sz="1000" u="none" cap="none" strike="noStrike">
+                <a:solidFill>
+                  <a:schemeClr val="dk2"/>
+                </a:solidFill>
+                <a:latin typeface="Arial"/>
+                <a:ea typeface="Arial"/>
+                <a:cs typeface="Arial"/>
+                <a:sym typeface="Arial"/>
+              </a:defRPr>
             </a:lvl6pPr>
-            <a:lvl7pPr lvl="6">
-              <a:buNone/>
-              <a:defRPr/>
+            <a:lvl7pPr indent="0" lvl="6" marL="0" marR="0" algn="r">
+              <a:lnSpc>
+                <a:spcPct val="100000"/>
+              </a:lnSpc>
+              <a:spcBef>
+                <a:spcPts val="0"/>
+              </a:spcBef>
+              <a:spcAft>
+                <a:spcPts val="0"/>
+              </a:spcAft>
+              <a:buClr>
+                <a:srgbClr val="000000"/>
+              </a:buClr>
+              <a:buSzPts val="1000"/>
+              <a:buFont typeface="Arial"/>
+              <a:buNone/>
+              <a:defRPr b="0" i="0" sz="1000" u="none" cap="none" strike="noStrike">
+                <a:solidFill>
+                  <a:schemeClr val="dk2"/>
+                </a:solidFill>
+                <a:latin typeface="Arial"/>
+                <a:ea typeface="Arial"/>
+                <a:cs typeface="Arial"/>
+                <a:sym typeface="Arial"/>
+              </a:defRPr>
             </a:lvl7pPr>
-            <a:lvl8pPr lvl="7">
-              <a:buNone/>
-              <a:defRPr/>
+            <a:lvl8pPr indent="0" lvl="7" marL="0" marR="0" algn="r">
+              <a:lnSpc>
+                <a:spcPct val="100000"/>
+              </a:lnSpc>
+              <a:spcBef>
+                <a:spcPts val="0"/>
+              </a:spcBef>
+              <a:spcAft>
+                <a:spcPts val="0"/>
+              </a:spcAft>
+              <a:buClr>
+                <a:srgbClr val="000000"/>
+              </a:buClr>
+              <a:buSzPts val="1000"/>
+              <a:buFont typeface="Arial"/>
+              <a:buNone/>
+              <a:defRPr b="0" i="0" sz="1000" u="none" cap="none" strike="noStrike">
+                <a:solidFill>
+                  <a:schemeClr val="dk2"/>
+                </a:solidFill>
+                <a:latin typeface="Arial"/>
+                <a:ea typeface="Arial"/>
+                <a:cs typeface="Arial"/>
+                <a:sym typeface="Arial"/>
+              </a:defRPr>
             </a:lvl8pPr>
-            <a:lvl9pPr lvl="8">
-              <a:buNone/>
-              <a:defRPr/>
+            <a:lvl9pPr indent="0" lvl="8" marL="0" marR="0" algn="r">
+              <a:lnSpc>
+                <a:spcPct val="100000"/>
+              </a:lnSpc>
+              <a:spcBef>
+                <a:spcPts val="0"/>
+              </a:spcBef>
+              <a:spcAft>
+                <a:spcPts val="0"/>
+              </a:spcAft>
+              <a:buClr>
+                <a:srgbClr val="000000"/>
+              </a:buClr>
+              <a:buSzPts val="1000"/>
+              <a:buFont typeface="Arial"/>
+              <a:buNone/>
+              <a:defRPr b="0" i="0" sz="1000" u="none" cap="none" strike="noStrike">
+                <a:solidFill>
+                  <a:schemeClr val="dk2"/>
+                </a:solidFill>
+                <a:latin typeface="Arial"/>
+                <a:ea typeface="Arial"/>
+                <a:cs typeface="Arial"/>
+                <a:sym typeface="Arial"/>
+              </a:defRPr>
             </a:lvl9pPr>
           </a:lstStyle>
           <a:p>
@@ -3824,7 +5870,7 @@
       </p:grpSpPr>
       <p:sp>
         <p:nvSpPr>
-          <p:cNvPr id="29" name="Google Shape;29;p7"/>
+          <p:cNvPr id="29" name="Google Shape;29;p17"/>
           <p:cNvSpPr txBox="1"/>
           <p:nvPr>
             <p:ph type="title"/>
@@ -3838,13 +5884,20 @@
           <a:prstGeom prst="rect">
             <a:avLst/>
           </a:prstGeom>
+          <a:noFill/>
+          <a:ln>
+            <a:noFill/>
+          </a:ln>
         </p:spPr>
         <p:txBody>
           <a:bodyPr anchorCtr="0" anchor="b" bIns="91425" lIns="91425" spcFirstLastPara="1" rIns="91425" wrap="square" tIns="91425">
             <a:normAutofit/>
           </a:bodyPr>
           <a:lstStyle>
-            <a:lvl1pPr lvl="0">
+            <a:lvl1pPr lvl="0" algn="l">
+              <a:lnSpc>
+                <a:spcPct val="100000"/>
+              </a:lnSpc>
               <a:spcBef>
                 <a:spcPts val="0"/>
               </a:spcBef>
@@ -3855,7 +5908,10 @@
               <a:buNone/>
               <a:defRPr sz="2400"/>
             </a:lvl1pPr>
-            <a:lvl2pPr lvl="1">
+            <a:lvl2pPr lvl="1" algn="l">
+              <a:lnSpc>
+                <a:spcPct val="100000"/>
+              </a:lnSpc>
               <a:spcBef>
                 <a:spcPts val="0"/>
               </a:spcBef>
@@ -3866,7 +5922,10 @@
               <a:buNone/>
               <a:defRPr sz="2400"/>
             </a:lvl2pPr>
-            <a:lvl3pPr lvl="2">
+            <a:lvl3pPr lvl="2" algn="l">
+              <a:lnSpc>
+                <a:spcPct val="100000"/>
+              </a:lnSpc>
               <a:spcBef>
                 <a:spcPts val="0"/>
               </a:spcBef>
@@ -3877,7 +5936,10 @@
               <a:buNone/>
               <a:defRPr sz="2400"/>
             </a:lvl3pPr>
-            <a:lvl4pPr lvl="3">
+            <a:lvl4pPr lvl="3" algn="l">
+              <a:lnSpc>
+                <a:spcPct val="100000"/>
+              </a:lnSpc>
               <a:spcBef>
                 <a:spcPts val="0"/>
               </a:spcBef>
@@ -3888,7 +5950,10 @@
               <a:buNone/>
               <a:defRPr sz="2400"/>
             </a:lvl4pPr>
-            <a:lvl5pPr lvl="4">
+            <a:lvl5pPr lvl="4" algn="l">
+              <a:lnSpc>
+                <a:spcPct val="100000"/>
+              </a:lnSpc>
               <a:spcBef>
                 <a:spcPts val="0"/>
               </a:spcBef>
@@ -3899,7 +5964,10 @@
               <a:buNone/>
               <a:defRPr sz="2400"/>
             </a:lvl5pPr>
-            <a:lvl6pPr lvl="5">
+            <a:lvl6pPr lvl="5" algn="l">
+              <a:lnSpc>
+                <a:spcPct val="100000"/>
+              </a:lnSpc>
               <a:spcBef>
                 <a:spcPts val="0"/>
               </a:spcBef>
@@ -3910,7 +5978,10 @@
               <a:buNone/>
               <a:defRPr sz="2400"/>
             </a:lvl6pPr>
-            <a:lvl7pPr lvl="6">
+            <a:lvl7pPr lvl="6" algn="l">
+              <a:lnSpc>
+                <a:spcPct val="100000"/>
+              </a:lnSpc>
               <a:spcBef>
                 <a:spcPts val="0"/>
               </a:spcBef>
@@ -3921,7 +5992,10 @@
               <a:buNone/>
               <a:defRPr sz="2400"/>
             </a:lvl7pPr>
-            <a:lvl8pPr lvl="7">
+            <a:lvl8pPr lvl="7" algn="l">
+              <a:lnSpc>
+                <a:spcPct val="100000"/>
+              </a:lnSpc>
               <a:spcBef>
                 <a:spcPts val="0"/>
               </a:spcBef>
@@ -3932,7 +6006,10 @@
               <a:buNone/>
               <a:defRPr sz="2400"/>
             </a:lvl8pPr>
-            <a:lvl9pPr lvl="8">
+            <a:lvl9pPr lvl="8" algn="l">
+              <a:lnSpc>
+                <a:spcPct val="100000"/>
+              </a:lnSpc>
               <a:spcBef>
                 <a:spcPts val="0"/>
               </a:spcBef>
@@ -3949,7 +6026,7 @@
       </p:sp>
       <p:sp>
         <p:nvSpPr>
-          <p:cNvPr id="30" name="Google Shape;30;p7"/>
+          <p:cNvPr id="30" name="Google Shape;30;p17"/>
           <p:cNvSpPr txBox="1"/>
           <p:nvPr>
             <p:ph idx="1" type="body"/>
@@ -3963,13 +6040,20 @@
           <a:prstGeom prst="rect">
             <a:avLst/>
           </a:prstGeom>
+          <a:noFill/>
+          <a:ln>
+            <a:noFill/>
+          </a:ln>
         </p:spPr>
         <p:txBody>
           <a:bodyPr anchorCtr="0" anchor="t" bIns="91425" lIns="91425" spcFirstLastPara="1" rIns="91425" wrap="square" tIns="91425">
             <a:normAutofit/>
           </a:bodyPr>
           <a:lstStyle>
-            <a:lvl1pPr indent="-304800" lvl="0" marL="457200">
+            <a:lvl1pPr indent="-304800" lvl="0" marL="457200" algn="l">
+              <a:lnSpc>
+                <a:spcPct val="115000"/>
+              </a:lnSpc>
               <a:spcBef>
                 <a:spcPts val="0"/>
               </a:spcBef>
@@ -3980,7 +6064,10 @@
               <a:buChar char="●"/>
               <a:defRPr sz="1200"/>
             </a:lvl1pPr>
-            <a:lvl2pPr indent="-304800" lvl="1" marL="914400">
+            <a:lvl2pPr indent="-304800" lvl="1" marL="914400" algn="l">
+              <a:lnSpc>
+                <a:spcPct val="115000"/>
+              </a:lnSpc>
               <a:spcBef>
                 <a:spcPts val="0"/>
               </a:spcBef>
@@ -3991,7 +6078,10 @@
               <a:buChar char="○"/>
               <a:defRPr sz="1200"/>
             </a:lvl2pPr>
-            <a:lvl3pPr indent="-304800" lvl="2" marL="1371600">
+            <a:lvl3pPr indent="-304800" lvl="2" marL="1371600" algn="l">
+              <a:lnSpc>
+                <a:spcPct val="115000"/>
+              </a:lnSpc>
               <a:spcBef>
                 <a:spcPts val="0"/>
               </a:spcBef>
@@ -4002,7 +6092,10 @@
               <a:buChar char="■"/>
               <a:defRPr sz="1200"/>
             </a:lvl3pPr>
-            <a:lvl4pPr indent="-304800" lvl="3" marL="1828800">
+            <a:lvl4pPr indent="-304800" lvl="3" marL="1828800" algn="l">
+              <a:lnSpc>
+                <a:spcPct val="115000"/>
+              </a:lnSpc>
               <a:spcBef>
                 <a:spcPts val="0"/>
               </a:spcBef>
@@ -4013,7 +6106,10 @@
               <a:buChar char="●"/>
               <a:defRPr sz="1200"/>
             </a:lvl4pPr>
-            <a:lvl5pPr indent="-304800" lvl="4" marL="2286000">
+            <a:lvl5pPr indent="-304800" lvl="4" marL="2286000" algn="l">
+              <a:lnSpc>
+                <a:spcPct val="115000"/>
+              </a:lnSpc>
               <a:spcBef>
                 <a:spcPts val="0"/>
               </a:spcBef>
@@ -4024,7 +6120,10 @@
               <a:buChar char="○"/>
               <a:defRPr sz="1200"/>
             </a:lvl5pPr>
-            <a:lvl6pPr indent="-304800" lvl="5" marL="2743200">
+            <a:lvl6pPr indent="-304800" lvl="5" marL="2743200" algn="l">
+              <a:lnSpc>
+                <a:spcPct val="115000"/>
+              </a:lnSpc>
               <a:spcBef>
                 <a:spcPts val="0"/>
               </a:spcBef>
@@ -4035,7 +6134,10 @@
               <a:buChar char="■"/>
               <a:defRPr sz="1200"/>
             </a:lvl6pPr>
-            <a:lvl7pPr indent="-304800" lvl="6" marL="3200400">
+            <a:lvl7pPr indent="-304800" lvl="6" marL="3200400" algn="l">
+              <a:lnSpc>
+                <a:spcPct val="115000"/>
+              </a:lnSpc>
               <a:spcBef>
                 <a:spcPts val="0"/>
               </a:spcBef>
@@ -4046,7 +6148,10 @@
               <a:buChar char="●"/>
               <a:defRPr sz="1200"/>
             </a:lvl7pPr>
-            <a:lvl8pPr indent="-304800" lvl="7" marL="3657600">
+            <a:lvl8pPr indent="-304800" lvl="7" marL="3657600" algn="l">
+              <a:lnSpc>
+                <a:spcPct val="115000"/>
+              </a:lnSpc>
               <a:spcBef>
                 <a:spcPts val="0"/>
               </a:spcBef>
@@ -4057,7 +6162,10 @@
               <a:buChar char="○"/>
               <a:defRPr sz="1200"/>
             </a:lvl8pPr>
-            <a:lvl9pPr indent="-304800" lvl="8" marL="4114800">
+            <a:lvl9pPr indent="-304800" lvl="8" marL="4114800" algn="l">
+              <a:lnSpc>
+                <a:spcPct val="115000"/>
+              </a:lnSpc>
               <a:spcBef>
                 <a:spcPts val="0"/>
               </a:spcBef>
@@ -4074,7 +6182,7 @@
       </p:sp>
       <p:sp>
         <p:nvSpPr>
-          <p:cNvPr id="31" name="Google Shape;31;p7"/>
+          <p:cNvPr id="31" name="Google Shape;31;p17"/>
           <p:cNvSpPr txBox="1"/>
           <p:nvPr>
             <p:ph idx="12" type="sldNum"/>
@@ -4088,47 +6196,249 @@
           <a:prstGeom prst="rect">
             <a:avLst/>
           </a:prstGeom>
+          <a:noFill/>
+          <a:ln>
+            <a:noFill/>
+          </a:ln>
         </p:spPr>
         <p:txBody>
           <a:bodyPr anchorCtr="0" anchor="ctr" bIns="91425" lIns="91425" spcFirstLastPara="1" rIns="91425" wrap="square" tIns="91425">
             <a:normAutofit/>
           </a:bodyPr>
           <a:lstStyle>
-            <a:lvl1pPr lvl="0">
-              <a:buNone/>
-              <a:defRPr/>
+            <a:lvl1pPr indent="0" lvl="0" marL="0" marR="0" algn="r">
+              <a:lnSpc>
+                <a:spcPct val="100000"/>
+              </a:lnSpc>
+              <a:spcBef>
+                <a:spcPts val="0"/>
+              </a:spcBef>
+              <a:spcAft>
+                <a:spcPts val="0"/>
+              </a:spcAft>
+              <a:buClr>
+                <a:srgbClr val="000000"/>
+              </a:buClr>
+              <a:buSzPts val="1000"/>
+              <a:buFont typeface="Arial"/>
+              <a:buNone/>
+              <a:defRPr b="0" i="0" sz="1000" u="none" cap="none" strike="noStrike">
+                <a:solidFill>
+                  <a:schemeClr val="dk2"/>
+                </a:solidFill>
+                <a:latin typeface="Arial"/>
+                <a:ea typeface="Arial"/>
+                <a:cs typeface="Arial"/>
+                <a:sym typeface="Arial"/>
+              </a:defRPr>
             </a:lvl1pPr>
-            <a:lvl2pPr lvl="1">
-              <a:buNone/>
-              <a:defRPr/>
+            <a:lvl2pPr indent="0" lvl="1" marL="0" marR="0" algn="r">
+              <a:lnSpc>
+                <a:spcPct val="100000"/>
+              </a:lnSpc>
+              <a:spcBef>
+                <a:spcPts val="0"/>
+              </a:spcBef>
+              <a:spcAft>
+                <a:spcPts val="0"/>
+              </a:spcAft>
+              <a:buClr>
+                <a:srgbClr val="000000"/>
+              </a:buClr>
+              <a:buSzPts val="1000"/>
+              <a:buFont typeface="Arial"/>
+              <a:buNone/>
+              <a:defRPr b="0" i="0" sz="1000" u="none" cap="none" strike="noStrike">
+                <a:solidFill>
+                  <a:schemeClr val="dk2"/>
+                </a:solidFill>
+                <a:latin typeface="Arial"/>
+                <a:ea typeface="Arial"/>
+                <a:cs typeface="Arial"/>
+                <a:sym typeface="Arial"/>
+              </a:defRPr>
             </a:lvl2pPr>
-            <a:lvl3pPr lvl="2">
-              <a:buNone/>
-              <a:defRPr/>
+            <a:lvl3pPr indent="0" lvl="2" marL="0" marR="0" algn="r">
+              <a:lnSpc>
+                <a:spcPct val="100000"/>
+              </a:lnSpc>
+              <a:spcBef>
+                <a:spcPts val="0"/>
+              </a:spcBef>
+              <a:spcAft>
+                <a:spcPts val="0"/>
+              </a:spcAft>
+              <a:buClr>
+                <a:srgbClr val="000000"/>
+              </a:buClr>
+              <a:buSzPts val="1000"/>
+              <a:buFont typeface="Arial"/>
+              <a:buNone/>
+              <a:defRPr b="0" i="0" sz="1000" u="none" cap="none" strike="noStrike">
+                <a:solidFill>
+                  <a:schemeClr val="dk2"/>
+                </a:solidFill>
+                <a:latin typeface="Arial"/>
+                <a:ea typeface="Arial"/>
+                <a:cs typeface="Arial"/>
+                <a:sym typeface="Arial"/>
+              </a:defRPr>
             </a:lvl3pPr>
-            <a:lvl4pPr lvl="3">
-              <a:buNone/>
-              <a:defRPr/>
+            <a:lvl4pPr indent="0" lvl="3" marL="0" marR="0" algn="r">
+              <a:lnSpc>
+                <a:spcPct val="100000"/>
+              </a:lnSpc>
+              <a:spcBef>
+                <a:spcPts val="0"/>
+              </a:spcBef>
+              <a:spcAft>
+                <a:spcPts val="0"/>
+              </a:spcAft>
+              <a:buClr>
+                <a:srgbClr val="000000"/>
+              </a:buClr>
+              <a:buSzPts val="1000"/>
+              <a:buFont typeface="Arial"/>
+              <a:buNone/>
+              <a:defRPr b="0" i="0" sz="1000" u="none" cap="none" strike="noStrike">
+                <a:solidFill>
+                  <a:schemeClr val="dk2"/>
+                </a:solidFill>
+                <a:latin typeface="Arial"/>
+                <a:ea typeface="Arial"/>
+                <a:cs typeface="Arial"/>
+                <a:sym typeface="Arial"/>
+              </a:defRPr>
             </a:lvl4pPr>
-            <a:lvl5pPr lvl="4">
-              <a:buNone/>
-              <a:defRPr/>
+            <a:lvl5pPr indent="0" lvl="4" marL="0" marR="0" algn="r">
+              <a:lnSpc>
+                <a:spcPct val="100000"/>
+              </a:lnSpc>
+              <a:spcBef>
+                <a:spcPts val="0"/>
+              </a:spcBef>
+              <a:spcAft>
+                <a:spcPts val="0"/>
+              </a:spcAft>
+              <a:buClr>
+                <a:srgbClr val="000000"/>
+              </a:buClr>
+              <a:buSzPts val="1000"/>
+              <a:buFont typeface="Arial"/>
+              <a:buNone/>
+              <a:defRPr b="0" i="0" sz="1000" u="none" cap="none" strike="noStrike">
+                <a:solidFill>
+                  <a:schemeClr val="dk2"/>
+                </a:solidFill>
+                <a:latin typeface="Arial"/>
+                <a:ea typeface="Arial"/>
+                <a:cs typeface="Arial"/>
+                <a:sym typeface="Arial"/>
+              </a:defRPr>
             </a:lvl5pPr>
-            <a:lvl6pPr lvl="5">
-              <a:buNone/>
-              <a:defRPr/>
+            <a:lvl6pPr indent="0" lvl="5" marL="0" marR="0" algn="r">
+              <a:lnSpc>
+                <a:spcPct val="100000"/>
+              </a:lnSpc>
+              <a:spcBef>
+                <a:spcPts val="0"/>
+              </a:spcBef>
+              <a:spcAft>
+                <a:spcPts val="0"/>
+              </a:spcAft>
+              <a:buClr>
+                <a:srgbClr val="000000"/>
+              </a:buClr>
+              <a:buSzPts val="1000"/>
+              <a:buFont typeface="Arial"/>
+              <a:buNone/>
+              <a:defRPr b="0" i="0" sz="1000" u="none" cap="none" strike="noStrike">
+                <a:solidFill>
+                  <a:schemeClr val="dk2"/>
+                </a:solidFill>
+                <a:latin typeface="Arial"/>
+                <a:ea typeface="Arial"/>
+                <a:cs typeface="Arial"/>
+                <a:sym typeface="Arial"/>
+              </a:defRPr>
             </a:lvl6pPr>
-            <a:lvl7pPr lvl="6">
-              <a:buNone/>
-              <a:defRPr/>
+            <a:lvl7pPr indent="0" lvl="6" marL="0" marR="0" algn="r">
+              <a:lnSpc>
+                <a:spcPct val="100000"/>
+              </a:lnSpc>
+              <a:spcBef>
+                <a:spcPts val="0"/>
+              </a:spcBef>
+              <a:spcAft>
+                <a:spcPts val="0"/>
+              </a:spcAft>
+              <a:buClr>
+                <a:srgbClr val="000000"/>
+              </a:buClr>
+              <a:buSzPts val="1000"/>
+              <a:buFont typeface="Arial"/>
+              <a:buNone/>
+              <a:defRPr b="0" i="0" sz="1000" u="none" cap="none" strike="noStrike">
+                <a:solidFill>
+                  <a:schemeClr val="dk2"/>
+                </a:solidFill>
+                <a:latin typeface="Arial"/>
+                <a:ea typeface="Arial"/>
+                <a:cs typeface="Arial"/>
+                <a:sym typeface="Arial"/>
+              </a:defRPr>
             </a:lvl7pPr>
-            <a:lvl8pPr lvl="7">
-              <a:buNone/>
-              <a:defRPr/>
+            <a:lvl8pPr indent="0" lvl="7" marL="0" marR="0" algn="r">
+              <a:lnSpc>
+                <a:spcPct val="100000"/>
+              </a:lnSpc>
+              <a:spcBef>
+                <a:spcPts val="0"/>
+              </a:spcBef>
+              <a:spcAft>
+                <a:spcPts val="0"/>
+              </a:spcAft>
+              <a:buClr>
+                <a:srgbClr val="000000"/>
+              </a:buClr>
+              <a:buSzPts val="1000"/>
+              <a:buFont typeface="Arial"/>
+              <a:buNone/>
+              <a:defRPr b="0" i="0" sz="1000" u="none" cap="none" strike="noStrike">
+                <a:solidFill>
+                  <a:schemeClr val="dk2"/>
+                </a:solidFill>
+                <a:latin typeface="Arial"/>
+                <a:ea typeface="Arial"/>
+                <a:cs typeface="Arial"/>
+                <a:sym typeface="Arial"/>
+              </a:defRPr>
             </a:lvl8pPr>
-            <a:lvl9pPr lvl="8">
-              <a:buNone/>
-              <a:defRPr/>
+            <a:lvl9pPr indent="0" lvl="8" marL="0" marR="0" algn="r">
+              <a:lnSpc>
+                <a:spcPct val="100000"/>
+              </a:lnSpc>
+              <a:spcBef>
+                <a:spcPts val="0"/>
+              </a:spcBef>
+              <a:spcAft>
+                <a:spcPts val="0"/>
+              </a:spcAft>
+              <a:buClr>
+                <a:srgbClr val="000000"/>
+              </a:buClr>
+              <a:buSzPts val="1000"/>
+              <a:buFont typeface="Arial"/>
+              <a:buNone/>
+              <a:defRPr b="0" i="0" sz="1000" u="none" cap="none" strike="noStrike">
+                <a:solidFill>
+                  <a:schemeClr val="dk2"/>
+                </a:solidFill>
+                <a:latin typeface="Arial"/>
+                <a:ea typeface="Arial"/>
+                <a:cs typeface="Arial"/>
+                <a:sym typeface="Arial"/>
+              </a:defRPr>
             </a:lvl9pPr>
           </a:lstStyle>
           <a:p>
@@ -4176,7 +6486,7 @@
       </p:grpSpPr>
       <p:sp>
         <p:nvSpPr>
-          <p:cNvPr id="33" name="Google Shape;33;p8"/>
+          <p:cNvPr id="33" name="Google Shape;33;p18"/>
           <p:cNvSpPr txBox="1"/>
           <p:nvPr>
             <p:ph type="title"/>
@@ -4190,13 +6500,20 @@
           <a:prstGeom prst="rect">
             <a:avLst/>
           </a:prstGeom>
+          <a:noFill/>
+          <a:ln>
+            <a:noFill/>
+          </a:ln>
         </p:spPr>
         <p:txBody>
           <a:bodyPr anchorCtr="0" anchor="ctr" bIns="91425" lIns="91425" spcFirstLastPara="1" rIns="91425" wrap="square" tIns="91425">
             <a:normAutofit/>
           </a:bodyPr>
           <a:lstStyle>
-            <a:lvl1pPr lvl="0">
+            <a:lvl1pPr lvl="0" algn="l">
+              <a:lnSpc>
+                <a:spcPct val="100000"/>
+              </a:lnSpc>
               <a:spcBef>
                 <a:spcPts val="0"/>
               </a:spcBef>
@@ -4207,7 +6524,10 @@
               <a:buNone/>
               <a:defRPr sz="4800"/>
             </a:lvl1pPr>
-            <a:lvl2pPr lvl="1">
+            <a:lvl2pPr lvl="1" algn="l">
+              <a:lnSpc>
+                <a:spcPct val="100000"/>
+              </a:lnSpc>
               <a:spcBef>
                 <a:spcPts val="0"/>
               </a:spcBef>
@@ -4218,7 +6538,10 @@
               <a:buNone/>
               <a:defRPr sz="4800"/>
             </a:lvl2pPr>
-            <a:lvl3pPr lvl="2">
+            <a:lvl3pPr lvl="2" algn="l">
+              <a:lnSpc>
+                <a:spcPct val="100000"/>
+              </a:lnSpc>
               <a:spcBef>
                 <a:spcPts val="0"/>
               </a:spcBef>
@@ -4229,7 +6552,10 @@
               <a:buNone/>
               <a:defRPr sz="4800"/>
             </a:lvl3pPr>
-            <a:lvl4pPr lvl="3">
+            <a:lvl4pPr lvl="3" algn="l">
+              <a:lnSpc>
+                <a:spcPct val="100000"/>
+              </a:lnSpc>
               <a:spcBef>
                 <a:spcPts val="0"/>
               </a:spcBef>
@@ -4240,7 +6566,10 @@
               <a:buNone/>
               <a:defRPr sz="4800"/>
             </a:lvl4pPr>
-            <a:lvl5pPr lvl="4">
+            <a:lvl5pPr lvl="4" algn="l">
+              <a:lnSpc>
+                <a:spcPct val="100000"/>
+              </a:lnSpc>
               <a:spcBef>
                 <a:spcPts val="0"/>
               </a:spcBef>
@@ -4251,7 +6580,10 @@
               <a:buNone/>
               <a:defRPr sz="4800"/>
             </a:lvl5pPr>
-            <a:lvl6pPr lvl="5">
+            <a:lvl6pPr lvl="5" algn="l">
+              <a:lnSpc>
+                <a:spcPct val="100000"/>
+              </a:lnSpc>
               <a:spcBef>
                 <a:spcPts val="0"/>
               </a:spcBef>
@@ -4262,7 +6594,10 @@
               <a:buNone/>
               <a:defRPr sz="4800"/>
             </a:lvl6pPr>
-            <a:lvl7pPr lvl="6">
+            <a:lvl7pPr lvl="6" algn="l">
+              <a:lnSpc>
+                <a:spcPct val="100000"/>
+              </a:lnSpc>
               <a:spcBef>
                 <a:spcPts val="0"/>
               </a:spcBef>
@@ -4273,7 +6608,10 @@
               <a:buNone/>
               <a:defRPr sz="4800"/>
             </a:lvl7pPr>
-            <a:lvl8pPr lvl="7">
+            <a:lvl8pPr lvl="7" algn="l">
+              <a:lnSpc>
+                <a:spcPct val="100000"/>
+              </a:lnSpc>
               <a:spcBef>
                 <a:spcPts val="0"/>
               </a:spcBef>
@@ -4284,7 +6622,10 @@
               <a:buNone/>
               <a:defRPr sz="4800"/>
             </a:lvl8pPr>
-            <a:lvl9pPr lvl="8">
+            <a:lvl9pPr lvl="8" algn="l">
+              <a:lnSpc>
+                <a:spcPct val="100000"/>
+              </a:lnSpc>
               <a:spcBef>
                 <a:spcPts val="0"/>
               </a:spcBef>
@@ -4301,7 +6642,7 @@
       </p:sp>
       <p:sp>
         <p:nvSpPr>
-          <p:cNvPr id="34" name="Google Shape;34;p8"/>
+          <p:cNvPr id="34" name="Google Shape;34;p18"/>
           <p:cNvSpPr txBox="1"/>
           <p:nvPr>
             <p:ph idx="12" type="sldNum"/>
@@ -4315,47 +6656,249 @@
           <a:prstGeom prst="rect">
             <a:avLst/>
           </a:prstGeom>
+          <a:noFill/>
+          <a:ln>
+            <a:noFill/>
+          </a:ln>
         </p:spPr>
         <p:txBody>
           <a:bodyPr anchorCtr="0" anchor="ctr" bIns="91425" lIns="91425" spcFirstLastPara="1" rIns="91425" wrap="square" tIns="91425">
             <a:normAutofit/>
           </a:bodyPr>
           <a:lstStyle>
-            <a:lvl1pPr lvl="0">
-              <a:buNone/>
-              <a:defRPr/>
+            <a:lvl1pPr indent="0" lvl="0" marL="0" marR="0" algn="r">
+              <a:lnSpc>
+                <a:spcPct val="100000"/>
+              </a:lnSpc>
+              <a:spcBef>
+                <a:spcPts val="0"/>
+              </a:spcBef>
+              <a:spcAft>
+                <a:spcPts val="0"/>
+              </a:spcAft>
+              <a:buClr>
+                <a:srgbClr val="000000"/>
+              </a:buClr>
+              <a:buSzPts val="1000"/>
+              <a:buFont typeface="Arial"/>
+              <a:buNone/>
+              <a:defRPr b="0" i="0" sz="1000" u="none" cap="none" strike="noStrike">
+                <a:solidFill>
+                  <a:schemeClr val="dk2"/>
+                </a:solidFill>
+                <a:latin typeface="Arial"/>
+                <a:ea typeface="Arial"/>
+                <a:cs typeface="Arial"/>
+                <a:sym typeface="Arial"/>
+              </a:defRPr>
             </a:lvl1pPr>
-            <a:lvl2pPr lvl="1">
-              <a:buNone/>
-              <a:defRPr/>
+            <a:lvl2pPr indent="0" lvl="1" marL="0" marR="0" algn="r">
+              <a:lnSpc>
+                <a:spcPct val="100000"/>
+              </a:lnSpc>
+              <a:spcBef>
+                <a:spcPts val="0"/>
+              </a:spcBef>
+              <a:spcAft>
+                <a:spcPts val="0"/>
+              </a:spcAft>
+              <a:buClr>
+                <a:srgbClr val="000000"/>
+              </a:buClr>
+              <a:buSzPts val="1000"/>
+              <a:buFont typeface="Arial"/>
+              <a:buNone/>
+              <a:defRPr b="0" i="0" sz="1000" u="none" cap="none" strike="noStrike">
+                <a:solidFill>
+                  <a:schemeClr val="dk2"/>
+                </a:solidFill>
+                <a:latin typeface="Arial"/>
+                <a:ea typeface="Arial"/>
+                <a:cs typeface="Arial"/>
+                <a:sym typeface="Arial"/>
+              </a:defRPr>
             </a:lvl2pPr>
-            <a:lvl3pPr lvl="2">
-              <a:buNone/>
-              <a:defRPr/>
+            <a:lvl3pPr indent="0" lvl="2" marL="0" marR="0" algn="r">
+              <a:lnSpc>
+                <a:spcPct val="100000"/>
+              </a:lnSpc>
+              <a:spcBef>
+                <a:spcPts val="0"/>
+              </a:spcBef>
+              <a:spcAft>
+                <a:spcPts val="0"/>
+              </a:spcAft>
+              <a:buClr>
+                <a:srgbClr val="000000"/>
+              </a:buClr>
+              <a:buSzPts val="1000"/>
+              <a:buFont typeface="Arial"/>
+              <a:buNone/>
+              <a:defRPr b="0" i="0" sz="1000" u="none" cap="none" strike="noStrike">
+                <a:solidFill>
+                  <a:schemeClr val="dk2"/>
+                </a:solidFill>
+                <a:latin typeface="Arial"/>
+                <a:ea typeface="Arial"/>
+                <a:cs typeface="Arial"/>
+                <a:sym typeface="Arial"/>
+              </a:defRPr>
             </a:lvl3pPr>
-            <a:lvl4pPr lvl="3">
-              <a:buNone/>
-              <a:defRPr/>
+            <a:lvl4pPr indent="0" lvl="3" marL="0" marR="0" algn="r">
+              <a:lnSpc>
+                <a:spcPct val="100000"/>
+              </a:lnSpc>
+              <a:spcBef>
+                <a:spcPts val="0"/>
+              </a:spcBef>
+              <a:spcAft>
+                <a:spcPts val="0"/>
+              </a:spcAft>
+              <a:buClr>
+                <a:srgbClr val="000000"/>
+              </a:buClr>
+              <a:buSzPts val="1000"/>
+              <a:buFont typeface="Arial"/>
+              <a:buNone/>
+              <a:defRPr b="0" i="0" sz="1000" u="none" cap="none" strike="noStrike">
+                <a:solidFill>
+                  <a:schemeClr val="dk2"/>
+                </a:solidFill>
+                <a:latin typeface="Arial"/>
+                <a:ea typeface="Arial"/>
+                <a:cs typeface="Arial"/>
+                <a:sym typeface="Arial"/>
+              </a:defRPr>
             </a:lvl4pPr>
-            <a:lvl5pPr lvl="4">
-              <a:buNone/>
-              <a:defRPr/>
+            <a:lvl5pPr indent="0" lvl="4" marL="0" marR="0" algn="r">
+              <a:lnSpc>
+                <a:spcPct val="100000"/>
+              </a:lnSpc>
+              <a:spcBef>
+                <a:spcPts val="0"/>
+              </a:spcBef>
+              <a:spcAft>
+                <a:spcPts val="0"/>
+              </a:spcAft>
+              <a:buClr>
+                <a:srgbClr val="000000"/>
+              </a:buClr>
+              <a:buSzPts val="1000"/>
+              <a:buFont typeface="Arial"/>
+              <a:buNone/>
+              <a:defRPr b="0" i="0" sz="1000" u="none" cap="none" strike="noStrike">
+                <a:solidFill>
+                  <a:schemeClr val="dk2"/>
+                </a:solidFill>
+                <a:latin typeface="Arial"/>
+                <a:ea typeface="Arial"/>
+                <a:cs typeface="Arial"/>
+                <a:sym typeface="Arial"/>
+              </a:defRPr>
             </a:lvl5pPr>
-            <a:lvl6pPr lvl="5">
-              <a:buNone/>
-              <a:defRPr/>
+            <a:lvl6pPr indent="0" lvl="5" marL="0" marR="0" algn="r">
+              <a:lnSpc>
+                <a:spcPct val="100000"/>
+              </a:lnSpc>
+              <a:spcBef>
+                <a:spcPts val="0"/>
+              </a:spcBef>
+              <a:spcAft>
+                <a:spcPts val="0"/>
+              </a:spcAft>
+              <a:buClr>
+                <a:srgbClr val="000000"/>
+              </a:buClr>
+              <a:buSzPts val="1000"/>
+              <a:buFont typeface="Arial"/>
+              <a:buNone/>
+              <a:defRPr b="0" i="0" sz="1000" u="none" cap="none" strike="noStrike">
+                <a:solidFill>
+                  <a:schemeClr val="dk2"/>
+                </a:solidFill>
+                <a:latin typeface="Arial"/>
+                <a:ea typeface="Arial"/>
+                <a:cs typeface="Arial"/>
+                <a:sym typeface="Arial"/>
+              </a:defRPr>
             </a:lvl6pPr>
-            <a:lvl7pPr lvl="6">
-              <a:buNone/>
-              <a:defRPr/>
+            <a:lvl7pPr indent="0" lvl="6" marL="0" marR="0" algn="r">
+              <a:lnSpc>
+                <a:spcPct val="100000"/>
+              </a:lnSpc>
+              <a:spcBef>
+                <a:spcPts val="0"/>
+              </a:spcBef>
+              <a:spcAft>
+                <a:spcPts val="0"/>
+              </a:spcAft>
+              <a:buClr>
+                <a:srgbClr val="000000"/>
+              </a:buClr>
+              <a:buSzPts val="1000"/>
+              <a:buFont typeface="Arial"/>
+              <a:buNone/>
+              <a:defRPr b="0" i="0" sz="1000" u="none" cap="none" strike="noStrike">
+                <a:solidFill>
+                  <a:schemeClr val="dk2"/>
+                </a:solidFill>
+                <a:latin typeface="Arial"/>
+                <a:ea typeface="Arial"/>
+                <a:cs typeface="Arial"/>
+                <a:sym typeface="Arial"/>
+              </a:defRPr>
             </a:lvl7pPr>
-            <a:lvl8pPr lvl="7">
-              <a:buNone/>
-              <a:defRPr/>
+            <a:lvl8pPr indent="0" lvl="7" marL="0" marR="0" algn="r">
+              <a:lnSpc>
+                <a:spcPct val="100000"/>
+              </a:lnSpc>
+              <a:spcBef>
+                <a:spcPts val="0"/>
+              </a:spcBef>
+              <a:spcAft>
+                <a:spcPts val="0"/>
+              </a:spcAft>
+              <a:buClr>
+                <a:srgbClr val="000000"/>
+              </a:buClr>
+              <a:buSzPts val="1000"/>
+              <a:buFont typeface="Arial"/>
+              <a:buNone/>
+              <a:defRPr b="0" i="0" sz="1000" u="none" cap="none" strike="noStrike">
+                <a:solidFill>
+                  <a:schemeClr val="dk2"/>
+                </a:solidFill>
+                <a:latin typeface="Arial"/>
+                <a:ea typeface="Arial"/>
+                <a:cs typeface="Arial"/>
+                <a:sym typeface="Arial"/>
+              </a:defRPr>
             </a:lvl8pPr>
-            <a:lvl9pPr lvl="8">
-              <a:buNone/>
-              <a:defRPr/>
+            <a:lvl9pPr indent="0" lvl="8" marL="0" marR="0" algn="r">
+              <a:lnSpc>
+                <a:spcPct val="100000"/>
+              </a:lnSpc>
+              <a:spcBef>
+                <a:spcPts val="0"/>
+              </a:spcBef>
+              <a:spcAft>
+                <a:spcPts val="0"/>
+              </a:spcAft>
+              <a:buClr>
+                <a:srgbClr val="000000"/>
+              </a:buClr>
+              <a:buSzPts val="1000"/>
+              <a:buFont typeface="Arial"/>
+              <a:buNone/>
+              <a:defRPr b="0" i="0" sz="1000" u="none" cap="none" strike="noStrike">
+                <a:solidFill>
+                  <a:schemeClr val="dk2"/>
+                </a:solidFill>
+                <a:latin typeface="Arial"/>
+                <a:ea typeface="Arial"/>
+                <a:cs typeface="Arial"/>
+                <a:sym typeface="Arial"/>
+              </a:defRPr>
             </a:lvl9pPr>
           </a:lstStyle>
           <a:p>
@@ -4403,7 +6946,7 @@
       </p:grpSpPr>
       <p:sp>
         <p:nvSpPr>
-          <p:cNvPr id="36" name="Google Shape;36;p9"/>
+          <p:cNvPr id="36" name="Google Shape;36;p19"/>
           <p:cNvSpPr/>
           <p:nvPr/>
         </p:nvSpPr>
@@ -4428,25 +6971,41 @@
           </a:bodyPr>
           <a:lstStyle/>
           <a:p>
-            <a:pPr indent="0" lvl="0" marL="0" rtl="0" algn="l">
-              <a:spcBef>
-                <a:spcPts val="0"/>
-              </a:spcBef>
-              <a:spcAft>
-                <a:spcPts val="0"/>
-              </a:spcAft>
+            <a:pPr indent="0" lvl="0" marL="0" marR="0" rtl="0" algn="l">
+              <a:lnSpc>
+                <a:spcPct val="100000"/>
+              </a:lnSpc>
+              <a:spcBef>
+                <a:spcPts val="0"/>
+              </a:spcBef>
+              <a:spcAft>
+                <a:spcPts val="0"/>
+              </a:spcAft>
+              <a:buClr>
+                <a:srgbClr val="000000"/>
+              </a:buClr>
+              <a:buSzPts val="1400"/>
+              <a:buFont typeface="Arial"/>
               <a:buNone/>
             </a:pPr>
             <a:r>
               <a:t/>
             </a:r>
-            <a:endParaRPr/>
+            <a:endParaRPr b="0" i="0" sz="1400" u="none" cap="none" strike="noStrike">
+              <a:solidFill>
+                <a:srgbClr val="000000"/>
+              </a:solidFill>
+              <a:latin typeface="Arial"/>
+              <a:ea typeface="Arial"/>
+              <a:cs typeface="Arial"/>
+              <a:sym typeface="Arial"/>
+            </a:endParaRPr>
           </a:p>
         </p:txBody>
       </p:sp>
       <p:sp>
         <p:nvSpPr>
-          <p:cNvPr id="37" name="Google Shape;37;p9"/>
+          <p:cNvPr id="37" name="Google Shape;37;p19"/>
           <p:cNvSpPr txBox="1"/>
           <p:nvPr>
             <p:ph type="title"/>
@@ -4460,6 +7019,10 @@
           <a:prstGeom prst="rect">
             <a:avLst/>
           </a:prstGeom>
+          <a:noFill/>
+          <a:ln>
+            <a:noFill/>
+          </a:ln>
         </p:spPr>
         <p:txBody>
           <a:bodyPr anchorCtr="0" anchor="b" bIns="91425" lIns="91425" spcFirstLastPara="1" rIns="91425" wrap="square" tIns="91425">
@@ -4467,6 +7030,9 @@
           </a:bodyPr>
           <a:lstStyle>
             <a:lvl1pPr lvl="0" algn="ctr">
+              <a:lnSpc>
+                <a:spcPct val="100000"/>
+              </a:lnSpc>
               <a:spcBef>
                 <a:spcPts val="0"/>
               </a:spcBef>
@@ -4478,6 +7044,9 @@
               <a:defRPr sz="4200"/>
             </a:lvl1pPr>
             <a:lvl2pPr lvl="1" algn="ctr">
+              <a:lnSpc>
+                <a:spcPct val="100000"/>
+              </a:lnSpc>
               <a:spcBef>
                 <a:spcPts val="0"/>
               </a:spcBef>
@@ -4489,6 +7058,9 @@
               <a:defRPr sz="4200"/>
             </a:lvl2pPr>
             <a:lvl3pPr lvl="2" algn="ctr">
+              <a:lnSpc>
+                <a:spcPct val="100000"/>
+              </a:lnSpc>
               <a:spcBef>
                 <a:spcPts val="0"/>
               </a:spcBef>
@@ -4500,6 +7072,9 @@
               <a:defRPr sz="4200"/>
             </a:lvl3pPr>
             <a:lvl4pPr lvl="3" algn="ctr">
+              <a:lnSpc>
+                <a:spcPct val="100000"/>
+              </a:lnSpc>
               <a:spcBef>
                 <a:spcPts val="0"/>
               </a:spcBef>
@@ -4511,6 +7086,9 @@
               <a:defRPr sz="4200"/>
             </a:lvl4pPr>
             <a:lvl5pPr lvl="4" algn="ctr">
+              <a:lnSpc>
+                <a:spcPct val="100000"/>
+              </a:lnSpc>
               <a:spcBef>
                 <a:spcPts val="0"/>
               </a:spcBef>
@@ -4522,6 +7100,9 @@
               <a:defRPr sz="4200"/>
             </a:lvl5pPr>
             <a:lvl6pPr lvl="5" algn="ctr">
+              <a:lnSpc>
+                <a:spcPct val="100000"/>
+              </a:lnSpc>
               <a:spcBef>
                 <a:spcPts val="0"/>
               </a:spcBef>
@@ -4533,6 +7114,9 @@
               <a:defRPr sz="4200"/>
             </a:lvl6pPr>
             <a:lvl7pPr lvl="6" algn="ctr">
+              <a:lnSpc>
+                <a:spcPct val="100000"/>
+              </a:lnSpc>
               <a:spcBef>
                 <a:spcPts val="0"/>
               </a:spcBef>
@@ -4544,6 +7128,9 @@
               <a:defRPr sz="4200"/>
             </a:lvl7pPr>
             <a:lvl8pPr lvl="7" algn="ctr">
+              <a:lnSpc>
+                <a:spcPct val="100000"/>
+              </a:lnSpc>
               <a:spcBef>
                 <a:spcPts val="0"/>
               </a:spcBef>
@@ -4555,6 +7142,9 @@
               <a:defRPr sz="4200"/>
             </a:lvl8pPr>
             <a:lvl9pPr lvl="8" algn="ctr">
+              <a:lnSpc>
+                <a:spcPct val="100000"/>
+              </a:lnSpc>
               <a:spcBef>
                 <a:spcPts val="0"/>
               </a:spcBef>
@@ -4571,7 +7161,7 @@
       </p:sp>
       <p:sp>
         <p:nvSpPr>
-          <p:cNvPr id="38" name="Google Shape;38;p9"/>
+          <p:cNvPr id="38" name="Google Shape;38;p19"/>
           <p:cNvSpPr txBox="1"/>
           <p:nvPr>
             <p:ph idx="1" type="subTitle"/>
@@ -4585,6 +7175,10 @@
           <a:prstGeom prst="rect">
             <a:avLst/>
           </a:prstGeom>
+          <a:noFill/>
+          <a:ln>
+            <a:noFill/>
+          </a:ln>
         </p:spPr>
         <p:txBody>
           <a:bodyPr anchorCtr="0" anchor="t" bIns="91425" lIns="91425" spcFirstLastPara="1" rIns="91425" wrap="square" tIns="91425">
@@ -4723,7 +7317,7 @@
       </p:sp>
       <p:sp>
         <p:nvSpPr>
-          <p:cNvPr id="39" name="Google Shape;39;p9"/>
+          <p:cNvPr id="39" name="Google Shape;39;p19"/>
           <p:cNvSpPr txBox="1"/>
           <p:nvPr>
             <p:ph idx="2" type="body"/>
@@ -4737,13 +7331,20 @@
           <a:prstGeom prst="rect">
             <a:avLst/>
           </a:prstGeom>
+          <a:noFill/>
+          <a:ln>
+            <a:noFill/>
+          </a:ln>
         </p:spPr>
         <p:txBody>
           <a:bodyPr anchorCtr="0" anchor="ctr" bIns="91425" lIns="91425" spcFirstLastPara="1" rIns="91425" wrap="square" tIns="91425">
             <a:normAutofit/>
           </a:bodyPr>
           <a:lstStyle>
-            <a:lvl1pPr indent="-342900" lvl="0" marL="457200">
+            <a:lvl1pPr indent="-342900" lvl="0" marL="457200" algn="l">
+              <a:lnSpc>
+                <a:spcPct val="115000"/>
+              </a:lnSpc>
               <a:spcBef>
                 <a:spcPts val="0"/>
               </a:spcBef>
@@ -4754,7 +7355,10 @@
               <a:buChar char="●"/>
               <a:defRPr/>
             </a:lvl1pPr>
-            <a:lvl2pPr indent="-317500" lvl="1" marL="914400">
+            <a:lvl2pPr indent="-317500" lvl="1" marL="914400" algn="l">
+              <a:lnSpc>
+                <a:spcPct val="115000"/>
+              </a:lnSpc>
               <a:spcBef>
                 <a:spcPts val="0"/>
               </a:spcBef>
@@ -4765,7 +7369,10 @@
               <a:buChar char="○"/>
               <a:defRPr/>
             </a:lvl2pPr>
-            <a:lvl3pPr indent="-317500" lvl="2" marL="1371600">
+            <a:lvl3pPr indent="-317500" lvl="2" marL="1371600" algn="l">
+              <a:lnSpc>
+                <a:spcPct val="115000"/>
+              </a:lnSpc>
               <a:spcBef>
                 <a:spcPts val="0"/>
               </a:spcBef>
@@ -4776,7 +7383,10 @@
               <a:buChar char="■"/>
               <a:defRPr/>
             </a:lvl3pPr>
-            <a:lvl4pPr indent="-317500" lvl="3" marL="1828800">
+            <a:lvl4pPr indent="-317500" lvl="3" marL="1828800" algn="l">
+              <a:lnSpc>
+                <a:spcPct val="115000"/>
+              </a:lnSpc>
               <a:spcBef>
                 <a:spcPts val="0"/>
               </a:spcBef>
@@ -4787,7 +7397,10 @@
               <a:buChar char="●"/>
               <a:defRPr/>
             </a:lvl4pPr>
-            <a:lvl5pPr indent="-317500" lvl="4" marL="2286000">
+            <a:lvl5pPr indent="-317500" lvl="4" marL="2286000" algn="l">
+              <a:lnSpc>
+                <a:spcPct val="115000"/>
+              </a:lnSpc>
               <a:spcBef>
                 <a:spcPts val="0"/>
               </a:spcBef>
@@ -4798,7 +7411,10 @@
               <a:buChar char="○"/>
               <a:defRPr/>
             </a:lvl5pPr>
-            <a:lvl6pPr indent="-317500" lvl="5" marL="2743200">
+            <a:lvl6pPr indent="-317500" lvl="5" marL="2743200" algn="l">
+              <a:lnSpc>
+                <a:spcPct val="115000"/>
+              </a:lnSpc>
               <a:spcBef>
                 <a:spcPts val="0"/>
               </a:spcBef>
@@ -4809,7 +7425,10 @@
               <a:buChar char="■"/>
               <a:defRPr/>
             </a:lvl6pPr>
-            <a:lvl7pPr indent="-317500" lvl="6" marL="3200400">
+            <a:lvl7pPr indent="-317500" lvl="6" marL="3200400" algn="l">
+              <a:lnSpc>
+                <a:spcPct val="115000"/>
+              </a:lnSpc>
               <a:spcBef>
                 <a:spcPts val="0"/>
               </a:spcBef>
@@ -4820,7 +7439,10 @@
               <a:buChar char="●"/>
               <a:defRPr/>
             </a:lvl7pPr>
-            <a:lvl8pPr indent="-317500" lvl="7" marL="3657600">
+            <a:lvl8pPr indent="-317500" lvl="7" marL="3657600" algn="l">
+              <a:lnSpc>
+                <a:spcPct val="115000"/>
+              </a:lnSpc>
               <a:spcBef>
                 <a:spcPts val="0"/>
               </a:spcBef>
@@ -4831,7 +7453,10 @@
               <a:buChar char="○"/>
               <a:defRPr/>
             </a:lvl8pPr>
-            <a:lvl9pPr indent="-317500" lvl="8" marL="4114800">
+            <a:lvl9pPr indent="-317500" lvl="8" marL="4114800" algn="l">
+              <a:lnSpc>
+                <a:spcPct val="115000"/>
+              </a:lnSpc>
               <a:spcBef>
                 <a:spcPts val="0"/>
               </a:spcBef>
@@ -4848,7 +7473,7 @@
       </p:sp>
       <p:sp>
         <p:nvSpPr>
-          <p:cNvPr id="40" name="Google Shape;40;p9"/>
+          <p:cNvPr id="40" name="Google Shape;40;p19"/>
           <p:cNvSpPr txBox="1"/>
           <p:nvPr>
             <p:ph idx="12" type="sldNum"/>
@@ -4862,47 +7487,249 @@
           <a:prstGeom prst="rect">
             <a:avLst/>
           </a:prstGeom>
+          <a:noFill/>
+          <a:ln>
+            <a:noFill/>
+          </a:ln>
         </p:spPr>
         <p:txBody>
           <a:bodyPr anchorCtr="0" anchor="ctr" bIns="91425" lIns="91425" spcFirstLastPara="1" rIns="91425" wrap="square" tIns="91425">
             <a:normAutofit/>
           </a:bodyPr>
           <a:lstStyle>
-            <a:lvl1pPr lvl="0">
-              <a:buNone/>
-              <a:defRPr/>
+            <a:lvl1pPr indent="0" lvl="0" marL="0" marR="0" algn="r">
+              <a:lnSpc>
+                <a:spcPct val="100000"/>
+              </a:lnSpc>
+              <a:spcBef>
+                <a:spcPts val="0"/>
+              </a:spcBef>
+              <a:spcAft>
+                <a:spcPts val="0"/>
+              </a:spcAft>
+              <a:buClr>
+                <a:srgbClr val="000000"/>
+              </a:buClr>
+              <a:buSzPts val="1000"/>
+              <a:buFont typeface="Arial"/>
+              <a:buNone/>
+              <a:defRPr b="0" i="0" sz="1000" u="none" cap="none" strike="noStrike">
+                <a:solidFill>
+                  <a:schemeClr val="dk2"/>
+                </a:solidFill>
+                <a:latin typeface="Arial"/>
+                <a:ea typeface="Arial"/>
+                <a:cs typeface="Arial"/>
+                <a:sym typeface="Arial"/>
+              </a:defRPr>
             </a:lvl1pPr>
-            <a:lvl2pPr lvl="1">
-              <a:buNone/>
-              <a:defRPr/>
+            <a:lvl2pPr indent="0" lvl="1" marL="0" marR="0" algn="r">
+              <a:lnSpc>
+                <a:spcPct val="100000"/>
+              </a:lnSpc>
+              <a:spcBef>
+                <a:spcPts val="0"/>
+              </a:spcBef>
+              <a:spcAft>
+                <a:spcPts val="0"/>
+              </a:spcAft>
+              <a:buClr>
+                <a:srgbClr val="000000"/>
+              </a:buClr>
+              <a:buSzPts val="1000"/>
+              <a:buFont typeface="Arial"/>
+              <a:buNone/>
+              <a:defRPr b="0" i="0" sz="1000" u="none" cap="none" strike="noStrike">
+                <a:solidFill>
+                  <a:schemeClr val="dk2"/>
+                </a:solidFill>
+                <a:latin typeface="Arial"/>
+                <a:ea typeface="Arial"/>
+                <a:cs typeface="Arial"/>
+                <a:sym typeface="Arial"/>
+              </a:defRPr>
             </a:lvl2pPr>
-            <a:lvl3pPr lvl="2">
-              <a:buNone/>
-              <a:defRPr/>
+            <a:lvl3pPr indent="0" lvl="2" marL="0" marR="0" algn="r">
+              <a:lnSpc>
+                <a:spcPct val="100000"/>
+              </a:lnSpc>
+              <a:spcBef>
+                <a:spcPts val="0"/>
+              </a:spcBef>
+              <a:spcAft>
+                <a:spcPts val="0"/>
+              </a:spcAft>
+              <a:buClr>
+                <a:srgbClr val="000000"/>
+              </a:buClr>
+              <a:buSzPts val="1000"/>
+              <a:buFont typeface="Arial"/>
+              <a:buNone/>
+              <a:defRPr b="0" i="0" sz="1000" u="none" cap="none" strike="noStrike">
+                <a:solidFill>
+                  <a:schemeClr val="dk2"/>
+                </a:solidFill>
+                <a:latin typeface="Arial"/>
+                <a:ea typeface="Arial"/>
+                <a:cs typeface="Arial"/>
+                <a:sym typeface="Arial"/>
+              </a:defRPr>
             </a:lvl3pPr>
-            <a:lvl4pPr lvl="3">
-              <a:buNone/>
-              <a:defRPr/>
+            <a:lvl4pPr indent="0" lvl="3" marL="0" marR="0" algn="r">
+              <a:lnSpc>
+                <a:spcPct val="100000"/>
+              </a:lnSpc>
+              <a:spcBef>
+                <a:spcPts val="0"/>
+              </a:spcBef>
+              <a:spcAft>
+                <a:spcPts val="0"/>
+              </a:spcAft>
+              <a:buClr>
+                <a:srgbClr val="000000"/>
+              </a:buClr>
+              <a:buSzPts val="1000"/>
+              <a:buFont typeface="Arial"/>
+              <a:buNone/>
+              <a:defRPr b="0" i="0" sz="1000" u="none" cap="none" strike="noStrike">
+                <a:solidFill>
+                  <a:schemeClr val="dk2"/>
+                </a:solidFill>
+                <a:latin typeface="Arial"/>
+                <a:ea typeface="Arial"/>
+                <a:cs typeface="Arial"/>
+                <a:sym typeface="Arial"/>
+              </a:defRPr>
             </a:lvl4pPr>
-            <a:lvl5pPr lvl="4">
-              <a:buNone/>
-              <a:defRPr/>
+            <a:lvl5pPr indent="0" lvl="4" marL="0" marR="0" algn="r">
+              <a:lnSpc>
+                <a:spcPct val="100000"/>
+              </a:lnSpc>
+              <a:spcBef>
+                <a:spcPts val="0"/>
+              </a:spcBef>
+              <a:spcAft>
+                <a:spcPts val="0"/>
+              </a:spcAft>
+              <a:buClr>
+                <a:srgbClr val="000000"/>
+              </a:buClr>
+              <a:buSzPts val="1000"/>
+              <a:buFont typeface="Arial"/>
+              <a:buNone/>
+              <a:defRPr b="0" i="0" sz="1000" u="none" cap="none" strike="noStrike">
+                <a:solidFill>
+                  <a:schemeClr val="dk2"/>
+                </a:solidFill>
+                <a:latin typeface="Arial"/>
+                <a:ea typeface="Arial"/>
+                <a:cs typeface="Arial"/>
+                <a:sym typeface="Arial"/>
+              </a:defRPr>
             </a:lvl5pPr>
-            <a:lvl6pPr lvl="5">
-              <a:buNone/>
-              <a:defRPr/>
+            <a:lvl6pPr indent="0" lvl="5" marL="0" marR="0" algn="r">
+              <a:lnSpc>
+                <a:spcPct val="100000"/>
+              </a:lnSpc>
+              <a:spcBef>
+                <a:spcPts val="0"/>
+              </a:spcBef>
+              <a:spcAft>
+                <a:spcPts val="0"/>
+              </a:spcAft>
+              <a:buClr>
+                <a:srgbClr val="000000"/>
+              </a:buClr>
+              <a:buSzPts val="1000"/>
+              <a:buFont typeface="Arial"/>
+              <a:buNone/>
+              <a:defRPr b="0" i="0" sz="1000" u="none" cap="none" strike="noStrike">
+                <a:solidFill>
+                  <a:schemeClr val="dk2"/>
+                </a:solidFill>
+                <a:latin typeface="Arial"/>
+                <a:ea typeface="Arial"/>
+                <a:cs typeface="Arial"/>
+                <a:sym typeface="Arial"/>
+              </a:defRPr>
             </a:lvl6pPr>
-            <a:lvl7pPr lvl="6">
-              <a:buNone/>
-              <a:defRPr/>
+            <a:lvl7pPr indent="0" lvl="6" marL="0" marR="0" algn="r">
+              <a:lnSpc>
+                <a:spcPct val="100000"/>
+              </a:lnSpc>
+              <a:spcBef>
+                <a:spcPts val="0"/>
+              </a:spcBef>
+              <a:spcAft>
+                <a:spcPts val="0"/>
+              </a:spcAft>
+              <a:buClr>
+                <a:srgbClr val="000000"/>
+              </a:buClr>
+              <a:buSzPts val="1000"/>
+              <a:buFont typeface="Arial"/>
+              <a:buNone/>
+              <a:defRPr b="0" i="0" sz="1000" u="none" cap="none" strike="noStrike">
+                <a:solidFill>
+                  <a:schemeClr val="dk2"/>
+                </a:solidFill>
+                <a:latin typeface="Arial"/>
+                <a:ea typeface="Arial"/>
+                <a:cs typeface="Arial"/>
+                <a:sym typeface="Arial"/>
+              </a:defRPr>
             </a:lvl7pPr>
-            <a:lvl8pPr lvl="7">
-              <a:buNone/>
-              <a:defRPr/>
+            <a:lvl8pPr indent="0" lvl="7" marL="0" marR="0" algn="r">
+              <a:lnSpc>
+                <a:spcPct val="100000"/>
+              </a:lnSpc>
+              <a:spcBef>
+                <a:spcPts val="0"/>
+              </a:spcBef>
+              <a:spcAft>
+                <a:spcPts val="0"/>
+              </a:spcAft>
+              <a:buClr>
+                <a:srgbClr val="000000"/>
+              </a:buClr>
+              <a:buSzPts val="1000"/>
+              <a:buFont typeface="Arial"/>
+              <a:buNone/>
+              <a:defRPr b="0" i="0" sz="1000" u="none" cap="none" strike="noStrike">
+                <a:solidFill>
+                  <a:schemeClr val="dk2"/>
+                </a:solidFill>
+                <a:latin typeface="Arial"/>
+                <a:ea typeface="Arial"/>
+                <a:cs typeface="Arial"/>
+                <a:sym typeface="Arial"/>
+              </a:defRPr>
             </a:lvl8pPr>
-            <a:lvl9pPr lvl="8">
-              <a:buNone/>
-              <a:defRPr/>
+            <a:lvl9pPr indent="0" lvl="8" marL="0" marR="0" algn="r">
+              <a:lnSpc>
+                <a:spcPct val="100000"/>
+              </a:lnSpc>
+              <a:spcBef>
+                <a:spcPts val="0"/>
+              </a:spcBef>
+              <a:spcAft>
+                <a:spcPts val="0"/>
+              </a:spcAft>
+              <a:buClr>
+                <a:srgbClr val="000000"/>
+              </a:buClr>
+              <a:buSzPts val="1000"/>
+              <a:buFont typeface="Arial"/>
+              <a:buNone/>
+              <a:defRPr b="0" i="0" sz="1000" u="none" cap="none" strike="noStrike">
+                <a:solidFill>
+                  <a:schemeClr val="dk2"/>
+                </a:solidFill>
+                <a:latin typeface="Arial"/>
+                <a:ea typeface="Arial"/>
+                <a:cs typeface="Arial"/>
+                <a:sym typeface="Arial"/>
+              </a:defRPr>
             </a:lvl9pPr>
           </a:lstStyle>
           <a:p>
@@ -4950,7 +7777,7 @@
       </p:grpSpPr>
       <p:sp>
         <p:nvSpPr>
-          <p:cNvPr id="42" name="Google Shape;42;p10"/>
+          <p:cNvPr id="42" name="Google Shape;42;p20"/>
           <p:cNvSpPr txBox="1"/>
           <p:nvPr>
             <p:ph idx="1" type="body"/>
@@ -4964,13 +7791,17 @@
           <a:prstGeom prst="rect">
             <a:avLst/>
           </a:prstGeom>
+          <a:noFill/>
+          <a:ln>
+            <a:noFill/>
+          </a:ln>
         </p:spPr>
         <p:txBody>
           <a:bodyPr anchorCtr="0" anchor="ctr" bIns="91425" lIns="91425" spcFirstLastPara="1" rIns="91425" wrap="square" tIns="91425">
             <a:normAutofit/>
           </a:bodyPr>
           <a:lstStyle>
-            <a:lvl1pPr indent="-228600" lvl="0" marL="457200">
+            <a:lvl1pPr indent="-228600" lvl="0" marL="457200" algn="l">
               <a:lnSpc>
                 <a:spcPct val="100000"/>
               </a:lnSpc>
@@ -4990,7 +7821,7 @@
       </p:sp>
       <p:sp>
         <p:nvSpPr>
-          <p:cNvPr id="43" name="Google Shape;43;p10"/>
+          <p:cNvPr id="43" name="Google Shape;43;p20"/>
           <p:cNvSpPr txBox="1"/>
           <p:nvPr>
             <p:ph idx="12" type="sldNum"/>
@@ -5004,47 +7835,249 @@
           <a:prstGeom prst="rect">
             <a:avLst/>
           </a:prstGeom>
+          <a:noFill/>
+          <a:ln>
+            <a:noFill/>
+          </a:ln>
         </p:spPr>
         <p:txBody>
           <a:bodyPr anchorCtr="0" anchor="ctr" bIns="91425" lIns="91425" spcFirstLastPara="1" rIns="91425" wrap="square" tIns="91425">
             <a:normAutofit/>
           </a:bodyPr>
           <a:lstStyle>
-            <a:lvl1pPr lvl="0">
-              <a:buNone/>
-              <a:defRPr/>
+            <a:lvl1pPr indent="0" lvl="0" marL="0" marR="0" algn="r">
+              <a:lnSpc>
+                <a:spcPct val="100000"/>
+              </a:lnSpc>
+              <a:spcBef>
+                <a:spcPts val="0"/>
+              </a:spcBef>
+              <a:spcAft>
+                <a:spcPts val="0"/>
+              </a:spcAft>
+              <a:buClr>
+                <a:srgbClr val="000000"/>
+              </a:buClr>
+              <a:buSzPts val="1000"/>
+              <a:buFont typeface="Arial"/>
+              <a:buNone/>
+              <a:defRPr b="0" i="0" sz="1000" u="none" cap="none" strike="noStrike">
+                <a:solidFill>
+                  <a:schemeClr val="dk2"/>
+                </a:solidFill>
+                <a:latin typeface="Arial"/>
+                <a:ea typeface="Arial"/>
+                <a:cs typeface="Arial"/>
+                <a:sym typeface="Arial"/>
+              </a:defRPr>
             </a:lvl1pPr>
-            <a:lvl2pPr lvl="1">
-              <a:buNone/>
-              <a:defRPr/>
+            <a:lvl2pPr indent="0" lvl="1" marL="0" marR="0" algn="r">
+              <a:lnSpc>
+                <a:spcPct val="100000"/>
+              </a:lnSpc>
+              <a:spcBef>
+                <a:spcPts val="0"/>
+              </a:spcBef>
+              <a:spcAft>
+                <a:spcPts val="0"/>
+              </a:spcAft>
+              <a:buClr>
+                <a:srgbClr val="000000"/>
+              </a:buClr>
+              <a:buSzPts val="1000"/>
+              <a:buFont typeface="Arial"/>
+              <a:buNone/>
+              <a:defRPr b="0" i="0" sz="1000" u="none" cap="none" strike="noStrike">
+                <a:solidFill>
+                  <a:schemeClr val="dk2"/>
+                </a:solidFill>
+                <a:latin typeface="Arial"/>
+                <a:ea typeface="Arial"/>
+                <a:cs typeface="Arial"/>
+                <a:sym typeface="Arial"/>
+              </a:defRPr>
             </a:lvl2pPr>
-            <a:lvl3pPr lvl="2">
-              <a:buNone/>
-              <a:defRPr/>
+            <a:lvl3pPr indent="0" lvl="2" marL="0" marR="0" algn="r">
+              <a:lnSpc>
+                <a:spcPct val="100000"/>
+              </a:lnSpc>
+              <a:spcBef>
+                <a:spcPts val="0"/>
+              </a:spcBef>
+              <a:spcAft>
+                <a:spcPts val="0"/>
+              </a:spcAft>
+              <a:buClr>
+                <a:srgbClr val="000000"/>
+              </a:buClr>
+              <a:buSzPts val="1000"/>
+              <a:buFont typeface="Arial"/>
+              <a:buNone/>
+              <a:defRPr b="0" i="0" sz="1000" u="none" cap="none" strike="noStrike">
+                <a:solidFill>
+                  <a:schemeClr val="dk2"/>
+                </a:solidFill>
+                <a:latin typeface="Arial"/>
+                <a:ea typeface="Arial"/>
+                <a:cs typeface="Arial"/>
+                <a:sym typeface="Arial"/>
+              </a:defRPr>
             </a:lvl3pPr>
-            <a:lvl4pPr lvl="3">
-              <a:buNone/>
-              <a:defRPr/>
+            <a:lvl4pPr indent="0" lvl="3" marL="0" marR="0" algn="r">
+              <a:lnSpc>
+                <a:spcPct val="100000"/>
+              </a:lnSpc>
+              <a:spcBef>
+                <a:spcPts val="0"/>
+              </a:spcBef>
+              <a:spcAft>
+                <a:spcPts val="0"/>
+              </a:spcAft>
+              <a:buClr>
+                <a:srgbClr val="000000"/>
+              </a:buClr>
+              <a:buSzPts val="1000"/>
+              <a:buFont typeface="Arial"/>
+              <a:buNone/>
+              <a:defRPr b="0" i="0" sz="1000" u="none" cap="none" strike="noStrike">
+                <a:solidFill>
+                  <a:schemeClr val="dk2"/>
+                </a:solidFill>
+                <a:latin typeface="Arial"/>
+                <a:ea typeface="Arial"/>
+                <a:cs typeface="Arial"/>
+                <a:sym typeface="Arial"/>
+              </a:defRPr>
             </a:lvl4pPr>
-            <a:lvl5pPr lvl="4">
-              <a:buNone/>
-              <a:defRPr/>
+            <a:lvl5pPr indent="0" lvl="4" marL="0" marR="0" algn="r">
+              <a:lnSpc>
+                <a:spcPct val="100000"/>
+              </a:lnSpc>
+              <a:spcBef>
+                <a:spcPts val="0"/>
+              </a:spcBef>
+              <a:spcAft>
+                <a:spcPts val="0"/>
+              </a:spcAft>
+              <a:buClr>
+                <a:srgbClr val="000000"/>
+              </a:buClr>
+              <a:buSzPts val="1000"/>
+              <a:buFont typeface="Arial"/>
+              <a:buNone/>
+              <a:defRPr b="0" i="0" sz="1000" u="none" cap="none" strike="noStrike">
+                <a:solidFill>
+                  <a:schemeClr val="dk2"/>
+                </a:solidFill>
+                <a:latin typeface="Arial"/>
+                <a:ea typeface="Arial"/>
+                <a:cs typeface="Arial"/>
+                <a:sym typeface="Arial"/>
+              </a:defRPr>
             </a:lvl5pPr>
-            <a:lvl6pPr lvl="5">
-              <a:buNone/>
-              <a:defRPr/>
+            <a:lvl6pPr indent="0" lvl="5" marL="0" marR="0" algn="r">
+              <a:lnSpc>
+                <a:spcPct val="100000"/>
+              </a:lnSpc>
+              <a:spcBef>
+                <a:spcPts val="0"/>
+              </a:spcBef>
+              <a:spcAft>
+                <a:spcPts val="0"/>
+              </a:spcAft>
+              <a:buClr>
+                <a:srgbClr val="000000"/>
+              </a:buClr>
+              <a:buSzPts val="1000"/>
+              <a:buFont typeface="Arial"/>
+              <a:buNone/>
+              <a:defRPr b="0" i="0" sz="1000" u="none" cap="none" strike="noStrike">
+                <a:solidFill>
+                  <a:schemeClr val="dk2"/>
+                </a:solidFill>
+                <a:latin typeface="Arial"/>
+                <a:ea typeface="Arial"/>
+                <a:cs typeface="Arial"/>
+                <a:sym typeface="Arial"/>
+              </a:defRPr>
             </a:lvl6pPr>
-            <a:lvl7pPr lvl="6">
-              <a:buNone/>
-              <a:defRPr/>
+            <a:lvl7pPr indent="0" lvl="6" marL="0" marR="0" algn="r">
+              <a:lnSpc>
+                <a:spcPct val="100000"/>
+              </a:lnSpc>
+              <a:spcBef>
+                <a:spcPts val="0"/>
+              </a:spcBef>
+              <a:spcAft>
+                <a:spcPts val="0"/>
+              </a:spcAft>
+              <a:buClr>
+                <a:srgbClr val="000000"/>
+              </a:buClr>
+              <a:buSzPts val="1000"/>
+              <a:buFont typeface="Arial"/>
+              <a:buNone/>
+              <a:defRPr b="0" i="0" sz="1000" u="none" cap="none" strike="noStrike">
+                <a:solidFill>
+                  <a:schemeClr val="dk2"/>
+                </a:solidFill>
+                <a:latin typeface="Arial"/>
+                <a:ea typeface="Arial"/>
+                <a:cs typeface="Arial"/>
+                <a:sym typeface="Arial"/>
+              </a:defRPr>
             </a:lvl7pPr>
-            <a:lvl8pPr lvl="7">
-              <a:buNone/>
-              <a:defRPr/>
+            <a:lvl8pPr indent="0" lvl="7" marL="0" marR="0" algn="r">
+              <a:lnSpc>
+                <a:spcPct val="100000"/>
+              </a:lnSpc>
+              <a:spcBef>
+                <a:spcPts val="0"/>
+              </a:spcBef>
+              <a:spcAft>
+                <a:spcPts val="0"/>
+              </a:spcAft>
+              <a:buClr>
+                <a:srgbClr val="000000"/>
+              </a:buClr>
+              <a:buSzPts val="1000"/>
+              <a:buFont typeface="Arial"/>
+              <a:buNone/>
+              <a:defRPr b="0" i="0" sz="1000" u="none" cap="none" strike="noStrike">
+                <a:solidFill>
+                  <a:schemeClr val="dk2"/>
+                </a:solidFill>
+                <a:latin typeface="Arial"/>
+                <a:ea typeface="Arial"/>
+                <a:cs typeface="Arial"/>
+                <a:sym typeface="Arial"/>
+              </a:defRPr>
             </a:lvl8pPr>
-            <a:lvl9pPr lvl="8">
-              <a:buNone/>
-              <a:defRPr/>
+            <a:lvl9pPr indent="0" lvl="8" marL="0" marR="0" algn="r">
+              <a:lnSpc>
+                <a:spcPct val="100000"/>
+              </a:lnSpc>
+              <a:spcBef>
+                <a:spcPts val="0"/>
+              </a:spcBef>
+              <a:spcAft>
+                <a:spcPts val="0"/>
+              </a:spcAft>
+              <a:buClr>
+                <a:srgbClr val="000000"/>
+              </a:buClr>
+              <a:buSzPts val="1000"/>
+              <a:buFont typeface="Arial"/>
+              <a:buNone/>
+              <a:defRPr b="0" i="0" sz="1000" u="none" cap="none" strike="noStrike">
+                <a:solidFill>
+                  <a:schemeClr val="dk2"/>
+                </a:solidFill>
+                <a:latin typeface="Arial"/>
+                <a:ea typeface="Arial"/>
+                <a:cs typeface="Arial"/>
+                <a:sym typeface="Arial"/>
+              </a:defRPr>
             </a:lvl9pPr>
           </a:lstStyle>
           <a:p>
@@ -5099,7 +8132,7 @@
       </p:grpSpPr>
       <p:sp>
         <p:nvSpPr>
-          <p:cNvPr id="6" name="Google Shape;6;p1"/>
+          <p:cNvPr id="6" name="Google Shape;6;p11"/>
           <p:cNvSpPr txBox="1"/>
           <p:nvPr>
             <p:ph type="title"/>
@@ -5123,7 +8156,10 @@
             <a:normAutofit/>
           </a:bodyPr>
           <a:lstStyle>
-            <a:lvl1pPr lvl="0">
+            <a:lvl1pPr lvl="0" marR="0" rtl="0" algn="l">
+              <a:lnSpc>
+                <a:spcPct val="100000"/>
+              </a:lnSpc>
               <a:spcBef>
                 <a:spcPts val="0"/>
               </a:spcBef>
@@ -5134,14 +8170,22 @@
                 <a:schemeClr val="dk1"/>
               </a:buClr>
               <a:buSzPts val="2800"/>
-              <a:buNone/>
-              <a:defRPr sz="2800">
+              <a:buFont typeface="Arial"/>
+              <a:buNone/>
+              <a:defRPr b="0" i="0" sz="2800" u="none" cap="none" strike="noStrike">
                 <a:solidFill>
                   <a:schemeClr val="dk1"/>
                 </a:solidFill>
+                <a:latin typeface="Arial"/>
+                <a:ea typeface="Arial"/>
+                <a:cs typeface="Arial"/>
+                <a:sym typeface="Arial"/>
               </a:defRPr>
             </a:lvl1pPr>
-            <a:lvl2pPr lvl="1">
+            <a:lvl2pPr lvl="1" marR="0" rtl="0" algn="l">
+              <a:lnSpc>
+                <a:spcPct val="100000"/>
+              </a:lnSpc>
               <a:spcBef>
                 <a:spcPts val="0"/>
               </a:spcBef>
@@ -5152,14 +8196,22 @@
                 <a:schemeClr val="dk1"/>
               </a:buClr>
               <a:buSzPts val="2800"/>
-              <a:buNone/>
-              <a:defRPr sz="2800">
+              <a:buFont typeface="Arial"/>
+              <a:buNone/>
+              <a:defRPr b="0" i="0" sz="2800" u="none" cap="none" strike="noStrike">
                 <a:solidFill>
                   <a:schemeClr val="dk1"/>
                 </a:solidFill>
+                <a:latin typeface="Arial"/>
+                <a:ea typeface="Arial"/>
+                <a:cs typeface="Arial"/>
+                <a:sym typeface="Arial"/>
               </a:defRPr>
             </a:lvl2pPr>
-            <a:lvl3pPr lvl="2">
+            <a:lvl3pPr lvl="2" marR="0" rtl="0" algn="l">
+              <a:lnSpc>
+                <a:spcPct val="100000"/>
+              </a:lnSpc>
               <a:spcBef>
                 <a:spcPts val="0"/>
               </a:spcBef>
@@ -5170,14 +8222,22 @@
                 <a:schemeClr val="dk1"/>
               </a:buClr>
               <a:buSzPts val="2800"/>
-              <a:buNone/>
-              <a:defRPr sz="2800">
+              <a:buFont typeface="Arial"/>
+              <a:buNone/>
+              <a:defRPr b="0" i="0" sz="2800" u="none" cap="none" strike="noStrike">
                 <a:solidFill>
                   <a:schemeClr val="dk1"/>
                 </a:solidFill>
+                <a:latin typeface="Arial"/>
+                <a:ea typeface="Arial"/>
+                <a:cs typeface="Arial"/>
+                <a:sym typeface="Arial"/>
               </a:defRPr>
             </a:lvl3pPr>
-            <a:lvl4pPr lvl="3">
+            <a:lvl4pPr lvl="3" marR="0" rtl="0" algn="l">
+              <a:lnSpc>
+                <a:spcPct val="100000"/>
+              </a:lnSpc>
               <a:spcBef>
                 <a:spcPts val="0"/>
               </a:spcBef>
@@ -5188,14 +8248,22 @@
                 <a:schemeClr val="dk1"/>
               </a:buClr>
               <a:buSzPts val="2800"/>
-              <a:buNone/>
-              <a:defRPr sz="2800">
+              <a:buFont typeface="Arial"/>
+              <a:buNone/>
+              <a:defRPr b="0" i="0" sz="2800" u="none" cap="none" strike="noStrike">
                 <a:solidFill>
                   <a:schemeClr val="dk1"/>
                 </a:solidFill>
+                <a:latin typeface="Arial"/>
+                <a:ea typeface="Arial"/>
+                <a:cs typeface="Arial"/>
+                <a:sym typeface="Arial"/>
               </a:defRPr>
             </a:lvl4pPr>
-            <a:lvl5pPr lvl="4">
+            <a:lvl5pPr lvl="4" marR="0" rtl="0" algn="l">
+              <a:lnSpc>
+                <a:spcPct val="100000"/>
+              </a:lnSpc>
               <a:spcBef>
                 <a:spcPts val="0"/>
               </a:spcBef>
@@ -5206,14 +8274,22 @@
                 <a:schemeClr val="dk1"/>
               </a:buClr>
               <a:buSzPts val="2800"/>
-              <a:buNone/>
-              <a:defRPr sz="2800">
+              <a:buFont typeface="Arial"/>
+              <a:buNone/>
+              <a:defRPr b="0" i="0" sz="2800" u="none" cap="none" strike="noStrike">
                 <a:solidFill>
                   <a:schemeClr val="dk1"/>
                 </a:solidFill>
+                <a:latin typeface="Arial"/>
+                <a:ea typeface="Arial"/>
+                <a:cs typeface="Arial"/>
+                <a:sym typeface="Arial"/>
               </a:defRPr>
             </a:lvl5pPr>
-            <a:lvl6pPr lvl="5">
+            <a:lvl6pPr lvl="5" marR="0" rtl="0" algn="l">
+              <a:lnSpc>
+                <a:spcPct val="100000"/>
+              </a:lnSpc>
               <a:spcBef>
                 <a:spcPts val="0"/>
               </a:spcBef>
@@ -5224,14 +8300,22 @@
                 <a:schemeClr val="dk1"/>
               </a:buClr>
               <a:buSzPts val="2800"/>
-              <a:buNone/>
-              <a:defRPr sz="2800">
+              <a:buFont typeface="Arial"/>
+              <a:buNone/>
+              <a:defRPr b="0" i="0" sz="2800" u="none" cap="none" strike="noStrike">
                 <a:solidFill>
                   <a:schemeClr val="dk1"/>
                 </a:solidFill>
+                <a:latin typeface="Arial"/>
+                <a:ea typeface="Arial"/>
+                <a:cs typeface="Arial"/>
+                <a:sym typeface="Arial"/>
               </a:defRPr>
             </a:lvl6pPr>
-            <a:lvl7pPr lvl="6">
+            <a:lvl7pPr lvl="6" marR="0" rtl="0" algn="l">
+              <a:lnSpc>
+                <a:spcPct val="100000"/>
+              </a:lnSpc>
               <a:spcBef>
                 <a:spcPts val="0"/>
               </a:spcBef>
@@ -5242,14 +8326,22 @@
                 <a:schemeClr val="dk1"/>
               </a:buClr>
               <a:buSzPts val="2800"/>
-              <a:buNone/>
-              <a:defRPr sz="2800">
+              <a:buFont typeface="Arial"/>
+              <a:buNone/>
+              <a:defRPr b="0" i="0" sz="2800" u="none" cap="none" strike="noStrike">
                 <a:solidFill>
                   <a:schemeClr val="dk1"/>
                 </a:solidFill>
+                <a:latin typeface="Arial"/>
+                <a:ea typeface="Arial"/>
+                <a:cs typeface="Arial"/>
+                <a:sym typeface="Arial"/>
               </a:defRPr>
             </a:lvl7pPr>
-            <a:lvl8pPr lvl="7">
+            <a:lvl8pPr lvl="7" marR="0" rtl="0" algn="l">
+              <a:lnSpc>
+                <a:spcPct val="100000"/>
+              </a:lnSpc>
               <a:spcBef>
                 <a:spcPts val="0"/>
               </a:spcBef>
@@ -5260,14 +8352,22 @@
                 <a:schemeClr val="dk1"/>
               </a:buClr>
               <a:buSzPts val="2800"/>
-              <a:buNone/>
-              <a:defRPr sz="2800">
+              <a:buFont typeface="Arial"/>
+              <a:buNone/>
+              <a:defRPr b="0" i="0" sz="2800" u="none" cap="none" strike="noStrike">
                 <a:solidFill>
                   <a:schemeClr val="dk1"/>
                 </a:solidFill>
+                <a:latin typeface="Arial"/>
+                <a:ea typeface="Arial"/>
+                <a:cs typeface="Arial"/>
+                <a:sym typeface="Arial"/>
               </a:defRPr>
             </a:lvl8pPr>
-            <a:lvl9pPr lvl="8">
+            <a:lvl9pPr lvl="8" marR="0" rtl="0" algn="l">
+              <a:lnSpc>
+                <a:spcPct val="100000"/>
+              </a:lnSpc>
               <a:spcBef>
                 <a:spcPts val="0"/>
               </a:spcBef>
@@ -5278,11 +8378,16 @@
                 <a:schemeClr val="dk1"/>
               </a:buClr>
               <a:buSzPts val="2800"/>
-              <a:buNone/>
-              <a:defRPr sz="2800">
+              <a:buFont typeface="Arial"/>
+              <a:buNone/>
+              <a:defRPr b="0" i="0" sz="2800" u="none" cap="none" strike="noStrike">
                 <a:solidFill>
                   <a:schemeClr val="dk1"/>
                 </a:solidFill>
+                <a:latin typeface="Arial"/>
+                <a:ea typeface="Arial"/>
+                <a:cs typeface="Arial"/>
+                <a:sym typeface="Arial"/>
               </a:defRPr>
             </a:lvl9pPr>
           </a:lstStyle>
@@ -5291,7 +8396,7 @@
       </p:sp>
       <p:sp>
         <p:nvSpPr>
-          <p:cNvPr id="7" name="Google Shape;7;p1"/>
+          <p:cNvPr id="7" name="Google Shape;7;p11"/>
           <p:cNvSpPr txBox="1"/>
           <p:nvPr>
             <p:ph idx="1" type="body"/>
@@ -5315,7 +8420,7 @@
             <a:normAutofit/>
           </a:bodyPr>
           <a:lstStyle>
-            <a:lvl1pPr indent="-342900" lvl="0" marL="457200">
+            <a:lvl1pPr indent="-342900" lvl="0" marL="457200" marR="0" rtl="0" algn="l">
               <a:lnSpc>
                 <a:spcPct val="115000"/>
               </a:lnSpc>
@@ -5329,14 +8434,19 @@
                 <a:schemeClr val="dk2"/>
               </a:buClr>
               <a:buSzPts val="1800"/>
+              <a:buFont typeface="Arial"/>
               <a:buChar char="●"/>
-              <a:defRPr sz="1800">
-                <a:solidFill>
-                  <a:schemeClr val="dk2"/>
-                </a:solidFill>
+              <a:defRPr b="0" i="0" sz="1800" u="none" cap="none" strike="noStrike">
+                <a:solidFill>
+                  <a:schemeClr val="dk2"/>
+                </a:solidFill>
+                <a:latin typeface="Arial"/>
+                <a:ea typeface="Arial"/>
+                <a:cs typeface="Arial"/>
+                <a:sym typeface="Arial"/>
               </a:defRPr>
             </a:lvl1pPr>
-            <a:lvl2pPr indent="-317500" lvl="1" marL="914400">
+            <a:lvl2pPr indent="-317500" lvl="1" marL="914400" marR="0" rtl="0" algn="l">
               <a:lnSpc>
                 <a:spcPct val="115000"/>
               </a:lnSpc>
@@ -5350,14 +8460,19 @@
                 <a:schemeClr val="dk2"/>
               </a:buClr>
               <a:buSzPts val="1400"/>
+              <a:buFont typeface="Arial"/>
               <a:buChar char="○"/>
-              <a:defRPr>
-                <a:solidFill>
-                  <a:schemeClr val="dk2"/>
-                </a:solidFill>
+              <a:defRPr b="0" i="0" sz="1400" u="none" cap="none" strike="noStrike">
+                <a:solidFill>
+                  <a:schemeClr val="dk2"/>
+                </a:solidFill>
+                <a:latin typeface="Arial"/>
+                <a:ea typeface="Arial"/>
+                <a:cs typeface="Arial"/>
+                <a:sym typeface="Arial"/>
               </a:defRPr>
             </a:lvl2pPr>
-            <a:lvl3pPr indent="-317500" lvl="2" marL="1371600">
+            <a:lvl3pPr indent="-317500" lvl="2" marL="1371600" marR="0" rtl="0" algn="l">
               <a:lnSpc>
                 <a:spcPct val="115000"/>
               </a:lnSpc>
@@ -5371,14 +8486,19 @@
                 <a:schemeClr val="dk2"/>
               </a:buClr>
               <a:buSzPts val="1400"/>
+              <a:buFont typeface="Arial"/>
               <a:buChar char="■"/>
-              <a:defRPr>
-                <a:solidFill>
-                  <a:schemeClr val="dk2"/>
-                </a:solidFill>
+              <a:defRPr b="0" i="0" sz="1400" u="none" cap="none" strike="noStrike">
+                <a:solidFill>
+                  <a:schemeClr val="dk2"/>
+                </a:solidFill>
+                <a:latin typeface="Arial"/>
+                <a:ea typeface="Arial"/>
+                <a:cs typeface="Arial"/>
+                <a:sym typeface="Arial"/>
               </a:defRPr>
             </a:lvl3pPr>
-            <a:lvl4pPr indent="-317500" lvl="3" marL="1828800">
+            <a:lvl4pPr indent="-317500" lvl="3" marL="1828800" marR="0" rtl="0" algn="l">
               <a:lnSpc>
                 <a:spcPct val="115000"/>
               </a:lnSpc>
@@ -5392,14 +8512,19 @@
                 <a:schemeClr val="dk2"/>
               </a:buClr>
               <a:buSzPts val="1400"/>
+              <a:buFont typeface="Arial"/>
               <a:buChar char="●"/>
-              <a:defRPr>
-                <a:solidFill>
-                  <a:schemeClr val="dk2"/>
-                </a:solidFill>
+              <a:defRPr b="0" i="0" sz="1400" u="none" cap="none" strike="noStrike">
+                <a:solidFill>
+                  <a:schemeClr val="dk2"/>
+                </a:solidFill>
+                <a:latin typeface="Arial"/>
+                <a:ea typeface="Arial"/>
+                <a:cs typeface="Arial"/>
+                <a:sym typeface="Arial"/>
               </a:defRPr>
             </a:lvl4pPr>
-            <a:lvl5pPr indent="-317500" lvl="4" marL="2286000">
+            <a:lvl5pPr indent="-317500" lvl="4" marL="2286000" marR="0" rtl="0" algn="l">
               <a:lnSpc>
                 <a:spcPct val="115000"/>
               </a:lnSpc>
@@ -5413,14 +8538,19 @@
                 <a:schemeClr val="dk2"/>
               </a:buClr>
               <a:buSzPts val="1400"/>
+              <a:buFont typeface="Arial"/>
               <a:buChar char="○"/>
-              <a:defRPr>
-                <a:solidFill>
-                  <a:schemeClr val="dk2"/>
-                </a:solidFill>
+              <a:defRPr b="0" i="0" sz="1400" u="none" cap="none" strike="noStrike">
+                <a:solidFill>
+                  <a:schemeClr val="dk2"/>
+                </a:solidFill>
+                <a:latin typeface="Arial"/>
+                <a:ea typeface="Arial"/>
+                <a:cs typeface="Arial"/>
+                <a:sym typeface="Arial"/>
               </a:defRPr>
             </a:lvl5pPr>
-            <a:lvl6pPr indent="-317500" lvl="5" marL="2743200">
+            <a:lvl6pPr indent="-317500" lvl="5" marL="2743200" marR="0" rtl="0" algn="l">
               <a:lnSpc>
                 <a:spcPct val="115000"/>
               </a:lnSpc>
@@ -5434,14 +8564,19 @@
                 <a:schemeClr val="dk2"/>
               </a:buClr>
               <a:buSzPts val="1400"/>
+              <a:buFont typeface="Arial"/>
               <a:buChar char="■"/>
-              <a:defRPr>
-                <a:solidFill>
-                  <a:schemeClr val="dk2"/>
-                </a:solidFill>
+              <a:defRPr b="0" i="0" sz="1400" u="none" cap="none" strike="noStrike">
+                <a:solidFill>
+                  <a:schemeClr val="dk2"/>
+                </a:solidFill>
+                <a:latin typeface="Arial"/>
+                <a:ea typeface="Arial"/>
+                <a:cs typeface="Arial"/>
+                <a:sym typeface="Arial"/>
               </a:defRPr>
             </a:lvl6pPr>
-            <a:lvl7pPr indent="-317500" lvl="6" marL="3200400">
+            <a:lvl7pPr indent="-317500" lvl="6" marL="3200400" marR="0" rtl="0" algn="l">
               <a:lnSpc>
                 <a:spcPct val="115000"/>
               </a:lnSpc>
@@ -5455,14 +8590,19 @@
                 <a:schemeClr val="dk2"/>
               </a:buClr>
               <a:buSzPts val="1400"/>
+              <a:buFont typeface="Arial"/>
               <a:buChar char="●"/>
-              <a:defRPr>
-                <a:solidFill>
-                  <a:schemeClr val="dk2"/>
-                </a:solidFill>
+              <a:defRPr b="0" i="0" sz="1400" u="none" cap="none" strike="noStrike">
+                <a:solidFill>
+                  <a:schemeClr val="dk2"/>
+                </a:solidFill>
+                <a:latin typeface="Arial"/>
+                <a:ea typeface="Arial"/>
+                <a:cs typeface="Arial"/>
+                <a:sym typeface="Arial"/>
               </a:defRPr>
             </a:lvl7pPr>
-            <a:lvl8pPr indent="-317500" lvl="7" marL="3657600">
+            <a:lvl8pPr indent="-317500" lvl="7" marL="3657600" marR="0" rtl="0" algn="l">
               <a:lnSpc>
                 <a:spcPct val="115000"/>
               </a:lnSpc>
@@ -5476,14 +8616,19 @@
                 <a:schemeClr val="dk2"/>
               </a:buClr>
               <a:buSzPts val="1400"/>
+              <a:buFont typeface="Arial"/>
               <a:buChar char="○"/>
-              <a:defRPr>
-                <a:solidFill>
-                  <a:schemeClr val="dk2"/>
-                </a:solidFill>
+              <a:defRPr b="0" i="0" sz="1400" u="none" cap="none" strike="noStrike">
+                <a:solidFill>
+                  <a:schemeClr val="dk2"/>
+                </a:solidFill>
+                <a:latin typeface="Arial"/>
+                <a:ea typeface="Arial"/>
+                <a:cs typeface="Arial"/>
+                <a:sym typeface="Arial"/>
               </a:defRPr>
             </a:lvl8pPr>
-            <a:lvl9pPr indent="-317500" lvl="8" marL="4114800">
+            <a:lvl9pPr indent="-317500" lvl="8" marL="4114800" marR="0" rtl="0" algn="l">
               <a:lnSpc>
                 <a:spcPct val="115000"/>
               </a:lnSpc>
@@ -5497,11 +8642,16 @@
                 <a:schemeClr val="dk2"/>
               </a:buClr>
               <a:buSzPts val="1400"/>
+              <a:buFont typeface="Arial"/>
               <a:buChar char="■"/>
-              <a:defRPr>
-                <a:solidFill>
-                  <a:schemeClr val="dk2"/>
-                </a:solidFill>
+              <a:defRPr b="0" i="0" sz="1400" u="none" cap="none" strike="noStrike">
+                <a:solidFill>
+                  <a:schemeClr val="dk2"/>
+                </a:solidFill>
+                <a:latin typeface="Arial"/>
+                <a:ea typeface="Arial"/>
+                <a:cs typeface="Arial"/>
+                <a:sym typeface="Arial"/>
               </a:defRPr>
             </a:lvl9pPr>
           </a:lstStyle>
@@ -5510,7 +8660,7 @@
       </p:sp>
       <p:sp>
         <p:nvSpPr>
-          <p:cNvPr id="8" name="Google Shape;8;p1"/>
+          <p:cNvPr id="8" name="Google Shape;8;p11"/>
           <p:cNvSpPr txBox="1"/>
           <p:nvPr>
             <p:ph idx="12" type="sldNum"/>
@@ -5534,76 +8684,238 @@
             <a:normAutofit/>
           </a:bodyPr>
           <a:lstStyle>
-            <a:lvl1pPr lvl="0" algn="r">
-              <a:buNone/>
-              <a:defRPr sz="1000">
-                <a:solidFill>
-                  <a:schemeClr val="dk2"/>
-                </a:solidFill>
+            <a:lvl1pPr indent="0" lvl="0" marL="0" marR="0" rtl="0" algn="r">
+              <a:lnSpc>
+                <a:spcPct val="100000"/>
+              </a:lnSpc>
+              <a:spcBef>
+                <a:spcPts val="0"/>
+              </a:spcBef>
+              <a:spcAft>
+                <a:spcPts val="0"/>
+              </a:spcAft>
+              <a:buClr>
+                <a:srgbClr val="000000"/>
+              </a:buClr>
+              <a:buSzPts val="1000"/>
+              <a:buFont typeface="Arial"/>
+              <a:buNone/>
+              <a:defRPr b="0" i="0" sz="1000" u="none" cap="none" strike="noStrike">
+                <a:solidFill>
+                  <a:schemeClr val="dk2"/>
+                </a:solidFill>
+                <a:latin typeface="Arial"/>
+                <a:ea typeface="Arial"/>
+                <a:cs typeface="Arial"/>
+                <a:sym typeface="Arial"/>
               </a:defRPr>
             </a:lvl1pPr>
-            <a:lvl2pPr lvl="1" algn="r">
-              <a:buNone/>
-              <a:defRPr sz="1000">
-                <a:solidFill>
-                  <a:schemeClr val="dk2"/>
-                </a:solidFill>
+            <a:lvl2pPr indent="0" lvl="1" marL="0" marR="0" rtl="0" algn="r">
+              <a:lnSpc>
+                <a:spcPct val="100000"/>
+              </a:lnSpc>
+              <a:spcBef>
+                <a:spcPts val="0"/>
+              </a:spcBef>
+              <a:spcAft>
+                <a:spcPts val="0"/>
+              </a:spcAft>
+              <a:buClr>
+                <a:srgbClr val="000000"/>
+              </a:buClr>
+              <a:buSzPts val="1000"/>
+              <a:buFont typeface="Arial"/>
+              <a:buNone/>
+              <a:defRPr b="0" i="0" sz="1000" u="none" cap="none" strike="noStrike">
+                <a:solidFill>
+                  <a:schemeClr val="dk2"/>
+                </a:solidFill>
+                <a:latin typeface="Arial"/>
+                <a:ea typeface="Arial"/>
+                <a:cs typeface="Arial"/>
+                <a:sym typeface="Arial"/>
               </a:defRPr>
             </a:lvl2pPr>
-            <a:lvl3pPr lvl="2" algn="r">
-              <a:buNone/>
-              <a:defRPr sz="1000">
-                <a:solidFill>
-                  <a:schemeClr val="dk2"/>
-                </a:solidFill>
+            <a:lvl3pPr indent="0" lvl="2" marL="0" marR="0" rtl="0" algn="r">
+              <a:lnSpc>
+                <a:spcPct val="100000"/>
+              </a:lnSpc>
+              <a:spcBef>
+                <a:spcPts val="0"/>
+              </a:spcBef>
+              <a:spcAft>
+                <a:spcPts val="0"/>
+              </a:spcAft>
+              <a:buClr>
+                <a:srgbClr val="000000"/>
+              </a:buClr>
+              <a:buSzPts val="1000"/>
+              <a:buFont typeface="Arial"/>
+              <a:buNone/>
+              <a:defRPr b="0" i="0" sz="1000" u="none" cap="none" strike="noStrike">
+                <a:solidFill>
+                  <a:schemeClr val="dk2"/>
+                </a:solidFill>
+                <a:latin typeface="Arial"/>
+                <a:ea typeface="Arial"/>
+                <a:cs typeface="Arial"/>
+                <a:sym typeface="Arial"/>
               </a:defRPr>
             </a:lvl3pPr>
-            <a:lvl4pPr lvl="3" algn="r">
-              <a:buNone/>
-              <a:defRPr sz="1000">
-                <a:solidFill>
-                  <a:schemeClr val="dk2"/>
-                </a:solidFill>
+            <a:lvl4pPr indent="0" lvl="3" marL="0" marR="0" rtl="0" algn="r">
+              <a:lnSpc>
+                <a:spcPct val="100000"/>
+              </a:lnSpc>
+              <a:spcBef>
+                <a:spcPts val="0"/>
+              </a:spcBef>
+              <a:spcAft>
+                <a:spcPts val="0"/>
+              </a:spcAft>
+              <a:buClr>
+                <a:srgbClr val="000000"/>
+              </a:buClr>
+              <a:buSzPts val="1000"/>
+              <a:buFont typeface="Arial"/>
+              <a:buNone/>
+              <a:defRPr b="0" i="0" sz="1000" u="none" cap="none" strike="noStrike">
+                <a:solidFill>
+                  <a:schemeClr val="dk2"/>
+                </a:solidFill>
+                <a:latin typeface="Arial"/>
+                <a:ea typeface="Arial"/>
+                <a:cs typeface="Arial"/>
+                <a:sym typeface="Arial"/>
               </a:defRPr>
             </a:lvl4pPr>
-            <a:lvl5pPr lvl="4" algn="r">
-              <a:buNone/>
-              <a:defRPr sz="1000">
-                <a:solidFill>
-                  <a:schemeClr val="dk2"/>
-                </a:solidFill>
+            <a:lvl5pPr indent="0" lvl="4" marL="0" marR="0" rtl="0" algn="r">
+              <a:lnSpc>
+                <a:spcPct val="100000"/>
+              </a:lnSpc>
+              <a:spcBef>
+                <a:spcPts val="0"/>
+              </a:spcBef>
+              <a:spcAft>
+                <a:spcPts val="0"/>
+              </a:spcAft>
+              <a:buClr>
+                <a:srgbClr val="000000"/>
+              </a:buClr>
+              <a:buSzPts val="1000"/>
+              <a:buFont typeface="Arial"/>
+              <a:buNone/>
+              <a:defRPr b="0" i="0" sz="1000" u="none" cap="none" strike="noStrike">
+                <a:solidFill>
+                  <a:schemeClr val="dk2"/>
+                </a:solidFill>
+                <a:latin typeface="Arial"/>
+                <a:ea typeface="Arial"/>
+                <a:cs typeface="Arial"/>
+                <a:sym typeface="Arial"/>
               </a:defRPr>
             </a:lvl5pPr>
-            <a:lvl6pPr lvl="5" algn="r">
-              <a:buNone/>
-              <a:defRPr sz="1000">
-                <a:solidFill>
-                  <a:schemeClr val="dk2"/>
-                </a:solidFill>
+            <a:lvl6pPr indent="0" lvl="5" marL="0" marR="0" rtl="0" algn="r">
+              <a:lnSpc>
+                <a:spcPct val="100000"/>
+              </a:lnSpc>
+              <a:spcBef>
+                <a:spcPts val="0"/>
+              </a:spcBef>
+              <a:spcAft>
+                <a:spcPts val="0"/>
+              </a:spcAft>
+              <a:buClr>
+                <a:srgbClr val="000000"/>
+              </a:buClr>
+              <a:buSzPts val="1000"/>
+              <a:buFont typeface="Arial"/>
+              <a:buNone/>
+              <a:defRPr b="0" i="0" sz="1000" u="none" cap="none" strike="noStrike">
+                <a:solidFill>
+                  <a:schemeClr val="dk2"/>
+                </a:solidFill>
+                <a:latin typeface="Arial"/>
+                <a:ea typeface="Arial"/>
+                <a:cs typeface="Arial"/>
+                <a:sym typeface="Arial"/>
               </a:defRPr>
             </a:lvl6pPr>
-            <a:lvl7pPr lvl="6" algn="r">
-              <a:buNone/>
-              <a:defRPr sz="1000">
-                <a:solidFill>
-                  <a:schemeClr val="dk2"/>
-                </a:solidFill>
+            <a:lvl7pPr indent="0" lvl="6" marL="0" marR="0" rtl="0" algn="r">
+              <a:lnSpc>
+                <a:spcPct val="100000"/>
+              </a:lnSpc>
+              <a:spcBef>
+                <a:spcPts val="0"/>
+              </a:spcBef>
+              <a:spcAft>
+                <a:spcPts val="0"/>
+              </a:spcAft>
+              <a:buClr>
+                <a:srgbClr val="000000"/>
+              </a:buClr>
+              <a:buSzPts val="1000"/>
+              <a:buFont typeface="Arial"/>
+              <a:buNone/>
+              <a:defRPr b="0" i="0" sz="1000" u="none" cap="none" strike="noStrike">
+                <a:solidFill>
+                  <a:schemeClr val="dk2"/>
+                </a:solidFill>
+                <a:latin typeface="Arial"/>
+                <a:ea typeface="Arial"/>
+                <a:cs typeface="Arial"/>
+                <a:sym typeface="Arial"/>
               </a:defRPr>
             </a:lvl7pPr>
-            <a:lvl8pPr lvl="7" algn="r">
-              <a:buNone/>
-              <a:defRPr sz="1000">
-                <a:solidFill>
-                  <a:schemeClr val="dk2"/>
-                </a:solidFill>
+            <a:lvl8pPr indent="0" lvl="7" marL="0" marR="0" rtl="0" algn="r">
+              <a:lnSpc>
+                <a:spcPct val="100000"/>
+              </a:lnSpc>
+              <a:spcBef>
+                <a:spcPts val="0"/>
+              </a:spcBef>
+              <a:spcAft>
+                <a:spcPts val="0"/>
+              </a:spcAft>
+              <a:buClr>
+                <a:srgbClr val="000000"/>
+              </a:buClr>
+              <a:buSzPts val="1000"/>
+              <a:buFont typeface="Arial"/>
+              <a:buNone/>
+              <a:defRPr b="0" i="0" sz="1000" u="none" cap="none" strike="noStrike">
+                <a:solidFill>
+                  <a:schemeClr val="dk2"/>
+                </a:solidFill>
+                <a:latin typeface="Arial"/>
+                <a:ea typeface="Arial"/>
+                <a:cs typeface="Arial"/>
+                <a:sym typeface="Arial"/>
               </a:defRPr>
             </a:lvl8pPr>
-            <a:lvl9pPr lvl="8" algn="r">
-              <a:buNone/>
-              <a:defRPr sz="1000">
-                <a:solidFill>
-                  <a:schemeClr val="dk2"/>
-                </a:solidFill>
+            <a:lvl9pPr indent="0" lvl="8" marL="0" marR="0" rtl="0" algn="r">
+              <a:lnSpc>
+                <a:spcPct val="100000"/>
+              </a:lnSpc>
+              <a:spcBef>
+                <a:spcPts val="0"/>
+              </a:spcBef>
+              <a:spcAft>
+                <a:spcPts val="0"/>
+              </a:spcAft>
+              <a:buClr>
+                <a:srgbClr val="000000"/>
+              </a:buClr>
+              <a:buSzPts val="1000"/>
+              <a:buFont typeface="Arial"/>
+              <a:buNone/>
+              <a:defRPr b="0" i="0" sz="1000" u="none" cap="none" strike="noStrike">
+                <a:solidFill>
+                  <a:schemeClr val="dk2"/>
+                </a:solidFill>
+                <a:latin typeface="Arial"/>
+                <a:ea typeface="Arial"/>
+                <a:cs typeface="Arial"/>
+                <a:sym typeface="Arial"/>
               </a:defRPr>
             </a:lvl9pPr>
           </a:lstStyle>
@@ -5629,17 +8941,17 @@
   </p:cSld>
   <p:clrMap accent1="accent1" accent2="accent2" accent3="accent3" accent4="accent4" accent5="accent5" accent6="accent6" bg1="lt1" bg2="dk2" tx1="dk1" tx2="lt2" folHlink="folHlink" hlink="hlink"/>
   <p:sldLayoutIdLst>
-    <p:sldLayoutId id="2147483648" r:id="rId1"/>
-    <p:sldLayoutId id="2147483649" r:id="rId2"/>
-    <p:sldLayoutId id="2147483650" r:id="rId3"/>
-    <p:sldLayoutId id="2147483651" r:id="rId4"/>
-    <p:sldLayoutId id="2147483652" r:id="rId5"/>
-    <p:sldLayoutId id="2147483653" r:id="rId6"/>
-    <p:sldLayoutId id="2147483654" r:id="rId7"/>
-    <p:sldLayoutId id="2147483655" r:id="rId8"/>
-    <p:sldLayoutId id="2147483656" r:id="rId9"/>
-    <p:sldLayoutId id="2147483657" r:id="rId10"/>
-    <p:sldLayoutId id="2147483658" r:id="rId11"/>
+    <p:sldLayoutId id="2147483649" r:id="rId1"/>
+    <p:sldLayoutId id="2147483650" r:id="rId2"/>
+    <p:sldLayoutId id="2147483651" r:id="rId3"/>
+    <p:sldLayoutId id="2147483652" r:id="rId4"/>
+    <p:sldLayoutId id="2147483653" r:id="rId5"/>
+    <p:sldLayoutId id="2147483654" r:id="rId6"/>
+    <p:sldLayoutId id="2147483655" r:id="rId7"/>
+    <p:sldLayoutId id="2147483656" r:id="rId8"/>
+    <p:sldLayoutId id="2147483657" r:id="rId9"/>
+    <p:sldLayoutId id="2147483658" r:id="rId10"/>
+    <p:sldLayoutId id="2147483659" r:id="rId11"/>
   </p:sldLayoutIdLst>
   <p:hf dt="0" ftr="0" hdr="0" sldNum="0"/>
   <p:txStyles>
@@ -6353,17 +9665,16 @@
       </p:grpSpPr>
       <p:pic>
         <p:nvPicPr>
-          <p:cNvPr id="54" name="Google Shape;54;p13"/>
+          <p:cNvPr id="54" name="Google Shape;54;p1"/>
           <p:cNvPicPr preferRelativeResize="0"/>
           <p:nvPr/>
         </p:nvPicPr>
-        <p:blipFill>
+        <p:blipFill rotWithShape="1">
           <a:blip r:embed="rId3">
             <a:alphaModFix/>
           </a:blip>
-          <a:stretch>
-            <a:fillRect/>
-          </a:stretch>
+          <a:srcRect b="0" l="0" r="0" t="0"/>
+          <a:stretch/>
         </p:blipFill>
         <p:spPr>
           <a:xfrm>
@@ -6406,17 +9717,16 @@
       </p:grpSpPr>
       <p:pic>
         <p:nvPicPr>
-          <p:cNvPr id="104" name="Google Shape;104;p22"/>
+          <p:cNvPr id="104" name="Google Shape;104;p10"/>
           <p:cNvPicPr preferRelativeResize="0"/>
           <p:nvPr/>
         </p:nvPicPr>
-        <p:blipFill>
+        <p:blipFill rotWithShape="1">
           <a:blip r:embed="rId3">
             <a:alphaModFix/>
           </a:blip>
-          <a:stretch>
-            <a:fillRect/>
-          </a:stretch>
+          <a:srcRect b="0" l="0" r="0" t="0"/>
+          <a:stretch/>
         </p:blipFill>
         <p:spPr>
           <a:xfrm>
@@ -6459,17 +9769,16 @@
       </p:grpSpPr>
       <p:pic>
         <p:nvPicPr>
-          <p:cNvPr id="59" name="Google Shape;59;p14"/>
+          <p:cNvPr id="59" name="Google Shape;59;p2"/>
           <p:cNvPicPr preferRelativeResize="0"/>
           <p:nvPr/>
         </p:nvPicPr>
-        <p:blipFill>
+        <p:blipFill rotWithShape="1">
           <a:blip r:embed="rId3">
             <a:alphaModFix/>
           </a:blip>
-          <a:stretch>
-            <a:fillRect/>
-          </a:stretch>
+          <a:srcRect b="0" l="0" r="0" t="0"/>
+          <a:stretch/>
         </p:blipFill>
         <p:spPr>
           <a:xfrm>
@@ -6512,7 +9821,7 @@
       </p:grpSpPr>
       <p:sp>
         <p:nvSpPr>
-          <p:cNvPr id="64" name="Google Shape;64;p15"/>
+          <p:cNvPr id="64" name="Google Shape;64;p3"/>
           <p:cNvSpPr txBox="1"/>
           <p:nvPr>
             <p:ph type="title"/>
@@ -6526,6 +9835,10 @@
           <a:prstGeom prst="rect">
             <a:avLst/>
           </a:prstGeom>
+          <a:noFill/>
+          <a:ln>
+            <a:noFill/>
+          </a:ln>
         </p:spPr>
         <p:txBody>
           <a:bodyPr anchorCtr="0" anchor="t" bIns="91425" lIns="91425" spcFirstLastPara="1" rIns="91425" wrap="square" tIns="91425">
@@ -6534,12 +9847,16 @@
           <a:lstStyle/>
           <a:p>
             <a:pPr indent="0" lvl="0" marL="0" rtl="0" algn="l">
-              <a:spcBef>
-                <a:spcPts val="0"/>
-              </a:spcBef>
-              <a:spcAft>
-                <a:spcPts val="0"/>
-              </a:spcAft>
+              <a:lnSpc>
+                <a:spcPct val="100000"/>
+              </a:lnSpc>
+              <a:spcBef>
+                <a:spcPts val="0"/>
+              </a:spcBef>
+              <a:spcAft>
+                <a:spcPts val="0"/>
+              </a:spcAft>
+              <a:buSzPct val="111111"/>
               <a:buNone/>
             </a:pPr>
             <a:r>
@@ -6551,7 +9868,7 @@
       </p:sp>
       <p:sp>
         <p:nvSpPr>
-          <p:cNvPr id="65" name="Google Shape;65;p15"/>
+          <p:cNvPr id="65" name="Google Shape;65;p3"/>
           <p:cNvSpPr txBox="1"/>
           <p:nvPr>
             <p:ph idx="1" type="body"/>
@@ -6565,6 +9882,10 @@
           <a:prstGeom prst="rect">
             <a:avLst/>
           </a:prstGeom>
+          <a:noFill/>
+          <a:ln>
+            <a:noFill/>
+          </a:ln>
         </p:spPr>
         <p:txBody>
           <a:bodyPr anchorCtr="0" anchor="t" bIns="91425" lIns="91425" spcFirstLastPara="1" rIns="91425" wrap="square" tIns="91425">
@@ -6573,12 +9894,16 @@
           <a:lstStyle/>
           <a:p>
             <a:pPr indent="0" lvl="0" marL="0" rtl="0" algn="l">
+              <a:lnSpc>
+                <a:spcPct val="115000"/>
+              </a:lnSpc>
               <a:spcBef>
                 <a:spcPts val="0"/>
               </a:spcBef>
               <a:spcAft>
                 <a:spcPts val="1200"/>
               </a:spcAft>
+              <a:buSzPts val="1800"/>
               <a:buNone/>
             </a:pPr>
             <a:r>
@@ -6590,17 +9915,16 @@
       </p:sp>
       <p:pic>
         <p:nvPicPr>
-          <p:cNvPr id="66" name="Google Shape;66;p15"/>
+          <p:cNvPr id="66" name="Google Shape;66;p3"/>
           <p:cNvPicPr preferRelativeResize="0"/>
           <p:nvPr/>
         </p:nvPicPr>
-        <p:blipFill>
+        <p:blipFill rotWithShape="1">
           <a:blip r:embed="rId3">
             <a:alphaModFix/>
           </a:blip>
-          <a:stretch>
-            <a:fillRect/>
-          </a:stretch>
+          <a:srcRect b="0" l="0" r="0" t="0"/>
+          <a:stretch/>
         </p:blipFill>
         <p:spPr>
           <a:xfrm>
@@ -6643,17 +9967,16 @@
       </p:grpSpPr>
       <p:pic>
         <p:nvPicPr>
-          <p:cNvPr id="71" name="Google Shape;71;p16"/>
+          <p:cNvPr id="71" name="Google Shape;71;p4"/>
           <p:cNvPicPr preferRelativeResize="0"/>
           <p:nvPr/>
         </p:nvPicPr>
-        <p:blipFill>
+        <p:blipFill rotWithShape="1">
           <a:blip r:embed="rId3">
             <a:alphaModFix/>
           </a:blip>
-          <a:stretch>
-            <a:fillRect/>
-          </a:stretch>
+          <a:srcRect b="0" l="0" r="0" t="0"/>
+          <a:stretch/>
         </p:blipFill>
         <p:spPr>
           <a:xfrm>
@@ -6671,17 +9994,16 @@
       </p:pic>
       <p:pic>
         <p:nvPicPr>
-          <p:cNvPr id="72" name="Google Shape;72;p16"/>
+          <p:cNvPr id="72" name="Google Shape;72;p4"/>
           <p:cNvPicPr preferRelativeResize="0"/>
           <p:nvPr/>
         </p:nvPicPr>
-        <p:blipFill>
+        <p:blipFill rotWithShape="1">
           <a:blip r:embed="rId4">
             <a:alphaModFix/>
           </a:blip>
-          <a:stretch>
-            <a:fillRect/>
-          </a:stretch>
+          <a:srcRect b="0" l="0" r="0" t="0"/>
+          <a:stretch/>
         </p:blipFill>
         <p:spPr>
           <a:xfrm>
@@ -6724,17 +10046,16 @@
       </p:grpSpPr>
       <p:pic>
         <p:nvPicPr>
-          <p:cNvPr id="77" name="Google Shape;77;p17"/>
+          <p:cNvPr id="77" name="Google Shape;77;p5"/>
           <p:cNvPicPr preferRelativeResize="0"/>
           <p:nvPr/>
         </p:nvPicPr>
-        <p:blipFill>
+        <p:blipFill rotWithShape="1">
           <a:blip r:embed="rId3">
             <a:alphaModFix/>
           </a:blip>
-          <a:stretch>
-            <a:fillRect/>
-          </a:stretch>
+          <a:srcRect b="0" l="0" r="0" t="0"/>
+          <a:stretch/>
         </p:blipFill>
         <p:spPr>
           <a:xfrm>
@@ -6777,17 +10098,16 @@
       </p:grpSpPr>
       <p:pic>
         <p:nvPicPr>
-          <p:cNvPr id="82" name="Google Shape;82;p18"/>
+          <p:cNvPr id="82" name="Google Shape;82;p6"/>
           <p:cNvPicPr preferRelativeResize="0"/>
           <p:nvPr/>
         </p:nvPicPr>
-        <p:blipFill>
+        <p:blipFill rotWithShape="1">
           <a:blip r:embed="rId3">
             <a:alphaModFix/>
           </a:blip>
-          <a:stretch>
-            <a:fillRect/>
-          </a:stretch>
+          <a:srcRect b="0" l="0" r="0" t="0"/>
+          <a:stretch/>
         </p:blipFill>
         <p:spPr>
           <a:xfrm>
@@ -6830,17 +10150,16 @@
       </p:grpSpPr>
       <p:pic>
         <p:nvPicPr>
-          <p:cNvPr id="87" name="Google Shape;87;p19"/>
+          <p:cNvPr id="87" name="Google Shape;87;p7"/>
           <p:cNvPicPr preferRelativeResize="0"/>
           <p:nvPr/>
         </p:nvPicPr>
-        <p:blipFill>
+        <p:blipFill rotWithShape="1">
           <a:blip r:embed="rId3">
             <a:alphaModFix/>
           </a:blip>
-          <a:stretch>
-            <a:fillRect/>
-          </a:stretch>
+          <a:srcRect b="0" l="0" r="0" t="0"/>
+          <a:stretch/>
         </p:blipFill>
         <p:spPr>
           <a:xfrm>
@@ -6858,17 +10177,16 @@
       </p:pic>
       <p:pic>
         <p:nvPicPr>
-          <p:cNvPr id="88" name="Google Shape;88;p19"/>
+          <p:cNvPr id="88" name="Google Shape;88;p7"/>
           <p:cNvPicPr preferRelativeResize="0"/>
           <p:nvPr/>
         </p:nvPicPr>
-        <p:blipFill>
+        <p:blipFill rotWithShape="1">
           <a:blip r:embed="rId4">
             <a:alphaModFix/>
           </a:blip>
-          <a:stretch>
-            <a:fillRect/>
-          </a:stretch>
+          <a:srcRect b="0" l="0" r="0" t="0"/>
+          <a:stretch/>
         </p:blipFill>
         <p:spPr>
           <a:xfrm>
@@ -6911,17 +10229,16 @@
       </p:grpSpPr>
       <p:pic>
         <p:nvPicPr>
-          <p:cNvPr id="93" name="Google Shape;93;p20"/>
+          <p:cNvPr id="93" name="Google Shape;93;p8"/>
           <p:cNvPicPr preferRelativeResize="0"/>
           <p:nvPr/>
         </p:nvPicPr>
-        <p:blipFill>
+        <p:blipFill rotWithShape="1">
           <a:blip r:embed="rId3">
             <a:alphaModFix/>
           </a:blip>
-          <a:stretch>
-            <a:fillRect/>
-          </a:stretch>
+          <a:srcRect b="0" l="0" r="0" t="0"/>
+          <a:stretch/>
         </p:blipFill>
         <p:spPr>
           <a:xfrm>
@@ -6939,7 +10256,7 @@
       </p:pic>
       <p:pic>
         <p:nvPicPr>
-          <p:cNvPr id="94" name="Google Shape;94;p20"/>
+          <p:cNvPr id="94" name="Google Shape;94;p8"/>
           <p:cNvPicPr preferRelativeResize="0"/>
           <p:nvPr/>
         </p:nvPicPr>
@@ -6953,8 +10270,8 @@
         </p:blipFill>
         <p:spPr>
           <a:xfrm>
-            <a:off x="4791225" y="1366925"/>
-            <a:ext cx="4005499" cy="3494875"/>
+            <a:off x="4782806" y="1348025"/>
+            <a:ext cx="4027249" cy="3569599"/>
           </a:xfrm>
           <a:prstGeom prst="rect">
             <a:avLst/>
@@ -6992,17 +10309,16 @@
       </p:grpSpPr>
       <p:pic>
         <p:nvPicPr>
-          <p:cNvPr id="99" name="Google Shape;99;p21"/>
+          <p:cNvPr id="99" name="Google Shape;99;p9"/>
           <p:cNvPicPr preferRelativeResize="0"/>
           <p:nvPr/>
         </p:nvPicPr>
-        <p:blipFill>
+        <p:blipFill rotWithShape="1">
           <a:blip r:embed="rId3">
             <a:alphaModFix/>
           </a:blip>
-          <a:stretch>
-            <a:fillRect/>
-          </a:stretch>
+          <a:srcRect b="0" l="0" r="0" t="0"/>
+          <a:stretch/>
         </p:blipFill>
         <p:spPr>
           <a:xfrm>
